--- a/output/wordlabs-tend-3day.pptx
+++ b/output/wordlabs-tend-3day.pptx
@@ -4240,7 +4240,7 @@
                 <a:ea typeface="Calibri" pitchFamily="34" charset="-122"/>
                 <a:cs typeface="Calibri" pitchFamily="34" charset="-120"/>
               </a:rPr>
-              <a:t>"to stretch, reach, or extend"</a:t>
+              <a:t>"stretch, reach, or extend"</a:t>
             </a:r>
             <a:endParaRPr lang="en-US" sz="2200" dirty="0"/>
           </a:p>
@@ -5288,7 +5288,7 @@
                 <a:ea typeface="Calibri" pitchFamily="34" charset="-122"/>
                 <a:cs typeface="Calibri" pitchFamily="34" charset="-120"/>
               </a:rPr>
-              <a:t>Word Labs  •  wordlabs.app  •  Root: 'tend' = to stretch, reach, or extend</a:t>
+              <a:t>Word Labs  •  wordlabs.app  •  Root: 'tend' = stretch, reach, or extend</a:t>
             </a:r>
             <a:endParaRPr lang="en-US" sz="800" dirty="0"/>
           </a:p>
@@ -5928,7 +5928,7 @@
                 <a:ea typeface="Calibri" pitchFamily="34" charset="-122"/>
                 <a:cs typeface="Calibri" pitchFamily="34" charset="-120"/>
               </a:rPr>
-              <a:t>Word Labs  •  wordlabs.app  •  Root: 'tend' = to stretch, reach, or extend</a:t>
+              <a:t>Word Labs  •  wordlabs.app  •  Root: 'tend' = stretch, reach, or extend</a:t>
             </a:r>
             <a:endParaRPr lang="en-US" sz="800" dirty="0"/>
           </a:p>
@@ -6040,7 +6040,7 @@
                 <a:ea typeface="Calibri" pitchFamily="34" charset="-122"/>
                 <a:cs typeface="Calibri" pitchFamily="34" charset="-120"/>
               </a:rPr>
-              <a:t>Did you </a:t>
+              <a:t>Do you </a:t>
             </a:r>
             <a:pPr algn="l" indent="0" marL="0">
               <a:buNone/>
@@ -6088,7 +6088,7 @@
                 <a:ea typeface="Calibri" pitchFamily="34" charset="-122"/>
                 <a:cs typeface="Calibri" pitchFamily="34" charset="-120"/>
               </a:rPr>
-              <a:t>attend</a:t>
+              <a:t>extend</a:t>
             </a:r>
             <a:pPr algn="l" indent="0" marL="0">
               <a:buNone/>
@@ -6102,7 +6102,7 @@
                 <a:ea typeface="Calibri" pitchFamily="34" charset="-122"/>
                 <a:cs typeface="Calibri" pitchFamily="34" charset="-120"/>
               </a:rPr>
-              <a:t> the excursion, or did you forget to hand in your form?</a:t>
+              <a:t> your project before it is due?</a:t>
             </a:r>
             <a:endParaRPr lang="en-US" sz="1800" dirty="0"/>
           </a:p>
@@ -6385,7 +6385,7 @@
                 <a:ea typeface="Trebuchet MS" pitchFamily="34" charset="-122"/>
                 <a:cs typeface="Trebuchet MS" pitchFamily="34" charset="-120"/>
               </a:rPr>
-              <a:t>attend</a:t>
+              <a:t>extend</a:t>
             </a:r>
             <a:endParaRPr lang="en-US" sz="1400" dirty="0"/>
           </a:p>
@@ -6716,7 +6716,7 @@
                 <a:ea typeface="Calibri" pitchFamily="34" charset="-122"/>
                 <a:cs typeface="Calibri" pitchFamily="34" charset="-120"/>
               </a:rPr>
-              <a:t>Word Labs  •  wordlabs.app  •  Root: 'tend' = to stretch, reach, or extend</a:t>
+              <a:t>Word Labs  •  wordlabs.app  •  Root: 'tend' = stretch, reach, or extend</a:t>
             </a:r>
             <a:endParaRPr lang="en-US" sz="800" dirty="0"/>
           </a:p>
@@ -7543,7 +7543,7 @@
                 <a:ea typeface="Calibri" pitchFamily="34" charset="-122"/>
                 <a:cs typeface="Calibri" pitchFamily="34" charset="-120"/>
               </a:rPr>
-              <a:t>Word Labs  •  wordlabs.app  •  Root: 'tend' = to stretch, reach, or extend</a:t>
+              <a:t>Word Labs  •  wordlabs.app  •  Root: 'tend' = stretch, reach, or extend</a:t>
             </a:r>
             <a:endParaRPr lang="en-US" sz="800" dirty="0"/>
           </a:p>
@@ -7860,7 +7860,7 @@
                 <a:ea typeface="Calibri" pitchFamily="34" charset="-122"/>
                 <a:cs typeface="Calibri" pitchFamily="34" charset="-120"/>
               </a:rPr>
-              <a:t>toward, into</a:t>
+              <a:t>into, towards</a:t>
             </a:r>
             <a:endParaRPr lang="en-US" sz="850" dirty="0"/>
           </a:p>
@@ -7972,7 +7972,7 @@
                 <a:ea typeface="Calibri" pitchFamily="34" charset="-122"/>
                 <a:cs typeface="Calibri" pitchFamily="34" charset="-120"/>
               </a:rPr>
-              <a:t>to stretch or reach</a:t>
+              <a:t>stretch, reach</a:t>
             </a:r>
             <a:endParaRPr lang="en-US" sz="850" dirty="0"/>
           </a:p>
@@ -8528,7 +8528,7 @@
                 <a:ea typeface="Calibri" pitchFamily="34" charset="-122"/>
                 <a:cs typeface="Calibri" pitchFamily="34" charset="-120"/>
               </a:rPr>
-              <a:t>Word Labs  •  wordlabs.app  •  Root: 'tend' = to stretch, reach, or extend</a:t>
+              <a:t>Word Labs  •  wordlabs.app  •  Root: 'tend' = stretch, reach, or extend</a:t>
             </a:r>
             <a:endParaRPr lang="en-US" sz="800" dirty="0"/>
           </a:p>
@@ -8845,7 +8845,7 @@
                 <a:ea typeface="Calibri" pitchFamily="34" charset="-122"/>
                 <a:cs typeface="Calibri" pitchFamily="34" charset="-120"/>
               </a:rPr>
-              <a:t>toward, into</a:t>
+              <a:t>into, towards</a:t>
             </a:r>
             <a:endParaRPr lang="en-US" sz="850" dirty="0"/>
           </a:p>
@@ -8957,7 +8957,7 @@
                 <a:ea typeface="Calibri" pitchFamily="34" charset="-122"/>
                 <a:cs typeface="Calibri" pitchFamily="34" charset="-120"/>
               </a:rPr>
-              <a:t>to stretch or reach</a:t>
+              <a:t>stretch, reach</a:t>
             </a:r>
             <a:endParaRPr lang="en-US" sz="850" dirty="0"/>
           </a:p>
@@ -9645,7 +9645,7 @@
                 <a:ea typeface="Calibri" pitchFamily="34" charset="-122"/>
                 <a:cs typeface="Calibri" pitchFamily="34" charset="-120"/>
               </a:rPr>
-              <a:t>Word Labs  •  wordlabs.app  •  Root: 'tend' = to stretch, reach, or extend</a:t>
+              <a:t>Word Labs  •  wordlabs.app  •  Root: 'tend' = stretch, reach, or extend</a:t>
             </a:r>
             <a:endParaRPr lang="en-US" sz="800" dirty="0"/>
           </a:p>
@@ -9962,7 +9962,7 @@
                 <a:ea typeface="Calibri" pitchFamily="34" charset="-122"/>
                 <a:cs typeface="Calibri" pitchFamily="34" charset="-120"/>
               </a:rPr>
-              <a:t>toward, into</a:t>
+              <a:t>into, towards</a:t>
             </a:r>
             <a:endParaRPr lang="en-US" sz="850" dirty="0"/>
           </a:p>
@@ -10074,7 +10074,7 @@
                 <a:ea typeface="Calibri" pitchFamily="34" charset="-122"/>
                 <a:cs typeface="Calibri" pitchFamily="34" charset="-120"/>
               </a:rPr>
-              <a:t>to stretch or reach</a:t>
+              <a:t>stretch, reach</a:t>
             </a:r>
             <a:endParaRPr lang="en-US" sz="850" dirty="0"/>
           </a:p>
@@ -11119,7 +11119,7 @@
                 <a:ea typeface="Calibri" pitchFamily="34" charset="-122"/>
                 <a:cs typeface="Calibri" pitchFamily="34" charset="-120"/>
               </a:rPr>
-              <a:t>Word Labs  •  wordlabs.app  •  Root: 'tend' = to stretch, reach, or extend</a:t>
+              <a:t>Word Labs  •  wordlabs.app  •  Root: 'tend' = stretch, reach, or extend</a:t>
             </a:r>
             <a:endParaRPr lang="en-US" sz="800" dirty="0"/>
           </a:p>
@@ -11258,7 +11258,7 @@
                 <a:ea typeface="Trebuchet MS" pitchFamily="34" charset="-122"/>
                 <a:cs typeface="Trebuchet MS" pitchFamily="34" charset="-120"/>
               </a:rPr>
-              <a:t>attend</a:t>
+              <a:t>extend</a:t>
             </a:r>
             <a:endParaRPr lang="en-US" sz="2800" dirty="0"/>
           </a:p>
@@ -11946,7 +11946,7 @@
                 <a:ea typeface="Calibri" pitchFamily="34" charset="-122"/>
                 <a:cs typeface="Calibri" pitchFamily="34" charset="-120"/>
               </a:rPr>
-              <a:t>Word Labs  •  wordlabs.app  •  Root: 'tend' = to stretch, reach, or extend</a:t>
+              <a:t>Word Labs  •  wordlabs.app  •  Root: 'tend' = stretch, reach, or extend</a:t>
             </a:r>
             <a:endParaRPr lang="en-US" sz="800" dirty="0"/>
           </a:p>
@@ -12085,7 +12085,7 @@
                 <a:ea typeface="Trebuchet MS" pitchFamily="34" charset="-122"/>
                 <a:cs typeface="Trebuchet MS" pitchFamily="34" charset="-120"/>
               </a:rPr>
-              <a:t>attend</a:t>
+              <a:t>extend</a:t>
             </a:r>
             <a:endParaRPr lang="en-US" sz="2800" dirty="0"/>
           </a:p>
@@ -12224,7 +12224,7 @@
                 <a:ea typeface="Trebuchet MS" pitchFamily="34" charset="-122"/>
                 <a:cs typeface="Trebuchet MS" pitchFamily="34" charset="-120"/>
               </a:rPr>
-              <a:t>at</a:t>
+              <a:t>ex</a:t>
             </a:r>
             <a:endParaRPr lang="en-US" sz="1300" dirty="0"/>
           </a:p>
@@ -12263,7 +12263,7 @@
                 <a:ea typeface="Calibri" pitchFamily="34" charset="-122"/>
                 <a:cs typeface="Calibri" pitchFamily="34" charset="-120"/>
               </a:rPr>
-              <a:t>toward</a:t>
+              <a:t>out, beyond</a:t>
             </a:r>
             <a:endParaRPr lang="en-US" sz="850" dirty="0"/>
           </a:p>
@@ -12271,46 +12271,7 @@
       </p:sp>
       <p:sp>
         <p:nvSpPr>
-          <p:cNvPr id="19" name="Text 17"/>
-          <p:cNvSpPr/>
-          <p:nvPr/>
-        </p:nvSpPr>
-        <p:spPr>
-          <a:xfrm>
-            <a:off x="2938272" y="2752344"/>
-            <a:ext cx="1828800" cy="182880"/>
-          </a:xfrm>
-          <a:prstGeom prst="rect">
-            <a:avLst/>
-          </a:prstGeom>
-          <a:noFill/>
-          <a:ln/>
-        </p:spPr>
-        <p:txBody>
-          <a:bodyPr wrap="square" lIns="0" tIns="0" rIns="0" bIns="0" rtlCol="0" anchor="t"/>
-          <a:lstStyle/>
-          <a:p>
-            <a:pPr algn="ctr" indent="0" marL="0">
-              <a:buNone/>
-            </a:pPr>
-            <a:r>
-              <a:rPr lang="en-US" sz="700" i="1" dirty="0">
-                <a:solidFill>
-                  <a:srgbClr val="94A3B8"/>
-                </a:solidFill>
-                <a:latin typeface="Calibri" pitchFamily="34" charset="0"/>
-                <a:ea typeface="Calibri" pitchFamily="34" charset="-122"/>
-                <a:cs typeface="Calibri" pitchFamily="34" charset="-120"/>
-              </a:rPr>
-              <a:t>ad → at before 't'</a:t>
-            </a:r>
-            <a:endParaRPr lang="en-US" sz="700" dirty="0"/>
-          </a:p>
-        </p:txBody>
-      </p:sp>
-      <p:sp>
-        <p:nvSpPr>
-          <p:cNvPr id="20" name="Shape 18"/>
+          <p:cNvPr id="19" name="Shape 17"/>
           <p:cNvSpPr/>
           <p:nvPr/>
         </p:nvSpPr>
@@ -12344,7 +12305,7 @@
       </p:sp>
       <p:sp>
         <p:nvSpPr>
-          <p:cNvPr id="21" name="Text 19"/>
+          <p:cNvPr id="20" name="Text 18"/>
           <p:cNvSpPr/>
           <p:nvPr/>
         </p:nvSpPr>
@@ -12383,7 +12344,7 @@
       </p:sp>
       <p:sp>
         <p:nvSpPr>
-          <p:cNvPr id="22" name="Text 20"/>
+          <p:cNvPr id="21" name="Text 19"/>
           <p:cNvSpPr/>
           <p:nvPr/>
         </p:nvSpPr>
@@ -12414,7 +12375,7 @@
                 <a:ea typeface="Calibri" pitchFamily="34" charset="-122"/>
                 <a:cs typeface="Calibri" pitchFamily="34" charset="-120"/>
               </a:rPr>
-              <a:t>to stretch or reach</a:t>
+              <a:t>stretch, reach</a:t>
             </a:r>
             <a:endParaRPr lang="en-US" sz="850" dirty="0"/>
           </a:p>
@@ -12422,7 +12383,7 @@
       </p:sp>
       <p:sp>
         <p:nvSpPr>
-          <p:cNvPr id="23" name="Shape 21"/>
+          <p:cNvPr id="22" name="Shape 20"/>
           <p:cNvSpPr/>
           <p:nvPr/>
         </p:nvSpPr>
@@ -12449,7 +12410,7 @@
       </p:sp>
       <p:sp>
         <p:nvSpPr>
-          <p:cNvPr id="24" name="Text 22"/>
+          <p:cNvPr id="23" name="Text 21"/>
           <p:cNvSpPr/>
           <p:nvPr/>
         </p:nvSpPr>
@@ -12488,7 +12449,7 @@
       </p:sp>
       <p:sp>
         <p:nvSpPr>
-          <p:cNvPr id="25" name="Shape 23"/>
+          <p:cNvPr id="24" name="Shape 22"/>
           <p:cNvSpPr/>
           <p:nvPr/>
         </p:nvSpPr>
@@ -12515,7 +12476,7 @@
       </p:sp>
       <p:sp>
         <p:nvSpPr>
-          <p:cNvPr id="26" name="Text 24"/>
+          <p:cNvPr id="25" name="Text 23"/>
           <p:cNvSpPr/>
           <p:nvPr/>
         </p:nvSpPr>
@@ -12554,7 +12515,7 @@
       </p:sp>
       <p:sp>
         <p:nvSpPr>
-          <p:cNvPr id="27" name="Shape 25"/>
+          <p:cNvPr id="26" name="Shape 24"/>
           <p:cNvSpPr/>
           <p:nvPr/>
         </p:nvSpPr>
@@ -12581,7 +12542,7 @@
       </p:sp>
       <p:sp>
         <p:nvSpPr>
-          <p:cNvPr id="28" name="Text 26"/>
+          <p:cNvPr id="27" name="Text 25"/>
           <p:cNvSpPr/>
           <p:nvPr/>
         </p:nvSpPr>
@@ -12620,7 +12581,7 @@
       </p:sp>
       <p:sp>
         <p:nvSpPr>
-          <p:cNvPr id="29" name="Shape 27"/>
+          <p:cNvPr id="28" name="Shape 26"/>
           <p:cNvSpPr/>
           <p:nvPr/>
         </p:nvSpPr>
@@ -12647,7 +12608,7 @@
       </p:sp>
       <p:sp>
         <p:nvSpPr>
-          <p:cNvPr id="30" name="Text 28"/>
+          <p:cNvPr id="29" name="Text 27"/>
           <p:cNvSpPr/>
           <p:nvPr/>
         </p:nvSpPr>
@@ -12970,7 +12931,7 @@
                 <a:ea typeface="Calibri" pitchFamily="34" charset="-122"/>
                 <a:cs typeface="Calibri" pitchFamily="34" charset="-120"/>
               </a:rPr>
-              <a:t>Word Labs  •  wordlabs.app  •  Root: 'tend' = to stretch, reach, or extend</a:t>
+              <a:t>Word Labs  •  wordlabs.app  •  Root: 'tend' = stretch, reach, or extend</a:t>
             </a:r>
             <a:endParaRPr lang="en-US" sz="800" dirty="0"/>
           </a:p>
@@ -13109,7 +13070,7 @@
                 <a:ea typeface="Trebuchet MS" pitchFamily="34" charset="-122"/>
                 <a:cs typeface="Trebuchet MS" pitchFamily="34" charset="-120"/>
               </a:rPr>
-              <a:t>attend</a:t>
+              <a:t>extend</a:t>
             </a:r>
             <a:endParaRPr lang="en-US" sz="2800" dirty="0"/>
           </a:p>
@@ -13248,7 +13209,7 @@
                 <a:ea typeface="Trebuchet MS" pitchFamily="34" charset="-122"/>
                 <a:cs typeface="Trebuchet MS" pitchFamily="34" charset="-120"/>
               </a:rPr>
-              <a:t>at</a:t>
+              <a:t>ex</a:t>
             </a:r>
             <a:endParaRPr lang="en-US" sz="1300" dirty="0"/>
           </a:p>
@@ -13287,7 +13248,7 @@
                 <a:ea typeface="Calibri" pitchFamily="34" charset="-122"/>
                 <a:cs typeface="Calibri" pitchFamily="34" charset="-120"/>
               </a:rPr>
-              <a:t>toward</a:t>
+              <a:t>out, beyond</a:t>
             </a:r>
             <a:endParaRPr lang="en-US" sz="850" dirty="0"/>
           </a:p>
@@ -13295,46 +13256,7 @@
       </p:sp>
       <p:sp>
         <p:nvSpPr>
-          <p:cNvPr id="19" name="Text 17"/>
-          <p:cNvSpPr/>
-          <p:nvPr/>
-        </p:nvSpPr>
-        <p:spPr>
-          <a:xfrm>
-            <a:off x="2938272" y="2752344"/>
-            <a:ext cx="1828800" cy="182880"/>
-          </a:xfrm>
-          <a:prstGeom prst="rect">
-            <a:avLst/>
-          </a:prstGeom>
-          <a:noFill/>
-          <a:ln/>
-        </p:spPr>
-        <p:txBody>
-          <a:bodyPr wrap="square" lIns="0" tIns="0" rIns="0" bIns="0" rtlCol="0" anchor="t"/>
-          <a:lstStyle/>
-          <a:p>
-            <a:pPr algn="ctr" indent="0" marL="0">
-              <a:buNone/>
-            </a:pPr>
-            <a:r>
-              <a:rPr lang="en-US" sz="700" i="1" dirty="0">
-                <a:solidFill>
-                  <a:srgbClr val="94A3B8"/>
-                </a:solidFill>
-                <a:latin typeface="Calibri" pitchFamily="34" charset="0"/>
-                <a:ea typeface="Calibri" pitchFamily="34" charset="-122"/>
-                <a:cs typeface="Calibri" pitchFamily="34" charset="-120"/>
-              </a:rPr>
-              <a:t>ad → at before 't'</a:t>
-            </a:r>
-            <a:endParaRPr lang="en-US" sz="700" dirty="0"/>
-          </a:p>
-        </p:txBody>
-      </p:sp>
-      <p:sp>
-        <p:nvSpPr>
-          <p:cNvPr id="20" name="Shape 18"/>
+          <p:cNvPr id="19" name="Shape 17"/>
           <p:cNvSpPr/>
           <p:nvPr/>
         </p:nvSpPr>
@@ -13368,7 +13290,7 @@
       </p:sp>
       <p:sp>
         <p:nvSpPr>
-          <p:cNvPr id="21" name="Text 19"/>
+          <p:cNvPr id="20" name="Text 18"/>
           <p:cNvSpPr/>
           <p:nvPr/>
         </p:nvSpPr>
@@ -13407,7 +13329,7 @@
       </p:sp>
       <p:sp>
         <p:nvSpPr>
-          <p:cNvPr id="22" name="Text 20"/>
+          <p:cNvPr id="21" name="Text 19"/>
           <p:cNvSpPr/>
           <p:nvPr/>
         </p:nvSpPr>
@@ -13438,7 +13360,7 @@
                 <a:ea typeface="Calibri" pitchFamily="34" charset="-122"/>
                 <a:cs typeface="Calibri" pitchFamily="34" charset="-120"/>
               </a:rPr>
-              <a:t>to stretch or reach</a:t>
+              <a:t>stretch, reach</a:t>
             </a:r>
             <a:endParaRPr lang="en-US" sz="850" dirty="0"/>
           </a:p>
@@ -13446,7 +13368,7 @@
       </p:sp>
       <p:sp>
         <p:nvSpPr>
-          <p:cNvPr id="23" name="Shape 21"/>
+          <p:cNvPr id="22" name="Shape 20"/>
           <p:cNvSpPr/>
           <p:nvPr/>
         </p:nvSpPr>
@@ -13473,7 +13395,7 @@
       </p:sp>
       <p:sp>
         <p:nvSpPr>
-          <p:cNvPr id="24" name="Text 22"/>
+          <p:cNvPr id="23" name="Text 21"/>
           <p:cNvSpPr/>
           <p:nvPr/>
         </p:nvSpPr>
@@ -13512,7 +13434,7 @@
       </p:sp>
       <p:sp>
         <p:nvSpPr>
-          <p:cNvPr id="25" name="Shape 23"/>
+          <p:cNvPr id="24" name="Shape 22"/>
           <p:cNvSpPr/>
           <p:nvPr/>
         </p:nvSpPr>
@@ -13539,7 +13461,7 @@
       </p:sp>
       <p:sp>
         <p:nvSpPr>
-          <p:cNvPr id="26" name="Shape 24"/>
+          <p:cNvPr id="25" name="Shape 23"/>
           <p:cNvSpPr/>
           <p:nvPr/>
         </p:nvSpPr>
@@ -13566,7 +13488,7 @@
       </p:sp>
       <p:sp>
         <p:nvSpPr>
-          <p:cNvPr id="27" name="Text 25"/>
+          <p:cNvPr id="26" name="Text 24"/>
           <p:cNvSpPr/>
           <p:nvPr/>
         </p:nvSpPr>
@@ -13597,7 +13519,7 @@
                 <a:ea typeface="Trebuchet MS" pitchFamily="34" charset="-122"/>
                 <a:cs typeface="Trebuchet MS" pitchFamily="34" charset="-120"/>
               </a:rPr>
-              <a:t>at</a:t>
+              <a:t>ex</a:t>
             </a:r>
             <a:endParaRPr lang="en-US" sz="1400" dirty="0"/>
           </a:p>
@@ -13605,7 +13527,7 @@
       </p:sp>
       <p:sp>
         <p:nvSpPr>
-          <p:cNvPr id="28" name="Text 26"/>
+          <p:cNvPr id="27" name="Text 25"/>
           <p:cNvSpPr/>
           <p:nvPr/>
         </p:nvSpPr>
@@ -13644,7 +13566,7 @@
       </p:sp>
       <p:sp>
         <p:nvSpPr>
-          <p:cNvPr id="29" name="Shape 27"/>
+          <p:cNvPr id="28" name="Shape 26"/>
           <p:cNvSpPr/>
           <p:nvPr/>
         </p:nvSpPr>
@@ -13671,7 +13593,7 @@
       </p:sp>
       <p:sp>
         <p:nvSpPr>
-          <p:cNvPr id="30" name="Text 28"/>
+          <p:cNvPr id="29" name="Text 27"/>
           <p:cNvSpPr/>
           <p:nvPr/>
         </p:nvSpPr>
@@ -13710,7 +13632,7 @@
       </p:sp>
       <p:sp>
         <p:nvSpPr>
-          <p:cNvPr id="31" name="Shape 29"/>
+          <p:cNvPr id="30" name="Shape 28"/>
           <p:cNvSpPr/>
           <p:nvPr/>
         </p:nvSpPr>
@@ -13737,7 +13659,7 @@
       </p:sp>
       <p:sp>
         <p:nvSpPr>
-          <p:cNvPr id="32" name="Text 30"/>
+          <p:cNvPr id="31" name="Text 29"/>
           <p:cNvSpPr/>
           <p:nvPr/>
         </p:nvSpPr>
@@ -13776,7 +13698,7 @@
       </p:sp>
       <p:sp>
         <p:nvSpPr>
-          <p:cNvPr id="33" name="Shape 31"/>
+          <p:cNvPr id="32" name="Shape 30"/>
           <p:cNvSpPr/>
           <p:nvPr/>
         </p:nvSpPr>
@@ -13803,7 +13725,7 @@
       </p:sp>
       <p:sp>
         <p:nvSpPr>
-          <p:cNvPr id="34" name="Text 32"/>
+          <p:cNvPr id="33" name="Text 31"/>
           <p:cNvSpPr/>
           <p:nvPr/>
         </p:nvSpPr>
@@ -14035,7 +13957,7 @@
                 <a:ea typeface="Calibri" pitchFamily="34" charset="-122"/>
                 <a:cs typeface="Calibri" pitchFamily="34" charset="-120"/>
               </a:rPr>
-              <a:t>Root 'tend' — to stretch, reach, or extend</a:t>
+              <a:t>Root 'tend' — stretch, reach, or extend</a:t>
             </a:r>
             <a:endParaRPr lang="en-US" sz="1600" dirty="0"/>
           </a:p>
@@ -14391,7 +14313,7 @@
                 <a:ea typeface="Calibri" pitchFamily="34" charset="-122"/>
                 <a:cs typeface="Calibri" pitchFamily="34" charset="-120"/>
               </a:rPr>
-              <a:t>Word Labs  •  wordlabs.app  •  Root: 'tend' = to stretch, reach, or extend</a:t>
+              <a:t>Word Labs  •  wordlabs.app  •  Root: 'tend' = stretch, reach, or extend</a:t>
             </a:r>
             <a:endParaRPr lang="en-US" sz="800" dirty="0"/>
           </a:p>
@@ -14530,7 +14452,7 @@
                 <a:ea typeface="Trebuchet MS" pitchFamily="34" charset="-122"/>
                 <a:cs typeface="Trebuchet MS" pitchFamily="34" charset="-120"/>
               </a:rPr>
-              <a:t>attend</a:t>
+              <a:t>extend</a:t>
             </a:r>
             <a:endParaRPr lang="en-US" sz="2800" dirty="0"/>
           </a:p>
@@ -14669,7 +14591,7 @@
                 <a:ea typeface="Trebuchet MS" pitchFamily="34" charset="-122"/>
                 <a:cs typeface="Trebuchet MS" pitchFamily="34" charset="-120"/>
               </a:rPr>
-              <a:t>at</a:t>
+              <a:t>ex</a:t>
             </a:r>
             <a:endParaRPr lang="en-US" sz="1300" dirty="0"/>
           </a:p>
@@ -14708,7 +14630,7 @@
                 <a:ea typeface="Calibri" pitchFamily="34" charset="-122"/>
                 <a:cs typeface="Calibri" pitchFamily="34" charset="-120"/>
               </a:rPr>
-              <a:t>toward</a:t>
+              <a:t>out, beyond</a:t>
             </a:r>
             <a:endParaRPr lang="en-US" sz="850" dirty="0"/>
           </a:p>
@@ -14716,46 +14638,7 @@
       </p:sp>
       <p:sp>
         <p:nvSpPr>
-          <p:cNvPr id="19" name="Text 17"/>
-          <p:cNvSpPr/>
-          <p:nvPr/>
-        </p:nvSpPr>
-        <p:spPr>
-          <a:xfrm>
-            <a:off x="2938272" y="2752344"/>
-            <a:ext cx="1828800" cy="182880"/>
-          </a:xfrm>
-          <a:prstGeom prst="rect">
-            <a:avLst/>
-          </a:prstGeom>
-          <a:noFill/>
-          <a:ln/>
-        </p:spPr>
-        <p:txBody>
-          <a:bodyPr wrap="square" lIns="0" tIns="0" rIns="0" bIns="0" rtlCol="0" anchor="t"/>
-          <a:lstStyle/>
-          <a:p>
-            <a:pPr algn="ctr" indent="0" marL="0">
-              <a:buNone/>
-            </a:pPr>
-            <a:r>
-              <a:rPr lang="en-US" sz="700" i="1" dirty="0">
-                <a:solidFill>
-                  <a:srgbClr val="94A3B8"/>
-                </a:solidFill>
-                <a:latin typeface="Calibri" pitchFamily="34" charset="0"/>
-                <a:ea typeface="Calibri" pitchFamily="34" charset="-122"/>
-                <a:cs typeface="Calibri" pitchFamily="34" charset="-120"/>
-              </a:rPr>
-              <a:t>ad → at before 't'</a:t>
-            </a:r>
-            <a:endParaRPr lang="en-US" sz="700" dirty="0"/>
-          </a:p>
-        </p:txBody>
-      </p:sp>
-      <p:sp>
-        <p:nvSpPr>
-          <p:cNvPr id="20" name="Shape 18"/>
+          <p:cNvPr id="19" name="Shape 17"/>
           <p:cNvSpPr/>
           <p:nvPr/>
         </p:nvSpPr>
@@ -14789,7 +14672,7 @@
       </p:sp>
       <p:sp>
         <p:nvSpPr>
-          <p:cNvPr id="21" name="Text 19"/>
+          <p:cNvPr id="20" name="Text 18"/>
           <p:cNvSpPr/>
           <p:nvPr/>
         </p:nvSpPr>
@@ -14828,7 +14711,7 @@
       </p:sp>
       <p:sp>
         <p:nvSpPr>
-          <p:cNvPr id="22" name="Text 20"/>
+          <p:cNvPr id="21" name="Text 19"/>
           <p:cNvSpPr/>
           <p:nvPr/>
         </p:nvSpPr>
@@ -14859,7 +14742,7 @@
                 <a:ea typeface="Calibri" pitchFamily="34" charset="-122"/>
                 <a:cs typeface="Calibri" pitchFamily="34" charset="-120"/>
               </a:rPr>
-              <a:t>to stretch or reach</a:t>
+              <a:t>stretch, reach</a:t>
             </a:r>
             <a:endParaRPr lang="en-US" sz="850" dirty="0"/>
           </a:p>
@@ -14867,7 +14750,7 @@
       </p:sp>
       <p:sp>
         <p:nvSpPr>
-          <p:cNvPr id="23" name="Shape 21"/>
+          <p:cNvPr id="22" name="Shape 20"/>
           <p:cNvSpPr/>
           <p:nvPr/>
         </p:nvSpPr>
@@ -14894,7 +14777,7 @@
       </p:sp>
       <p:sp>
         <p:nvSpPr>
-          <p:cNvPr id="24" name="Text 22"/>
+          <p:cNvPr id="23" name="Text 21"/>
           <p:cNvSpPr/>
           <p:nvPr/>
         </p:nvSpPr>
@@ -14933,7 +14816,7 @@
       </p:sp>
       <p:sp>
         <p:nvSpPr>
-          <p:cNvPr id="25" name="Shape 23"/>
+          <p:cNvPr id="24" name="Shape 22"/>
           <p:cNvSpPr/>
           <p:nvPr/>
         </p:nvSpPr>
@@ -14960,7 +14843,7 @@
       </p:sp>
       <p:sp>
         <p:nvSpPr>
-          <p:cNvPr id="26" name="Shape 24"/>
+          <p:cNvPr id="25" name="Shape 23"/>
           <p:cNvSpPr/>
           <p:nvPr/>
         </p:nvSpPr>
@@ -14987,7 +14870,7 @@
       </p:sp>
       <p:sp>
         <p:nvSpPr>
-          <p:cNvPr id="27" name="Text 25"/>
+          <p:cNvPr id="26" name="Text 24"/>
           <p:cNvSpPr/>
           <p:nvPr/>
         </p:nvSpPr>
@@ -15018,7 +14901,7 @@
                 <a:ea typeface="Trebuchet MS" pitchFamily="34" charset="-122"/>
                 <a:cs typeface="Trebuchet MS" pitchFamily="34" charset="-120"/>
               </a:rPr>
-              <a:t>at</a:t>
+              <a:t>ex</a:t>
             </a:r>
             <a:endParaRPr lang="en-US" sz="1400" dirty="0"/>
           </a:p>
@@ -15026,7 +14909,7 @@
       </p:sp>
       <p:sp>
         <p:nvSpPr>
-          <p:cNvPr id="28" name="Text 26"/>
+          <p:cNvPr id="27" name="Text 25"/>
           <p:cNvSpPr/>
           <p:nvPr/>
         </p:nvSpPr>
@@ -15065,7 +14948,7 @@
       </p:sp>
       <p:sp>
         <p:nvSpPr>
-          <p:cNvPr id="29" name="Shape 27"/>
+          <p:cNvPr id="28" name="Shape 26"/>
           <p:cNvSpPr/>
           <p:nvPr/>
         </p:nvSpPr>
@@ -15092,7 +14975,7 @@
       </p:sp>
       <p:sp>
         <p:nvSpPr>
-          <p:cNvPr id="30" name="Text 28"/>
+          <p:cNvPr id="29" name="Text 27"/>
           <p:cNvSpPr/>
           <p:nvPr/>
         </p:nvSpPr>
@@ -15131,7 +15014,7 @@
       </p:sp>
       <p:sp>
         <p:nvSpPr>
-          <p:cNvPr id="31" name="Shape 29"/>
+          <p:cNvPr id="30" name="Shape 28"/>
           <p:cNvSpPr/>
           <p:nvPr/>
         </p:nvSpPr>
@@ -15158,7 +15041,7 @@
       </p:sp>
       <p:sp>
         <p:nvSpPr>
-          <p:cNvPr id="32" name="Text 30"/>
+          <p:cNvPr id="31" name="Text 29"/>
           <p:cNvSpPr/>
           <p:nvPr/>
         </p:nvSpPr>
@@ -15197,7 +15080,7 @@
       </p:sp>
       <p:sp>
         <p:nvSpPr>
-          <p:cNvPr id="33" name="Shape 31"/>
+          <p:cNvPr id="32" name="Shape 30"/>
           <p:cNvSpPr/>
           <p:nvPr/>
         </p:nvSpPr>
@@ -15224,13 +15107,13 @@
       </p:sp>
       <p:sp>
         <p:nvSpPr>
-          <p:cNvPr id="34" name="Shape 32"/>
-          <p:cNvSpPr/>
-          <p:nvPr/>
-        </p:nvSpPr>
-        <p:spPr>
-          <a:xfrm>
-            <a:off x="2427732" y="4169664"/>
+          <p:cNvPr id="33" name="Shape 31"/>
+          <p:cNvSpPr/>
+          <p:nvPr/>
+        </p:nvSpPr>
+        <p:spPr>
+          <a:xfrm>
+            <a:off x="2254649" y="4169664"/>
             <a:ext cx="685800" cy="475488"/>
           </a:xfrm>
           <a:prstGeom prst="rect">
@@ -15251,13 +15134,13 @@
       </p:sp>
       <p:sp>
         <p:nvSpPr>
-          <p:cNvPr id="35" name="Text 33"/>
-          <p:cNvSpPr/>
-          <p:nvPr/>
-        </p:nvSpPr>
-        <p:spPr>
-          <a:xfrm>
-            <a:off x="2427732" y="4169664"/>
+          <p:cNvPr id="34" name="Text 32"/>
+          <p:cNvSpPr/>
+          <p:nvPr/>
+        </p:nvSpPr>
+        <p:spPr>
+          <a:xfrm>
+            <a:off x="2254649" y="4169664"/>
             <a:ext cx="685800" cy="475488"/>
           </a:xfrm>
           <a:prstGeom prst="rect">
@@ -15282,7 +15165,7 @@
                 <a:ea typeface="Trebuchet MS" pitchFamily="34" charset="-122"/>
                 <a:cs typeface="Trebuchet MS" pitchFamily="34" charset="-120"/>
               </a:rPr>
-              <a:t>a</a:t>
+              <a:t>e</a:t>
             </a:r>
             <a:endParaRPr lang="en-US" sz="900" dirty="0"/>
           </a:p>
@@ -15290,13 +15173,13 @@
       </p:sp>
       <p:sp>
         <p:nvSpPr>
-          <p:cNvPr id="36" name="Shape 34"/>
-          <p:cNvSpPr/>
-          <p:nvPr/>
-        </p:nvSpPr>
-        <p:spPr>
-          <a:xfrm>
-            <a:off x="3639312" y="4169664"/>
+          <p:cNvPr id="35" name="Shape 33"/>
+          <p:cNvSpPr/>
+          <p:nvPr/>
+        </p:nvSpPr>
+        <p:spPr>
+          <a:xfrm>
+            <a:off x="3293146" y="4169664"/>
             <a:ext cx="685800" cy="475488"/>
           </a:xfrm>
           <a:prstGeom prst="rect">
@@ -15317,13 +15200,13 @@
       </p:sp>
       <p:sp>
         <p:nvSpPr>
-          <p:cNvPr id="37" name="Text 35"/>
-          <p:cNvSpPr/>
-          <p:nvPr/>
-        </p:nvSpPr>
-        <p:spPr>
-          <a:xfrm>
-            <a:off x="3639312" y="4169664"/>
+          <p:cNvPr id="36" name="Text 34"/>
+          <p:cNvSpPr/>
+          <p:nvPr/>
+        </p:nvSpPr>
+        <p:spPr>
+          <a:xfrm>
+            <a:off x="3293146" y="4169664"/>
             <a:ext cx="685800" cy="475488"/>
           </a:xfrm>
           <a:prstGeom prst="rect">
@@ -15348,7 +15231,7 @@
                 <a:ea typeface="Trebuchet MS" pitchFamily="34" charset="-122"/>
                 <a:cs typeface="Trebuchet MS" pitchFamily="34" charset="-120"/>
               </a:rPr>
-              <a:t>tt</a:t>
+              <a:t>x</a:t>
             </a:r>
             <a:endParaRPr lang="en-US" sz="900" dirty="0"/>
           </a:p>
@@ -15356,13 +15239,13 @@
       </p:sp>
       <p:sp>
         <p:nvSpPr>
-          <p:cNvPr id="38" name="Shape 36"/>
-          <p:cNvSpPr/>
-          <p:nvPr/>
-        </p:nvSpPr>
-        <p:spPr>
-          <a:xfrm>
-            <a:off x="4850892" y="4169664"/>
+          <p:cNvPr id="37" name="Shape 35"/>
+          <p:cNvSpPr/>
+          <p:nvPr/>
+        </p:nvSpPr>
+        <p:spPr>
+          <a:xfrm>
+            <a:off x="4331643" y="4169664"/>
             <a:ext cx="685800" cy="475488"/>
           </a:xfrm>
           <a:prstGeom prst="rect">
@@ -15383,13 +15266,13 @@
       </p:sp>
       <p:sp>
         <p:nvSpPr>
-          <p:cNvPr id="39" name="Text 37"/>
-          <p:cNvSpPr/>
-          <p:nvPr/>
-        </p:nvSpPr>
-        <p:spPr>
-          <a:xfrm>
-            <a:off x="4850892" y="4169664"/>
+          <p:cNvPr id="38" name="Text 36"/>
+          <p:cNvSpPr/>
+          <p:nvPr/>
+        </p:nvSpPr>
+        <p:spPr>
+          <a:xfrm>
+            <a:off x="4331643" y="4169664"/>
             <a:ext cx="685800" cy="475488"/>
           </a:xfrm>
           <a:prstGeom prst="rect">
@@ -15414,7 +15297,7 @@
                 <a:ea typeface="Trebuchet MS" pitchFamily="34" charset="-122"/>
                 <a:cs typeface="Trebuchet MS" pitchFamily="34" charset="-120"/>
               </a:rPr>
-              <a:t>e</a:t>
+              <a:t>t</a:t>
             </a:r>
             <a:endParaRPr lang="en-US" sz="900" dirty="0"/>
           </a:p>
@@ -15422,13 +15305,13 @@
       </p:sp>
       <p:sp>
         <p:nvSpPr>
-          <p:cNvPr id="40" name="Shape 38"/>
-          <p:cNvSpPr/>
-          <p:nvPr/>
-        </p:nvSpPr>
-        <p:spPr>
-          <a:xfrm>
-            <a:off x="6062472" y="4169664"/>
+          <p:cNvPr id="39" name="Shape 37"/>
+          <p:cNvSpPr/>
+          <p:nvPr/>
+        </p:nvSpPr>
+        <p:spPr>
+          <a:xfrm>
+            <a:off x="5370141" y="4169664"/>
             <a:ext cx="685800" cy="475488"/>
           </a:xfrm>
           <a:prstGeom prst="rect">
@@ -15449,13 +15332,13 @@
       </p:sp>
       <p:sp>
         <p:nvSpPr>
-          <p:cNvPr id="41" name="Text 39"/>
-          <p:cNvSpPr/>
-          <p:nvPr/>
-        </p:nvSpPr>
-        <p:spPr>
-          <a:xfrm>
-            <a:off x="6062472" y="4169664"/>
+          <p:cNvPr id="40" name="Text 38"/>
+          <p:cNvSpPr/>
+          <p:nvPr/>
+        </p:nvSpPr>
+        <p:spPr>
+          <a:xfrm>
+            <a:off x="5370141" y="4169664"/>
             <a:ext cx="685800" cy="475488"/>
           </a:xfrm>
           <a:prstGeom prst="rect">
@@ -15480,7 +15363,7 @@
                 <a:ea typeface="Trebuchet MS" pitchFamily="34" charset="-122"/>
                 <a:cs typeface="Trebuchet MS" pitchFamily="34" charset="-120"/>
               </a:rPr>
-              <a:t>n</a:t>
+              <a:t>e</a:t>
             </a:r>
             <a:endParaRPr lang="en-US" sz="900" dirty="0"/>
           </a:p>
@@ -15488,13 +15371,13 @@
       </p:sp>
       <p:sp>
         <p:nvSpPr>
-          <p:cNvPr id="42" name="Shape 40"/>
-          <p:cNvSpPr/>
-          <p:nvPr/>
-        </p:nvSpPr>
-        <p:spPr>
-          <a:xfrm>
-            <a:off x="7274052" y="4169664"/>
+          <p:cNvPr id="41" name="Shape 39"/>
+          <p:cNvSpPr/>
+          <p:nvPr/>
+        </p:nvSpPr>
+        <p:spPr>
+          <a:xfrm>
+            <a:off x="6408638" y="4169664"/>
             <a:ext cx="685800" cy="475488"/>
           </a:xfrm>
           <a:prstGeom prst="rect">
@@ -15515,13 +15398,79 @@
       </p:sp>
       <p:sp>
         <p:nvSpPr>
-          <p:cNvPr id="43" name="Text 41"/>
-          <p:cNvSpPr/>
-          <p:nvPr/>
-        </p:nvSpPr>
-        <p:spPr>
-          <a:xfrm>
-            <a:off x="7274052" y="4169664"/>
+          <p:cNvPr id="42" name="Text 40"/>
+          <p:cNvSpPr/>
+          <p:nvPr/>
+        </p:nvSpPr>
+        <p:spPr>
+          <a:xfrm>
+            <a:off x="6408638" y="4169664"/>
+            <a:ext cx="685800" cy="475488"/>
+          </a:xfrm>
+          <a:prstGeom prst="rect">
+            <a:avLst/>
+          </a:prstGeom>
+          <a:noFill/>
+          <a:ln/>
+        </p:spPr>
+        <p:txBody>
+          <a:bodyPr wrap="square" lIns="0" tIns="0" rIns="0" bIns="0" rtlCol="0" anchor="ctr"/>
+          <a:lstStyle/>
+          <a:p>
+            <a:pPr algn="ctr" indent="0" marL="0">
+              <a:buNone/>
+            </a:pPr>
+            <a:r>
+              <a:rPr lang="en-US" sz="900" b="1" dirty="0">
+                <a:solidFill>
+                  <a:srgbClr val="9D174D"/>
+                </a:solidFill>
+                <a:latin typeface="Trebuchet MS" pitchFamily="34" charset="0"/>
+                <a:ea typeface="Trebuchet MS" pitchFamily="34" charset="-122"/>
+                <a:cs typeface="Trebuchet MS" pitchFamily="34" charset="-120"/>
+              </a:rPr>
+              <a:t>n</a:t>
+            </a:r>
+            <a:endParaRPr lang="en-US" sz="900" dirty="0"/>
+          </a:p>
+        </p:txBody>
+      </p:sp>
+      <p:sp>
+        <p:nvSpPr>
+          <p:cNvPr id="43" name="Shape 41"/>
+          <p:cNvSpPr/>
+          <p:nvPr/>
+        </p:nvSpPr>
+        <p:spPr>
+          <a:xfrm>
+            <a:off x="7447135" y="4169664"/>
+            <a:ext cx="685800" cy="475488"/>
+          </a:xfrm>
+          <a:prstGeom prst="rect">
+            <a:avLst>
+              <a:gd name="adj" fmla="val 7692"/>
+            </a:avLst>
+          </a:prstGeom>
+          <a:solidFill>
+            <a:srgbClr val="FFFFFF"/>
+          </a:solidFill>
+          <a:ln w="12700">
+            <a:solidFill>
+              <a:srgbClr val="DB2777"/>
+            </a:solidFill>
+            <a:prstDash val="solid"/>
+          </a:ln>
+        </p:spPr>
+      </p:sp>
+      <p:sp>
+        <p:nvSpPr>
+          <p:cNvPr id="44" name="Text 42"/>
+          <p:cNvSpPr/>
+          <p:nvPr/>
+        </p:nvSpPr>
+        <p:spPr>
+          <a:xfrm>
+            <a:off x="7447135" y="4169664"/>
             <a:ext cx="685800" cy="475488"/>
           </a:xfrm>
           <a:prstGeom prst="rect">
@@ -16120,7 +16069,7 @@
                 <a:ea typeface="Calibri" pitchFamily="34" charset="-122"/>
                 <a:cs typeface="Calibri" pitchFamily="34" charset="-120"/>
               </a:rPr>
-              <a:t>Word Labs  •  wordlabs.app  •  Root: 'tend' = to stretch, reach, or extend</a:t>
+              <a:t>Word Labs  •  wordlabs.app  •  Root: 'tend' = stretch, reach, or extend</a:t>
             </a:r>
             <a:endParaRPr lang="en-US" sz="800" dirty="0"/>
           </a:p>
@@ -16760,7 +16709,7 @@
                 <a:ea typeface="Calibri" pitchFamily="34" charset="-122"/>
                 <a:cs typeface="Calibri" pitchFamily="34" charset="-120"/>
               </a:rPr>
-              <a:t>Word Labs  •  wordlabs.app  •  Root: 'tend' = to stretch, reach, or extend</a:t>
+              <a:t>Word Labs  •  wordlabs.app  •  Root: 'tend' = stretch, reach, or extend</a:t>
             </a:r>
             <a:endParaRPr lang="en-US" sz="800" dirty="0"/>
           </a:p>
@@ -16872,7 +16821,7 @@
                 <a:ea typeface="Calibri" pitchFamily="34" charset="-122"/>
                 <a:cs typeface="Calibri" pitchFamily="34" charset="-120"/>
               </a:rPr>
-              <a:t>The teacher asked us to pay </a:t>
+              <a:t>The </a:t>
             </a:r>
             <a:pPr algn="l" indent="0" marL="0">
               <a:buNone/>
@@ -16889,7 +16838,7 @@
                 <a:ea typeface="Calibri" pitchFamily="34" charset="-122"/>
                 <a:cs typeface="Calibri" pitchFamily="34" charset="-120"/>
               </a:rPr>
-              <a:t>attention</a:t>
+              <a:t>contender</a:t>
             </a:r>
             <a:pPr algn="l" indent="0" marL="0">
               <a:buNone/>
@@ -16903,7 +16852,7 @@
                 <a:ea typeface="Calibri" pitchFamily="34" charset="-122"/>
                 <a:cs typeface="Calibri" pitchFamily="34" charset="-120"/>
               </a:rPr>
-              <a:t>, </a:t>
+              <a:t> would </a:t>
             </a:r>
             <a:pPr algn="l" indent="0" marL="0">
               <a:buNone/>
@@ -16920,7 +16869,7 @@
                 <a:ea typeface="Calibri" pitchFamily="34" charset="-122"/>
                 <a:cs typeface="Calibri" pitchFamily="34" charset="-120"/>
               </a:rPr>
-              <a:t>extend</a:t>
+              <a:t>pretend</a:t>
             </a:r>
             <a:pPr algn="l" indent="0" marL="0">
               <a:buNone/>
@@ -16934,7 +16883,7 @@
                 <a:ea typeface="Calibri" pitchFamily="34" charset="-122"/>
                 <a:cs typeface="Calibri" pitchFamily="34" charset="-120"/>
               </a:rPr>
-              <a:t> our ideas, and </a:t>
+              <a:t> to be calm, but she had a </a:t>
             </a:r>
             <a:pPr algn="l" indent="0" marL="0">
               <a:buNone/>
@@ -16951,7 +16900,7 @@
                 <a:ea typeface="Calibri" pitchFamily="34" charset="-122"/>
                 <a:cs typeface="Calibri" pitchFamily="34" charset="-120"/>
               </a:rPr>
-              <a:t>pretend</a:t>
+              <a:t>tendency</a:t>
             </a:r>
             <a:pPr algn="l" indent="0" marL="0">
               <a:buNone/>
@@ -16965,7 +16914,7 @@
                 <a:ea typeface="Calibri" pitchFamily="34" charset="-122"/>
                 <a:cs typeface="Calibri" pitchFamily="34" charset="-120"/>
               </a:rPr>
-              <a:t> we were explorers on a new planet.</a:t>
+              <a:t> to get nervous.</a:t>
             </a:r>
             <a:endParaRPr lang="en-US" sz="1800" dirty="0"/>
           </a:p>
@@ -17120,7 +17069,7 @@
                 <a:ea typeface="Trebuchet MS" pitchFamily="34" charset="-122"/>
                 <a:cs typeface="Trebuchet MS" pitchFamily="34" charset="-120"/>
               </a:rPr>
-              <a:t>attention</a:t>
+              <a:t>contender</a:t>
             </a:r>
             <a:endParaRPr lang="en-US" sz="1400" dirty="0"/>
           </a:p>
@@ -17248,7 +17197,7 @@
                 <a:ea typeface="Trebuchet MS" pitchFamily="34" charset="-122"/>
                 <a:cs typeface="Trebuchet MS" pitchFamily="34" charset="-120"/>
               </a:rPr>
-              <a:t>extend</a:t>
+              <a:t>pretend</a:t>
             </a:r>
             <a:endParaRPr lang="en-US" sz="1400" dirty="0"/>
           </a:p>
@@ -17376,7 +17325,7 @@
                 <a:ea typeface="Trebuchet MS" pitchFamily="34" charset="-122"/>
                 <a:cs typeface="Trebuchet MS" pitchFamily="34" charset="-120"/>
               </a:rPr>
-              <a:t>pretend</a:t>
+              <a:t>tendency</a:t>
             </a:r>
             <a:endParaRPr lang="en-US" sz="1400" dirty="0"/>
           </a:p>
@@ -17707,7 +17656,7 @@
                 <a:ea typeface="Calibri" pitchFamily="34" charset="-122"/>
                 <a:cs typeface="Calibri" pitchFamily="34" charset="-120"/>
               </a:rPr>
-              <a:t>Word Labs  •  wordlabs.app  •  Root: 'tend' = to stretch, reach, or extend</a:t>
+              <a:t>Word Labs  •  wordlabs.app  •  Root: 'tend' = stretch, reach, or extend</a:t>
             </a:r>
             <a:endParaRPr lang="en-US" sz="800" dirty="0"/>
           </a:p>
@@ -17846,7 +17795,7 @@
                 <a:ea typeface="Trebuchet MS" pitchFamily="34" charset="-122"/>
                 <a:cs typeface="Trebuchet MS" pitchFamily="34" charset="-120"/>
               </a:rPr>
-              <a:t>attention</a:t>
+              <a:t>contender</a:t>
             </a:r>
             <a:endParaRPr lang="en-US" sz="2800" dirty="0"/>
           </a:p>
@@ -18534,7 +18483,7 @@
                 <a:ea typeface="Calibri" pitchFamily="34" charset="-122"/>
                 <a:cs typeface="Calibri" pitchFamily="34" charset="-120"/>
               </a:rPr>
-              <a:t>Word Labs  •  wordlabs.app  •  Root: 'tend' = to stretch, reach, or extend</a:t>
+              <a:t>Word Labs  •  wordlabs.app  •  Root: 'tend' = stretch, reach, or extend</a:t>
             </a:r>
             <a:endParaRPr lang="en-US" sz="800" dirty="0"/>
           </a:p>
@@ -18673,7 +18622,7 @@
                 <a:ea typeface="Trebuchet MS" pitchFamily="34" charset="-122"/>
                 <a:cs typeface="Trebuchet MS" pitchFamily="34" charset="-120"/>
               </a:rPr>
-              <a:t>attention</a:t>
+              <a:t>contender</a:t>
             </a:r>
             <a:endParaRPr lang="en-US" sz="2800" dirty="0"/>
           </a:p>
@@ -18812,7 +18761,7 @@
                 <a:ea typeface="Trebuchet MS" pitchFamily="34" charset="-122"/>
                 <a:cs typeface="Trebuchet MS" pitchFamily="34" charset="-120"/>
               </a:rPr>
-              <a:t>at</a:t>
+              <a:t>con</a:t>
             </a:r>
             <a:endParaRPr lang="en-US" sz="1300" dirty="0"/>
           </a:p>
@@ -18851,7 +18800,7 @@
                 <a:ea typeface="Calibri" pitchFamily="34" charset="-122"/>
                 <a:cs typeface="Calibri" pitchFamily="34" charset="-120"/>
               </a:rPr>
-              <a:t>toward</a:t>
+              <a:t>together, with</a:t>
             </a:r>
             <a:endParaRPr lang="en-US" sz="850" dirty="0"/>
           </a:p>
@@ -18859,46 +18808,7 @@
       </p:sp>
       <p:sp>
         <p:nvSpPr>
-          <p:cNvPr id="19" name="Text 17"/>
-          <p:cNvSpPr/>
-          <p:nvPr/>
-        </p:nvSpPr>
-        <p:spPr>
-          <a:xfrm>
-            <a:off x="2221992" y="2752344"/>
-            <a:ext cx="1828800" cy="182880"/>
-          </a:xfrm>
-          <a:prstGeom prst="rect">
-            <a:avLst/>
-          </a:prstGeom>
-          <a:noFill/>
-          <a:ln/>
-        </p:spPr>
-        <p:txBody>
-          <a:bodyPr wrap="square" lIns="0" tIns="0" rIns="0" bIns="0" rtlCol="0" anchor="t"/>
-          <a:lstStyle/>
-          <a:p>
-            <a:pPr algn="ctr" indent="0" marL="0">
-              <a:buNone/>
-            </a:pPr>
-            <a:r>
-              <a:rPr lang="en-US" sz="700" i="1" dirty="0">
-                <a:solidFill>
-                  <a:srgbClr val="94A3B8"/>
-                </a:solidFill>
-                <a:latin typeface="Calibri" pitchFamily="34" charset="0"/>
-                <a:ea typeface="Calibri" pitchFamily="34" charset="-122"/>
-                <a:cs typeface="Calibri" pitchFamily="34" charset="-120"/>
-              </a:rPr>
-              <a:t>ad → at before 't'</a:t>
-            </a:r>
-            <a:endParaRPr lang="en-US" sz="700" dirty="0"/>
-          </a:p>
-        </p:txBody>
-      </p:sp>
-      <p:sp>
-        <p:nvSpPr>
-          <p:cNvPr id="20" name="Shape 18"/>
+          <p:cNvPr id="19" name="Shape 17"/>
           <p:cNvSpPr/>
           <p:nvPr/>
         </p:nvSpPr>
@@ -18932,7 +18842,7 @@
       </p:sp>
       <p:sp>
         <p:nvSpPr>
-          <p:cNvPr id="21" name="Text 19"/>
+          <p:cNvPr id="20" name="Text 18"/>
           <p:cNvSpPr/>
           <p:nvPr/>
         </p:nvSpPr>
@@ -18971,7 +18881,7 @@
       </p:sp>
       <p:sp>
         <p:nvSpPr>
-          <p:cNvPr id="22" name="Text 20"/>
+          <p:cNvPr id="21" name="Text 19"/>
           <p:cNvSpPr/>
           <p:nvPr/>
         </p:nvSpPr>
@@ -19002,7 +18912,7 @@
                 <a:ea typeface="Calibri" pitchFamily="34" charset="-122"/>
                 <a:cs typeface="Calibri" pitchFamily="34" charset="-120"/>
               </a:rPr>
-              <a:t>to stretch or reach</a:t>
+              <a:t>stretch, reach</a:t>
             </a:r>
             <a:endParaRPr lang="en-US" sz="850" dirty="0"/>
           </a:p>
@@ -19010,7 +18920,7 @@
       </p:sp>
       <p:sp>
         <p:nvSpPr>
-          <p:cNvPr id="23" name="Shape 21"/>
+          <p:cNvPr id="22" name="Shape 20"/>
           <p:cNvSpPr/>
           <p:nvPr/>
         </p:nvSpPr>
@@ -19044,7 +18954,7 @@
       </p:sp>
       <p:sp>
         <p:nvSpPr>
-          <p:cNvPr id="24" name="Text 22"/>
+          <p:cNvPr id="23" name="Text 21"/>
           <p:cNvSpPr/>
           <p:nvPr/>
         </p:nvSpPr>
@@ -19075,7 +18985,7 @@
                 <a:ea typeface="Trebuchet MS" pitchFamily="34" charset="-122"/>
                 <a:cs typeface="Trebuchet MS" pitchFamily="34" charset="-120"/>
               </a:rPr>
-              <a:t>tion</a:t>
+              <a:t>er</a:t>
             </a:r>
             <a:endParaRPr lang="en-US" sz="1300" dirty="0"/>
           </a:p>
@@ -19083,7 +18993,7 @@
       </p:sp>
       <p:sp>
         <p:nvSpPr>
-          <p:cNvPr id="25" name="Text 23"/>
+          <p:cNvPr id="24" name="Text 22"/>
           <p:cNvSpPr/>
           <p:nvPr/>
         </p:nvSpPr>
@@ -19114,7 +19024,7 @@
                 <a:ea typeface="Calibri" pitchFamily="34" charset="-122"/>
                 <a:cs typeface="Calibri" pitchFamily="34" charset="-120"/>
               </a:rPr>
-              <a:t>act or state of</a:t>
+              <a:t>person who does</a:t>
             </a:r>
             <a:endParaRPr lang="en-US" sz="850" dirty="0"/>
           </a:p>
@@ -19122,57 +19032,150 @@
       </p:sp>
       <p:sp>
         <p:nvSpPr>
+          <p:cNvPr id="25" name="Shape 23"/>
+          <p:cNvSpPr/>
+          <p:nvPr/>
+        </p:nvSpPr>
+        <p:spPr>
+          <a:xfrm>
+            <a:off x="365760" y="3273552"/>
+            <a:ext cx="1371600" cy="658368"/>
+          </a:xfrm>
+          <a:prstGeom prst="rect">
+            <a:avLst>
+              <a:gd name="adj" fmla="val 8333"/>
+            </a:avLst>
+          </a:prstGeom>
+          <a:solidFill>
+            <a:srgbClr val="E2E8F0"/>
+          </a:solidFill>
+          <a:ln w="12700">
+            <a:solidFill>
+              <a:srgbClr val="E2E8F0"/>
+            </a:solidFill>
+            <a:prstDash val="solid"/>
+          </a:ln>
+        </p:spPr>
+      </p:sp>
+      <p:sp>
+        <p:nvSpPr>
           <p:cNvPr id="26" name="Text 24"/>
           <p:cNvSpPr/>
           <p:nvPr/>
         </p:nvSpPr>
         <p:spPr>
           <a:xfrm>
-            <a:off x="6519672" y="2752344"/>
-            <a:ext cx="1828800" cy="182880"/>
-          </a:xfrm>
-          <a:prstGeom prst="rect">
-            <a:avLst/>
-          </a:prstGeom>
-          <a:noFill/>
-          <a:ln/>
-        </p:spPr>
-        <p:txBody>
-          <a:bodyPr wrap="square" lIns="0" tIns="0" rIns="0" bIns="0" rtlCol="0" anchor="t"/>
-          <a:lstStyle/>
-          <a:p>
-            <a:pPr algn="ctr" indent="0" marL="0">
-              <a:buNone/>
-            </a:pPr>
-            <a:r>
-              <a:rPr lang="en-US" sz="700" i="1" dirty="0">
-                <a:solidFill>
-                  <a:srgbClr val="94A3B8"/>
+            <a:off x="365760" y="3273552"/>
+            <a:ext cx="1371600" cy="658368"/>
+          </a:xfrm>
+          <a:prstGeom prst="rect">
+            <a:avLst/>
+          </a:prstGeom>
+          <a:noFill/>
+          <a:ln/>
+        </p:spPr>
+        <p:txBody>
+          <a:bodyPr wrap="square" lIns="0" tIns="0" rIns="0" bIns="0" rtlCol="0" anchor="ctr"/>
+          <a:lstStyle/>
+          <a:p>
+            <a:pPr algn="ctr" indent="0" marL="0">
+              <a:buNone/>
+            </a:pPr>
+            <a:r>
+              <a:rPr lang="en-US" sz="1100" b="1" dirty="0">
+                <a:solidFill>
+                  <a:srgbClr val="475569"/>
+                </a:solidFill>
+                <a:latin typeface="Trebuchet MS" pitchFamily="34" charset="0"/>
+                <a:ea typeface="Trebuchet MS" pitchFamily="34" charset="-122"/>
+                <a:cs typeface="Trebuchet MS" pitchFamily="34" charset="-120"/>
+              </a:rPr>
+              <a:t>Syllables</a:t>
+            </a:r>
+            <a:endParaRPr lang="en-US" sz="1100" dirty="0"/>
+          </a:p>
+        </p:txBody>
+      </p:sp>
+      <p:sp>
+        <p:nvSpPr>
+          <p:cNvPr id="27" name="Shape 25"/>
+          <p:cNvSpPr/>
+          <p:nvPr/>
+        </p:nvSpPr>
+        <p:spPr>
+          <a:xfrm>
+            <a:off x="1874520" y="3273552"/>
+            <a:ext cx="6903720" cy="658368"/>
+          </a:xfrm>
+          <a:prstGeom prst="rect">
+            <a:avLst>
+              <a:gd name="adj" fmla="val 8333"/>
+            </a:avLst>
+          </a:prstGeom>
+          <a:solidFill>
+            <a:srgbClr val="F8FAFC"/>
+          </a:solidFill>
+          <a:ln w="12700">
+            <a:solidFill>
+              <a:srgbClr val="E2E8F0"/>
+            </a:solidFill>
+            <a:prstDash val="dash"/>
+          </a:ln>
+        </p:spPr>
+      </p:sp>
+      <p:sp>
+        <p:nvSpPr>
+          <p:cNvPr id="28" name="Text 26"/>
+          <p:cNvSpPr/>
+          <p:nvPr/>
+        </p:nvSpPr>
+        <p:spPr>
+          <a:xfrm>
+            <a:off x="1874520" y="3273552"/>
+            <a:ext cx="6903720" cy="658368"/>
+          </a:xfrm>
+          <a:prstGeom prst="rect">
+            <a:avLst/>
+          </a:prstGeom>
+          <a:noFill/>
+          <a:ln/>
+        </p:spPr>
+        <p:txBody>
+          <a:bodyPr wrap="square" rtlCol="0" anchor="ctr"/>
+          <a:lstStyle/>
+          <a:p>
+            <a:pPr algn="ctr" indent="0" marL="0">
+              <a:buNone/>
+            </a:pPr>
+            <a:r>
+              <a:rPr lang="en-US" sz="1100" i="1" dirty="0">
+                <a:solidFill>
+                  <a:srgbClr val="CBD5E1"/>
                 </a:solidFill>
                 <a:latin typeface="Calibri" pitchFamily="34" charset="0"/>
                 <a:ea typeface="Calibri" pitchFamily="34" charset="-122"/>
                 <a:cs typeface="Calibri" pitchFamily="34" charset="-120"/>
               </a:rPr>
-              <a:t>'d' changes to 't' before -ion</a:t>
-            </a:r>
-            <a:endParaRPr lang="en-US" sz="700" dirty="0"/>
-          </a:p>
-        </p:txBody>
-      </p:sp>
-      <p:sp>
-        <p:nvSpPr>
-          <p:cNvPr id="27" name="Shape 25"/>
-          <p:cNvSpPr/>
-          <p:nvPr/>
-        </p:nvSpPr>
-        <p:spPr>
-          <a:xfrm>
-            <a:off x="365760" y="3273552"/>
-            <a:ext cx="1371600" cy="658368"/>
+              <a:t>Write here...</a:t>
+            </a:r>
+            <a:endParaRPr lang="en-US" sz="1100" dirty="0"/>
+          </a:p>
+        </p:txBody>
+      </p:sp>
+      <p:sp>
+        <p:nvSpPr>
+          <p:cNvPr id="29" name="Shape 27"/>
+          <p:cNvSpPr/>
+          <p:nvPr/>
+        </p:nvSpPr>
+        <p:spPr>
+          <a:xfrm>
+            <a:off x="365760" y="4096512"/>
+            <a:ext cx="1371600" cy="804672"/>
           </a:xfrm>
           <a:prstGeom prst="rect">
             <a:avLst>
-              <a:gd name="adj" fmla="val 8333"/>
+              <a:gd name="adj" fmla="val 6818"/>
             </a:avLst>
           </a:prstGeom>
           <a:solidFill>
@@ -19188,14 +19191,14 @@
       </p:sp>
       <p:sp>
         <p:nvSpPr>
-          <p:cNvPr id="28" name="Text 26"/>
-          <p:cNvSpPr/>
-          <p:nvPr/>
-        </p:nvSpPr>
-        <p:spPr>
-          <a:xfrm>
-            <a:off x="365760" y="3273552"/>
-            <a:ext cx="1371600" cy="658368"/>
+          <p:cNvPr id="30" name="Text 28"/>
+          <p:cNvSpPr/>
+          <p:nvPr/>
+        </p:nvSpPr>
+        <p:spPr>
+          <a:xfrm>
+            <a:off x="365760" y="4096512"/>
+            <a:ext cx="1371600" cy="804672"/>
           </a:xfrm>
           <a:prstGeom prst="rect">
             <a:avLst/>
@@ -19219,7 +19222,7 @@
                 <a:ea typeface="Trebuchet MS" pitchFamily="34" charset="-122"/>
                 <a:cs typeface="Trebuchet MS" pitchFamily="34" charset="-120"/>
               </a:rPr>
-              <a:t>Syllables</a:t>
+              <a:t>Phonemes</a:t>
             </a:r>
             <a:endParaRPr lang="en-US" sz="1100" dirty="0"/>
           </a:p>
@@ -19227,80 +19230,14 @@
       </p:sp>
       <p:sp>
         <p:nvSpPr>
-          <p:cNvPr id="29" name="Shape 27"/>
-          <p:cNvSpPr/>
-          <p:nvPr/>
-        </p:nvSpPr>
-        <p:spPr>
-          <a:xfrm>
-            <a:off x="1874520" y="3273552"/>
-            <a:ext cx="6903720" cy="658368"/>
-          </a:xfrm>
-          <a:prstGeom prst="rect">
-            <a:avLst>
-              <a:gd name="adj" fmla="val 8333"/>
-            </a:avLst>
-          </a:prstGeom>
-          <a:solidFill>
-            <a:srgbClr val="F8FAFC"/>
-          </a:solidFill>
-          <a:ln w="12700">
-            <a:solidFill>
-              <a:srgbClr val="E2E8F0"/>
-            </a:solidFill>
-            <a:prstDash val="dash"/>
-          </a:ln>
-        </p:spPr>
-      </p:sp>
-      <p:sp>
-        <p:nvSpPr>
-          <p:cNvPr id="30" name="Text 28"/>
-          <p:cNvSpPr/>
-          <p:nvPr/>
-        </p:nvSpPr>
-        <p:spPr>
-          <a:xfrm>
-            <a:off x="1874520" y="3273552"/>
-            <a:ext cx="6903720" cy="658368"/>
-          </a:xfrm>
-          <a:prstGeom prst="rect">
-            <a:avLst/>
-          </a:prstGeom>
-          <a:noFill/>
-          <a:ln/>
-        </p:spPr>
-        <p:txBody>
-          <a:bodyPr wrap="square" rtlCol="0" anchor="ctr"/>
-          <a:lstStyle/>
-          <a:p>
-            <a:pPr algn="ctr" indent="0" marL="0">
-              <a:buNone/>
-            </a:pPr>
-            <a:r>
-              <a:rPr lang="en-US" sz="1100" i="1" dirty="0">
-                <a:solidFill>
-                  <a:srgbClr val="CBD5E1"/>
-                </a:solidFill>
-                <a:latin typeface="Calibri" pitchFamily="34" charset="0"/>
-                <a:ea typeface="Calibri" pitchFamily="34" charset="-122"/>
-                <a:cs typeface="Calibri" pitchFamily="34" charset="-120"/>
-              </a:rPr>
-              <a:t>Write here...</a:t>
-            </a:r>
-            <a:endParaRPr lang="en-US" sz="1100" dirty="0"/>
-          </a:p>
-        </p:txBody>
-      </p:sp>
-      <p:sp>
-        <p:nvSpPr>
           <p:cNvPr id="31" name="Shape 29"/>
           <p:cNvSpPr/>
           <p:nvPr/>
         </p:nvSpPr>
         <p:spPr>
           <a:xfrm>
-            <a:off x="365760" y="4096512"/>
-            <a:ext cx="1371600" cy="804672"/>
+            <a:off x="1874520" y="4096512"/>
+            <a:ext cx="6903720" cy="804672"/>
           </a:xfrm>
           <a:prstGeom prst="rect">
             <a:avLst>
@@ -19308,85 +19245,19 @@
             </a:avLst>
           </a:prstGeom>
           <a:solidFill>
-            <a:srgbClr val="E2E8F0"/>
+            <a:srgbClr val="F8FAFC"/>
           </a:solidFill>
           <a:ln w="12700">
             <a:solidFill>
               <a:srgbClr val="E2E8F0"/>
             </a:solidFill>
-            <a:prstDash val="solid"/>
+            <a:prstDash val="dash"/>
           </a:ln>
         </p:spPr>
       </p:sp>
       <p:sp>
         <p:nvSpPr>
           <p:cNvPr id="32" name="Text 30"/>
-          <p:cNvSpPr/>
-          <p:nvPr/>
-        </p:nvSpPr>
-        <p:spPr>
-          <a:xfrm>
-            <a:off x="365760" y="4096512"/>
-            <a:ext cx="1371600" cy="804672"/>
-          </a:xfrm>
-          <a:prstGeom prst="rect">
-            <a:avLst/>
-          </a:prstGeom>
-          <a:noFill/>
-          <a:ln/>
-        </p:spPr>
-        <p:txBody>
-          <a:bodyPr wrap="square" lIns="0" tIns="0" rIns="0" bIns="0" rtlCol="0" anchor="ctr"/>
-          <a:lstStyle/>
-          <a:p>
-            <a:pPr algn="ctr" indent="0" marL="0">
-              <a:buNone/>
-            </a:pPr>
-            <a:r>
-              <a:rPr lang="en-US" sz="1100" b="1" dirty="0">
-                <a:solidFill>
-                  <a:srgbClr val="475569"/>
-                </a:solidFill>
-                <a:latin typeface="Trebuchet MS" pitchFamily="34" charset="0"/>
-                <a:ea typeface="Trebuchet MS" pitchFamily="34" charset="-122"/>
-                <a:cs typeface="Trebuchet MS" pitchFamily="34" charset="-120"/>
-              </a:rPr>
-              <a:t>Phonemes</a:t>
-            </a:r>
-            <a:endParaRPr lang="en-US" sz="1100" dirty="0"/>
-          </a:p>
-        </p:txBody>
-      </p:sp>
-      <p:sp>
-        <p:nvSpPr>
-          <p:cNvPr id="33" name="Shape 31"/>
-          <p:cNvSpPr/>
-          <p:nvPr/>
-        </p:nvSpPr>
-        <p:spPr>
-          <a:xfrm>
-            <a:off x="1874520" y="4096512"/>
-            <a:ext cx="6903720" cy="804672"/>
-          </a:xfrm>
-          <a:prstGeom prst="rect">
-            <a:avLst>
-              <a:gd name="adj" fmla="val 6818"/>
-            </a:avLst>
-          </a:prstGeom>
-          <a:solidFill>
-            <a:srgbClr val="F8FAFC"/>
-          </a:solidFill>
-          <a:ln w="12700">
-            <a:solidFill>
-              <a:srgbClr val="E2E8F0"/>
-            </a:solidFill>
-            <a:prstDash val="dash"/>
-          </a:ln>
-        </p:spPr>
-      </p:sp>
-      <p:sp>
-        <p:nvSpPr>
-          <p:cNvPr id="34" name="Text 32"/>
           <p:cNvSpPr/>
           <p:nvPr/>
         </p:nvSpPr>
@@ -19709,7 +19580,7 @@
                 <a:ea typeface="Calibri" pitchFamily="34" charset="-122"/>
                 <a:cs typeface="Calibri" pitchFamily="34" charset="-120"/>
               </a:rPr>
-              <a:t>Word Labs  •  wordlabs.app  •  Root: 'tend' = to stretch, reach, or extend</a:t>
+              <a:t>Word Labs  •  wordlabs.app  •  Root: 'tend' = stretch, reach, or extend</a:t>
             </a:r>
             <a:endParaRPr lang="en-US" sz="800" dirty="0"/>
           </a:p>
@@ -19848,7 +19719,7 @@
                 <a:ea typeface="Trebuchet MS" pitchFamily="34" charset="-122"/>
                 <a:cs typeface="Trebuchet MS" pitchFamily="34" charset="-120"/>
               </a:rPr>
-              <a:t>attention</a:t>
+              <a:t>contender</a:t>
             </a:r>
             <a:endParaRPr lang="en-US" sz="2800" dirty="0"/>
           </a:p>
@@ -19987,7 +19858,7 @@
                 <a:ea typeface="Trebuchet MS" pitchFamily="34" charset="-122"/>
                 <a:cs typeface="Trebuchet MS" pitchFamily="34" charset="-120"/>
               </a:rPr>
-              <a:t>at</a:t>
+              <a:t>con</a:t>
             </a:r>
             <a:endParaRPr lang="en-US" sz="1300" dirty="0"/>
           </a:p>
@@ -20026,7 +19897,7 @@
                 <a:ea typeface="Calibri" pitchFamily="34" charset="-122"/>
                 <a:cs typeface="Calibri" pitchFamily="34" charset="-120"/>
               </a:rPr>
-              <a:t>toward</a:t>
+              <a:t>together, with</a:t>
             </a:r>
             <a:endParaRPr lang="en-US" sz="850" dirty="0"/>
           </a:p>
@@ -20034,46 +19905,7 @@
       </p:sp>
       <p:sp>
         <p:nvSpPr>
-          <p:cNvPr id="19" name="Text 17"/>
-          <p:cNvSpPr/>
-          <p:nvPr/>
-        </p:nvSpPr>
-        <p:spPr>
-          <a:xfrm>
-            <a:off x="2221992" y="2752344"/>
-            <a:ext cx="1828800" cy="182880"/>
-          </a:xfrm>
-          <a:prstGeom prst="rect">
-            <a:avLst/>
-          </a:prstGeom>
-          <a:noFill/>
-          <a:ln/>
-        </p:spPr>
-        <p:txBody>
-          <a:bodyPr wrap="square" lIns="0" tIns="0" rIns="0" bIns="0" rtlCol="0" anchor="t"/>
-          <a:lstStyle/>
-          <a:p>
-            <a:pPr algn="ctr" indent="0" marL="0">
-              <a:buNone/>
-            </a:pPr>
-            <a:r>
-              <a:rPr lang="en-US" sz="700" i="1" dirty="0">
-                <a:solidFill>
-                  <a:srgbClr val="94A3B8"/>
-                </a:solidFill>
-                <a:latin typeface="Calibri" pitchFamily="34" charset="0"/>
-                <a:ea typeface="Calibri" pitchFamily="34" charset="-122"/>
-                <a:cs typeface="Calibri" pitchFamily="34" charset="-120"/>
-              </a:rPr>
-              <a:t>ad → at before 't'</a:t>
-            </a:r>
-            <a:endParaRPr lang="en-US" sz="700" dirty="0"/>
-          </a:p>
-        </p:txBody>
-      </p:sp>
-      <p:sp>
-        <p:nvSpPr>
-          <p:cNvPr id="20" name="Shape 18"/>
+          <p:cNvPr id="19" name="Shape 17"/>
           <p:cNvSpPr/>
           <p:nvPr/>
         </p:nvSpPr>
@@ -20107,7 +19939,7 @@
       </p:sp>
       <p:sp>
         <p:nvSpPr>
-          <p:cNvPr id="21" name="Text 19"/>
+          <p:cNvPr id="20" name="Text 18"/>
           <p:cNvSpPr/>
           <p:nvPr/>
         </p:nvSpPr>
@@ -20146,7 +19978,7 @@
       </p:sp>
       <p:sp>
         <p:nvSpPr>
-          <p:cNvPr id="22" name="Text 20"/>
+          <p:cNvPr id="21" name="Text 19"/>
           <p:cNvSpPr/>
           <p:nvPr/>
         </p:nvSpPr>
@@ -20177,7 +20009,7 @@
                 <a:ea typeface="Calibri" pitchFamily="34" charset="-122"/>
                 <a:cs typeface="Calibri" pitchFamily="34" charset="-120"/>
               </a:rPr>
-              <a:t>to stretch or reach</a:t>
+              <a:t>stretch, reach</a:t>
             </a:r>
             <a:endParaRPr lang="en-US" sz="850" dirty="0"/>
           </a:p>
@@ -20185,7 +20017,7 @@
       </p:sp>
       <p:sp>
         <p:nvSpPr>
-          <p:cNvPr id="23" name="Shape 21"/>
+          <p:cNvPr id="22" name="Shape 20"/>
           <p:cNvSpPr/>
           <p:nvPr/>
         </p:nvSpPr>
@@ -20219,7 +20051,7 @@
       </p:sp>
       <p:sp>
         <p:nvSpPr>
-          <p:cNvPr id="24" name="Text 22"/>
+          <p:cNvPr id="23" name="Text 21"/>
           <p:cNvSpPr/>
           <p:nvPr/>
         </p:nvSpPr>
@@ -20250,7 +20082,7 @@
                 <a:ea typeface="Trebuchet MS" pitchFamily="34" charset="-122"/>
                 <a:cs typeface="Trebuchet MS" pitchFamily="34" charset="-120"/>
               </a:rPr>
-              <a:t>tion</a:t>
+              <a:t>er</a:t>
             </a:r>
             <a:endParaRPr lang="en-US" sz="1300" dirty="0"/>
           </a:p>
@@ -20258,7 +20090,7 @@
       </p:sp>
       <p:sp>
         <p:nvSpPr>
-          <p:cNvPr id="25" name="Text 23"/>
+          <p:cNvPr id="24" name="Text 22"/>
           <p:cNvSpPr/>
           <p:nvPr/>
         </p:nvSpPr>
@@ -20289,7 +20121,7 @@
                 <a:ea typeface="Calibri" pitchFamily="34" charset="-122"/>
                 <a:cs typeface="Calibri" pitchFamily="34" charset="-120"/>
               </a:rPr>
-              <a:t>act or state of</a:t>
+              <a:t>person who does</a:t>
             </a:r>
             <a:endParaRPr lang="en-US" sz="850" dirty="0"/>
           </a:p>
@@ -20297,46 +20129,7 @@
       </p:sp>
       <p:sp>
         <p:nvSpPr>
-          <p:cNvPr id="26" name="Text 24"/>
-          <p:cNvSpPr/>
-          <p:nvPr/>
-        </p:nvSpPr>
-        <p:spPr>
-          <a:xfrm>
-            <a:off x="6519672" y="2752344"/>
-            <a:ext cx="1828800" cy="182880"/>
-          </a:xfrm>
-          <a:prstGeom prst="rect">
-            <a:avLst/>
-          </a:prstGeom>
-          <a:noFill/>
-          <a:ln/>
-        </p:spPr>
-        <p:txBody>
-          <a:bodyPr wrap="square" lIns="0" tIns="0" rIns="0" bIns="0" rtlCol="0" anchor="t"/>
-          <a:lstStyle/>
-          <a:p>
-            <a:pPr algn="ctr" indent="0" marL="0">
-              <a:buNone/>
-            </a:pPr>
-            <a:r>
-              <a:rPr lang="en-US" sz="700" i="1" dirty="0">
-                <a:solidFill>
-                  <a:srgbClr val="94A3B8"/>
-                </a:solidFill>
-                <a:latin typeface="Calibri" pitchFamily="34" charset="0"/>
-                <a:ea typeface="Calibri" pitchFamily="34" charset="-122"/>
-                <a:cs typeface="Calibri" pitchFamily="34" charset="-120"/>
-              </a:rPr>
-              <a:t>'d' changes to 't' before -ion</a:t>
-            </a:r>
-            <a:endParaRPr lang="en-US" sz="700" dirty="0"/>
-          </a:p>
-        </p:txBody>
-      </p:sp>
-      <p:sp>
-        <p:nvSpPr>
-          <p:cNvPr id="27" name="Shape 25"/>
+          <p:cNvPr id="25" name="Shape 23"/>
           <p:cNvSpPr/>
           <p:nvPr/>
         </p:nvSpPr>
@@ -20363,7 +20156,7 @@
       </p:sp>
       <p:sp>
         <p:nvSpPr>
-          <p:cNvPr id="28" name="Text 26"/>
+          <p:cNvPr id="26" name="Text 24"/>
           <p:cNvSpPr/>
           <p:nvPr/>
         </p:nvSpPr>
@@ -20402,7 +20195,7 @@
       </p:sp>
       <p:sp>
         <p:nvSpPr>
-          <p:cNvPr id="29" name="Shape 27"/>
+          <p:cNvPr id="27" name="Shape 25"/>
           <p:cNvSpPr/>
           <p:nvPr/>
         </p:nvSpPr>
@@ -20429,7 +20222,7 @@
       </p:sp>
       <p:sp>
         <p:nvSpPr>
-          <p:cNvPr id="30" name="Shape 28"/>
+          <p:cNvPr id="28" name="Shape 26"/>
           <p:cNvSpPr/>
           <p:nvPr/>
         </p:nvSpPr>
@@ -20456,7 +20249,7 @@
       </p:sp>
       <p:sp>
         <p:nvSpPr>
-          <p:cNvPr id="31" name="Text 29"/>
+          <p:cNvPr id="29" name="Text 27"/>
           <p:cNvSpPr/>
           <p:nvPr/>
         </p:nvSpPr>
@@ -20487,7 +20280,7 @@
                 <a:ea typeface="Trebuchet MS" pitchFamily="34" charset="-122"/>
                 <a:cs typeface="Trebuchet MS" pitchFamily="34" charset="-120"/>
               </a:rPr>
-              <a:t>at</a:t>
+              <a:t>con</a:t>
             </a:r>
             <a:endParaRPr lang="en-US" sz="1400" dirty="0"/>
           </a:p>
@@ -20495,7 +20288,7 @@
       </p:sp>
       <p:sp>
         <p:nvSpPr>
-          <p:cNvPr id="32" name="Text 30"/>
+          <p:cNvPr id="30" name="Text 28"/>
           <p:cNvSpPr/>
           <p:nvPr/>
         </p:nvSpPr>
@@ -20534,7 +20327,7 @@
       </p:sp>
       <p:sp>
         <p:nvSpPr>
-          <p:cNvPr id="33" name="Shape 31"/>
+          <p:cNvPr id="31" name="Shape 29"/>
           <p:cNvSpPr/>
           <p:nvPr/>
         </p:nvSpPr>
@@ -20561,7 +20354,7 @@
       </p:sp>
       <p:sp>
         <p:nvSpPr>
-          <p:cNvPr id="34" name="Text 32"/>
+          <p:cNvPr id="32" name="Text 30"/>
           <p:cNvSpPr/>
           <p:nvPr/>
         </p:nvSpPr>
@@ -20600,7 +20393,7 @@
       </p:sp>
       <p:sp>
         <p:nvSpPr>
-          <p:cNvPr id="35" name="Text 33"/>
+          <p:cNvPr id="33" name="Text 31"/>
           <p:cNvSpPr/>
           <p:nvPr/>
         </p:nvSpPr>
@@ -20639,7 +20432,7 @@
       </p:sp>
       <p:sp>
         <p:nvSpPr>
-          <p:cNvPr id="36" name="Shape 34"/>
+          <p:cNvPr id="34" name="Shape 32"/>
           <p:cNvSpPr/>
           <p:nvPr/>
         </p:nvSpPr>
@@ -20666,7 +20459,7 @@
       </p:sp>
       <p:sp>
         <p:nvSpPr>
-          <p:cNvPr id="37" name="Text 35"/>
+          <p:cNvPr id="35" name="Text 33"/>
           <p:cNvSpPr/>
           <p:nvPr/>
         </p:nvSpPr>
@@ -20697,7 +20490,7 @@
                 <a:ea typeface="Trebuchet MS" pitchFamily="34" charset="-122"/>
                 <a:cs typeface="Trebuchet MS" pitchFamily="34" charset="-120"/>
               </a:rPr>
-              <a:t>tion</a:t>
+              <a:t>der</a:t>
             </a:r>
             <a:endParaRPr lang="en-US" sz="1400" dirty="0"/>
           </a:p>
@@ -20705,7 +20498,7 @@
       </p:sp>
       <p:sp>
         <p:nvSpPr>
-          <p:cNvPr id="38" name="Shape 36"/>
+          <p:cNvPr id="36" name="Shape 34"/>
           <p:cNvSpPr/>
           <p:nvPr/>
         </p:nvSpPr>
@@ -20732,7 +20525,7 @@
       </p:sp>
       <p:sp>
         <p:nvSpPr>
-          <p:cNvPr id="39" name="Text 37"/>
+          <p:cNvPr id="37" name="Text 35"/>
           <p:cNvSpPr/>
           <p:nvPr/>
         </p:nvSpPr>
@@ -20771,7 +20564,7 @@
       </p:sp>
       <p:sp>
         <p:nvSpPr>
-          <p:cNvPr id="40" name="Shape 38"/>
+          <p:cNvPr id="38" name="Shape 36"/>
           <p:cNvSpPr/>
           <p:nvPr/>
         </p:nvSpPr>
@@ -20798,7 +20591,7 @@
       </p:sp>
       <p:sp>
         <p:nvSpPr>
-          <p:cNvPr id="41" name="Text 39"/>
+          <p:cNvPr id="39" name="Text 37"/>
           <p:cNvSpPr/>
           <p:nvPr/>
         </p:nvSpPr>
@@ -21121,7 +20914,7 @@
                 <a:ea typeface="Calibri" pitchFamily="34" charset="-122"/>
                 <a:cs typeface="Calibri" pitchFamily="34" charset="-120"/>
               </a:rPr>
-              <a:t>Word Labs  •  wordlabs.app  •  Root: 'tend' = to stretch, reach, or extend</a:t>
+              <a:t>Word Labs  •  wordlabs.app  •  Root: 'tend' = stretch, reach, or extend</a:t>
             </a:r>
             <a:endParaRPr lang="en-US" sz="800" dirty="0"/>
           </a:p>
@@ -21260,7 +21053,7 @@
                 <a:ea typeface="Trebuchet MS" pitchFamily="34" charset="-122"/>
                 <a:cs typeface="Trebuchet MS" pitchFamily="34" charset="-120"/>
               </a:rPr>
-              <a:t>attention</a:t>
+              <a:t>contender</a:t>
             </a:r>
             <a:endParaRPr lang="en-US" sz="2800" dirty="0"/>
           </a:p>
@@ -21399,7 +21192,7 @@
                 <a:ea typeface="Trebuchet MS" pitchFamily="34" charset="-122"/>
                 <a:cs typeface="Trebuchet MS" pitchFamily="34" charset="-120"/>
               </a:rPr>
-              <a:t>at</a:t>
+              <a:t>con</a:t>
             </a:r>
             <a:endParaRPr lang="en-US" sz="1300" dirty="0"/>
           </a:p>
@@ -21438,7 +21231,7 @@
                 <a:ea typeface="Calibri" pitchFamily="34" charset="-122"/>
                 <a:cs typeface="Calibri" pitchFamily="34" charset="-120"/>
               </a:rPr>
-              <a:t>toward</a:t>
+              <a:t>together, with</a:t>
             </a:r>
             <a:endParaRPr lang="en-US" sz="850" dirty="0"/>
           </a:p>
@@ -21446,46 +21239,7 @@
       </p:sp>
       <p:sp>
         <p:nvSpPr>
-          <p:cNvPr id="19" name="Text 17"/>
-          <p:cNvSpPr/>
-          <p:nvPr/>
-        </p:nvSpPr>
-        <p:spPr>
-          <a:xfrm>
-            <a:off x="2221992" y="2752344"/>
-            <a:ext cx="1828800" cy="182880"/>
-          </a:xfrm>
-          <a:prstGeom prst="rect">
-            <a:avLst/>
-          </a:prstGeom>
-          <a:noFill/>
-          <a:ln/>
-        </p:spPr>
-        <p:txBody>
-          <a:bodyPr wrap="square" lIns="0" tIns="0" rIns="0" bIns="0" rtlCol="0" anchor="t"/>
-          <a:lstStyle/>
-          <a:p>
-            <a:pPr algn="ctr" indent="0" marL="0">
-              <a:buNone/>
-            </a:pPr>
-            <a:r>
-              <a:rPr lang="en-US" sz="700" i="1" dirty="0">
-                <a:solidFill>
-                  <a:srgbClr val="94A3B8"/>
-                </a:solidFill>
-                <a:latin typeface="Calibri" pitchFamily="34" charset="0"/>
-                <a:ea typeface="Calibri" pitchFamily="34" charset="-122"/>
-                <a:cs typeface="Calibri" pitchFamily="34" charset="-120"/>
-              </a:rPr>
-              <a:t>ad → at before 't'</a:t>
-            </a:r>
-            <a:endParaRPr lang="en-US" sz="700" dirty="0"/>
-          </a:p>
-        </p:txBody>
-      </p:sp>
-      <p:sp>
-        <p:nvSpPr>
-          <p:cNvPr id="20" name="Shape 18"/>
+          <p:cNvPr id="19" name="Shape 17"/>
           <p:cNvSpPr/>
           <p:nvPr/>
         </p:nvSpPr>
@@ -21519,7 +21273,7 @@
       </p:sp>
       <p:sp>
         <p:nvSpPr>
-          <p:cNvPr id="21" name="Text 19"/>
+          <p:cNvPr id="20" name="Text 18"/>
           <p:cNvSpPr/>
           <p:nvPr/>
         </p:nvSpPr>
@@ -21558,7 +21312,7 @@
       </p:sp>
       <p:sp>
         <p:nvSpPr>
-          <p:cNvPr id="22" name="Text 20"/>
+          <p:cNvPr id="21" name="Text 19"/>
           <p:cNvSpPr/>
           <p:nvPr/>
         </p:nvSpPr>
@@ -21589,7 +21343,7 @@
                 <a:ea typeface="Calibri" pitchFamily="34" charset="-122"/>
                 <a:cs typeface="Calibri" pitchFamily="34" charset="-120"/>
               </a:rPr>
-              <a:t>to stretch or reach</a:t>
+              <a:t>stretch, reach</a:t>
             </a:r>
             <a:endParaRPr lang="en-US" sz="850" dirty="0"/>
           </a:p>
@@ -21597,7 +21351,7 @@
       </p:sp>
       <p:sp>
         <p:nvSpPr>
-          <p:cNvPr id="23" name="Shape 21"/>
+          <p:cNvPr id="22" name="Shape 20"/>
           <p:cNvSpPr/>
           <p:nvPr/>
         </p:nvSpPr>
@@ -21631,7 +21385,7 @@
       </p:sp>
       <p:sp>
         <p:nvSpPr>
-          <p:cNvPr id="24" name="Text 22"/>
+          <p:cNvPr id="23" name="Text 21"/>
           <p:cNvSpPr/>
           <p:nvPr/>
         </p:nvSpPr>
@@ -21662,7 +21416,7 @@
                 <a:ea typeface="Trebuchet MS" pitchFamily="34" charset="-122"/>
                 <a:cs typeface="Trebuchet MS" pitchFamily="34" charset="-120"/>
               </a:rPr>
-              <a:t>tion</a:t>
+              <a:t>er</a:t>
             </a:r>
             <a:endParaRPr lang="en-US" sz="1300" dirty="0"/>
           </a:p>
@@ -21670,7 +21424,7 @@
       </p:sp>
       <p:sp>
         <p:nvSpPr>
-          <p:cNvPr id="25" name="Text 23"/>
+          <p:cNvPr id="24" name="Text 22"/>
           <p:cNvSpPr/>
           <p:nvPr/>
         </p:nvSpPr>
@@ -21701,7 +21455,7 @@
                 <a:ea typeface="Calibri" pitchFamily="34" charset="-122"/>
                 <a:cs typeface="Calibri" pitchFamily="34" charset="-120"/>
               </a:rPr>
-              <a:t>act or state of</a:t>
+              <a:t>person who does</a:t>
             </a:r>
             <a:endParaRPr lang="en-US" sz="850" dirty="0"/>
           </a:p>
@@ -21709,14 +21463,542 @@
       </p:sp>
       <p:sp>
         <p:nvSpPr>
+          <p:cNvPr id="25" name="Shape 23"/>
+          <p:cNvSpPr/>
+          <p:nvPr/>
+        </p:nvSpPr>
+        <p:spPr>
+          <a:xfrm>
+            <a:off x="365760" y="3273552"/>
+            <a:ext cx="1371600" cy="658368"/>
+          </a:xfrm>
+          <a:prstGeom prst="rect">
+            <a:avLst>
+              <a:gd name="adj" fmla="val 8333"/>
+            </a:avLst>
+          </a:prstGeom>
+          <a:solidFill>
+            <a:srgbClr val="E2E8F0"/>
+          </a:solidFill>
+          <a:ln w="12700">
+            <a:solidFill>
+              <a:srgbClr val="E2E8F0"/>
+            </a:solidFill>
+            <a:prstDash val="solid"/>
+          </a:ln>
+        </p:spPr>
+      </p:sp>
+      <p:sp>
+        <p:nvSpPr>
           <p:cNvPr id="26" name="Text 24"/>
           <p:cNvSpPr/>
           <p:nvPr/>
         </p:nvSpPr>
         <p:spPr>
           <a:xfrm>
-            <a:off x="6519672" y="2752344"/>
-            <a:ext cx="1828800" cy="182880"/>
+            <a:off x="365760" y="3273552"/>
+            <a:ext cx="1371600" cy="658368"/>
+          </a:xfrm>
+          <a:prstGeom prst="rect">
+            <a:avLst/>
+          </a:prstGeom>
+          <a:noFill/>
+          <a:ln/>
+        </p:spPr>
+        <p:txBody>
+          <a:bodyPr wrap="square" lIns="0" tIns="0" rIns="0" bIns="0" rtlCol="0" anchor="ctr"/>
+          <a:lstStyle/>
+          <a:p>
+            <a:pPr algn="ctr" indent="0" marL="0">
+              <a:buNone/>
+            </a:pPr>
+            <a:r>
+              <a:rPr lang="en-US" sz="1100" b="1" dirty="0">
+                <a:solidFill>
+                  <a:srgbClr val="475569"/>
+                </a:solidFill>
+                <a:latin typeface="Trebuchet MS" pitchFamily="34" charset="0"/>
+                <a:ea typeface="Trebuchet MS" pitchFamily="34" charset="-122"/>
+                <a:cs typeface="Trebuchet MS" pitchFamily="34" charset="-120"/>
+              </a:rPr>
+              <a:t>Syllables</a:t>
+            </a:r>
+            <a:endParaRPr lang="en-US" sz="1100" dirty="0"/>
+          </a:p>
+        </p:txBody>
+      </p:sp>
+      <p:sp>
+        <p:nvSpPr>
+          <p:cNvPr id="27" name="Shape 25"/>
+          <p:cNvSpPr/>
+          <p:nvPr/>
+        </p:nvSpPr>
+        <p:spPr>
+          <a:xfrm>
+            <a:off x="1874520" y="3273552"/>
+            <a:ext cx="6903720" cy="658368"/>
+          </a:xfrm>
+          <a:prstGeom prst="rect">
+            <a:avLst>
+              <a:gd name="adj" fmla="val 8333"/>
+            </a:avLst>
+          </a:prstGeom>
+          <a:solidFill>
+            <a:srgbClr val="CCFBF1"/>
+          </a:solidFill>
+          <a:ln w="12700">
+            <a:solidFill>
+              <a:srgbClr val="0D9488"/>
+            </a:solidFill>
+            <a:prstDash val="solid"/>
+          </a:ln>
+        </p:spPr>
+      </p:sp>
+      <p:sp>
+        <p:nvSpPr>
+          <p:cNvPr id="28" name="Shape 26"/>
+          <p:cNvSpPr/>
+          <p:nvPr/>
+        </p:nvSpPr>
+        <p:spPr>
+          <a:xfrm>
+            <a:off x="2313432" y="3364992"/>
+            <a:ext cx="1645920" cy="475488"/>
+          </a:xfrm>
+          <a:prstGeom prst="rect">
+            <a:avLst>
+              <a:gd name="adj" fmla="val 9615"/>
+            </a:avLst>
+          </a:prstGeom>
+          <a:solidFill>
+            <a:srgbClr val="FFFFFF"/>
+          </a:solidFill>
+          <a:ln w="12700">
+            <a:solidFill>
+              <a:srgbClr val="0D9488"/>
+            </a:solidFill>
+            <a:prstDash val="solid"/>
+          </a:ln>
+        </p:spPr>
+      </p:sp>
+      <p:sp>
+        <p:nvSpPr>
+          <p:cNvPr id="29" name="Text 27"/>
+          <p:cNvSpPr/>
+          <p:nvPr/>
+        </p:nvSpPr>
+        <p:spPr>
+          <a:xfrm>
+            <a:off x="2313432" y="3364992"/>
+            <a:ext cx="1645920" cy="475488"/>
+          </a:xfrm>
+          <a:prstGeom prst="rect">
+            <a:avLst/>
+          </a:prstGeom>
+          <a:noFill/>
+          <a:ln/>
+        </p:spPr>
+        <p:txBody>
+          <a:bodyPr wrap="square" lIns="0" tIns="0" rIns="0" bIns="0" rtlCol="0" anchor="ctr"/>
+          <a:lstStyle/>
+          <a:p>
+            <a:pPr algn="ctr" indent="0" marL="0">
+              <a:buNone/>
+            </a:pPr>
+            <a:r>
+              <a:rPr lang="en-US" sz="1400" b="1" dirty="0">
+                <a:solidFill>
+                  <a:srgbClr val="0D9488"/>
+                </a:solidFill>
+                <a:latin typeface="Trebuchet MS" pitchFamily="34" charset="0"/>
+                <a:ea typeface="Trebuchet MS" pitchFamily="34" charset="-122"/>
+                <a:cs typeface="Trebuchet MS" pitchFamily="34" charset="-120"/>
+              </a:rPr>
+              <a:t>con</a:t>
+            </a:r>
+            <a:endParaRPr lang="en-US" sz="1400" dirty="0"/>
+          </a:p>
+        </p:txBody>
+      </p:sp>
+      <p:sp>
+        <p:nvSpPr>
+          <p:cNvPr id="30" name="Text 28"/>
+          <p:cNvSpPr/>
+          <p:nvPr/>
+        </p:nvSpPr>
+        <p:spPr>
+          <a:xfrm>
+            <a:off x="3959352" y="3364992"/>
+            <a:ext cx="411480" cy="475488"/>
+          </a:xfrm>
+          <a:prstGeom prst="rect">
+            <a:avLst/>
+          </a:prstGeom>
+          <a:noFill/>
+          <a:ln/>
+        </p:spPr>
+        <p:txBody>
+          <a:bodyPr wrap="square" lIns="0" tIns="0" rIns="0" bIns="0" rtlCol="0" anchor="ctr"/>
+          <a:lstStyle/>
+          <a:p>
+            <a:pPr algn="ctr" indent="0" marL="0">
+              <a:buNone/>
+            </a:pPr>
+            <a:r>
+              <a:rPr lang="en-US" sz="1600" b="1" dirty="0">
+                <a:solidFill>
+                  <a:srgbClr val="0D9488"/>
+                </a:solidFill>
+                <a:latin typeface="Trebuchet MS" pitchFamily="34" charset="0"/>
+                <a:ea typeface="Trebuchet MS" pitchFamily="34" charset="-122"/>
+                <a:cs typeface="Trebuchet MS" pitchFamily="34" charset="-120"/>
+              </a:rPr>
+              <a:t>·</a:t>
+            </a:r>
+            <a:endParaRPr lang="en-US" sz="1600" dirty="0"/>
+          </a:p>
+        </p:txBody>
+      </p:sp>
+      <p:sp>
+        <p:nvSpPr>
+          <p:cNvPr id="31" name="Shape 29"/>
+          <p:cNvSpPr/>
+          <p:nvPr/>
+        </p:nvSpPr>
+        <p:spPr>
+          <a:xfrm>
+            <a:off x="4370832" y="3364992"/>
+            <a:ext cx="1645920" cy="475488"/>
+          </a:xfrm>
+          <a:prstGeom prst="rect">
+            <a:avLst>
+              <a:gd name="adj" fmla="val 9615"/>
+            </a:avLst>
+          </a:prstGeom>
+          <a:solidFill>
+            <a:srgbClr val="FFFFFF"/>
+          </a:solidFill>
+          <a:ln w="12700">
+            <a:solidFill>
+              <a:srgbClr val="0D9488"/>
+            </a:solidFill>
+            <a:prstDash val="solid"/>
+          </a:ln>
+        </p:spPr>
+      </p:sp>
+      <p:sp>
+        <p:nvSpPr>
+          <p:cNvPr id="32" name="Text 30"/>
+          <p:cNvSpPr/>
+          <p:nvPr/>
+        </p:nvSpPr>
+        <p:spPr>
+          <a:xfrm>
+            <a:off x="4370832" y="3364992"/>
+            <a:ext cx="1645920" cy="475488"/>
+          </a:xfrm>
+          <a:prstGeom prst="rect">
+            <a:avLst/>
+          </a:prstGeom>
+          <a:noFill/>
+          <a:ln/>
+        </p:spPr>
+        <p:txBody>
+          <a:bodyPr wrap="square" lIns="0" tIns="0" rIns="0" bIns="0" rtlCol="0" anchor="ctr"/>
+          <a:lstStyle/>
+          <a:p>
+            <a:pPr algn="ctr" indent="0" marL="0">
+              <a:buNone/>
+            </a:pPr>
+            <a:r>
+              <a:rPr lang="en-US" sz="1400" b="1" dirty="0">
+                <a:solidFill>
+                  <a:srgbClr val="0D9488"/>
+                </a:solidFill>
+                <a:latin typeface="Trebuchet MS" pitchFamily="34" charset="0"/>
+                <a:ea typeface="Trebuchet MS" pitchFamily="34" charset="-122"/>
+                <a:cs typeface="Trebuchet MS" pitchFamily="34" charset="-120"/>
+              </a:rPr>
+              <a:t>ten</a:t>
+            </a:r>
+            <a:endParaRPr lang="en-US" sz="1400" dirty="0"/>
+          </a:p>
+        </p:txBody>
+      </p:sp>
+      <p:sp>
+        <p:nvSpPr>
+          <p:cNvPr id="33" name="Text 31"/>
+          <p:cNvSpPr/>
+          <p:nvPr/>
+        </p:nvSpPr>
+        <p:spPr>
+          <a:xfrm>
+            <a:off x="6016752" y="3364992"/>
+            <a:ext cx="411480" cy="475488"/>
+          </a:xfrm>
+          <a:prstGeom prst="rect">
+            <a:avLst/>
+          </a:prstGeom>
+          <a:noFill/>
+          <a:ln/>
+        </p:spPr>
+        <p:txBody>
+          <a:bodyPr wrap="square" lIns="0" tIns="0" rIns="0" bIns="0" rtlCol="0" anchor="ctr"/>
+          <a:lstStyle/>
+          <a:p>
+            <a:pPr algn="ctr" indent="0" marL="0">
+              <a:buNone/>
+            </a:pPr>
+            <a:r>
+              <a:rPr lang="en-US" sz="1600" b="1" dirty="0">
+                <a:solidFill>
+                  <a:srgbClr val="0D9488"/>
+                </a:solidFill>
+                <a:latin typeface="Trebuchet MS" pitchFamily="34" charset="0"/>
+                <a:ea typeface="Trebuchet MS" pitchFamily="34" charset="-122"/>
+                <a:cs typeface="Trebuchet MS" pitchFamily="34" charset="-120"/>
+              </a:rPr>
+              <a:t>·</a:t>
+            </a:r>
+            <a:endParaRPr lang="en-US" sz="1600" dirty="0"/>
+          </a:p>
+        </p:txBody>
+      </p:sp>
+      <p:sp>
+        <p:nvSpPr>
+          <p:cNvPr id="34" name="Shape 32"/>
+          <p:cNvSpPr/>
+          <p:nvPr/>
+        </p:nvSpPr>
+        <p:spPr>
+          <a:xfrm>
+            <a:off x="6428232" y="3364992"/>
+            <a:ext cx="1645920" cy="475488"/>
+          </a:xfrm>
+          <a:prstGeom prst="rect">
+            <a:avLst>
+              <a:gd name="adj" fmla="val 9615"/>
+            </a:avLst>
+          </a:prstGeom>
+          <a:solidFill>
+            <a:srgbClr val="FFFFFF"/>
+          </a:solidFill>
+          <a:ln w="12700">
+            <a:solidFill>
+              <a:srgbClr val="0D9488"/>
+            </a:solidFill>
+            <a:prstDash val="solid"/>
+          </a:ln>
+        </p:spPr>
+      </p:sp>
+      <p:sp>
+        <p:nvSpPr>
+          <p:cNvPr id="35" name="Text 33"/>
+          <p:cNvSpPr/>
+          <p:nvPr/>
+        </p:nvSpPr>
+        <p:spPr>
+          <a:xfrm>
+            <a:off x="6428232" y="3364992"/>
+            <a:ext cx="1645920" cy="475488"/>
+          </a:xfrm>
+          <a:prstGeom prst="rect">
+            <a:avLst/>
+          </a:prstGeom>
+          <a:noFill/>
+          <a:ln/>
+        </p:spPr>
+        <p:txBody>
+          <a:bodyPr wrap="square" lIns="0" tIns="0" rIns="0" bIns="0" rtlCol="0" anchor="ctr"/>
+          <a:lstStyle/>
+          <a:p>
+            <a:pPr algn="ctr" indent="0" marL="0">
+              <a:buNone/>
+            </a:pPr>
+            <a:r>
+              <a:rPr lang="en-US" sz="1400" b="1" dirty="0">
+                <a:solidFill>
+                  <a:srgbClr val="0D9488"/>
+                </a:solidFill>
+                <a:latin typeface="Trebuchet MS" pitchFamily="34" charset="0"/>
+                <a:ea typeface="Trebuchet MS" pitchFamily="34" charset="-122"/>
+                <a:cs typeface="Trebuchet MS" pitchFamily="34" charset="-120"/>
+              </a:rPr>
+              <a:t>der</a:t>
+            </a:r>
+            <a:endParaRPr lang="en-US" sz="1400" dirty="0"/>
+          </a:p>
+        </p:txBody>
+      </p:sp>
+      <p:sp>
+        <p:nvSpPr>
+          <p:cNvPr id="36" name="Shape 34"/>
+          <p:cNvSpPr/>
+          <p:nvPr/>
+        </p:nvSpPr>
+        <p:spPr>
+          <a:xfrm>
+            <a:off x="365760" y="4096512"/>
+            <a:ext cx="1371600" cy="804672"/>
+          </a:xfrm>
+          <a:prstGeom prst="rect">
+            <a:avLst>
+              <a:gd name="adj" fmla="val 6818"/>
+            </a:avLst>
+          </a:prstGeom>
+          <a:solidFill>
+            <a:srgbClr val="E2E8F0"/>
+          </a:solidFill>
+          <a:ln w="12700">
+            <a:solidFill>
+              <a:srgbClr val="E2E8F0"/>
+            </a:solidFill>
+            <a:prstDash val="solid"/>
+          </a:ln>
+        </p:spPr>
+      </p:sp>
+      <p:sp>
+        <p:nvSpPr>
+          <p:cNvPr id="37" name="Text 35"/>
+          <p:cNvSpPr/>
+          <p:nvPr/>
+        </p:nvSpPr>
+        <p:spPr>
+          <a:xfrm>
+            <a:off x="365760" y="4096512"/>
+            <a:ext cx="1371600" cy="804672"/>
+          </a:xfrm>
+          <a:prstGeom prst="rect">
+            <a:avLst/>
+          </a:prstGeom>
+          <a:noFill/>
+          <a:ln/>
+        </p:spPr>
+        <p:txBody>
+          <a:bodyPr wrap="square" lIns="0" tIns="0" rIns="0" bIns="0" rtlCol="0" anchor="ctr"/>
+          <a:lstStyle/>
+          <a:p>
+            <a:pPr algn="ctr" indent="0" marL="0">
+              <a:buNone/>
+            </a:pPr>
+            <a:r>
+              <a:rPr lang="en-US" sz="1100" b="1" dirty="0">
+                <a:solidFill>
+                  <a:srgbClr val="475569"/>
+                </a:solidFill>
+                <a:latin typeface="Trebuchet MS" pitchFamily="34" charset="0"/>
+                <a:ea typeface="Trebuchet MS" pitchFamily="34" charset="-122"/>
+                <a:cs typeface="Trebuchet MS" pitchFamily="34" charset="-120"/>
+              </a:rPr>
+              <a:t>Phonemes</a:t>
+            </a:r>
+            <a:endParaRPr lang="en-US" sz="1100" dirty="0"/>
+          </a:p>
+        </p:txBody>
+      </p:sp>
+      <p:sp>
+        <p:nvSpPr>
+          <p:cNvPr id="38" name="Shape 36"/>
+          <p:cNvSpPr/>
+          <p:nvPr/>
+        </p:nvSpPr>
+        <p:spPr>
+          <a:xfrm>
+            <a:off x="1874520" y="4096512"/>
+            <a:ext cx="6903720" cy="804672"/>
+          </a:xfrm>
+          <a:prstGeom prst="rect">
+            <a:avLst>
+              <a:gd name="adj" fmla="val 6818"/>
+            </a:avLst>
+          </a:prstGeom>
+          <a:solidFill>
+            <a:srgbClr val="FCE7F3"/>
+          </a:solidFill>
+          <a:ln w="12700">
+            <a:solidFill>
+              <a:srgbClr val="DB2777"/>
+            </a:solidFill>
+            <a:prstDash val="solid"/>
+          </a:ln>
+        </p:spPr>
+      </p:sp>
+      <p:sp>
+        <p:nvSpPr>
+          <p:cNvPr id="39" name="Shape 37"/>
+          <p:cNvSpPr/>
+          <p:nvPr/>
+        </p:nvSpPr>
+        <p:spPr>
+          <a:xfrm>
+            <a:off x="2023872" y="4169664"/>
+            <a:ext cx="685800" cy="384048"/>
+          </a:xfrm>
+          <a:prstGeom prst="rect">
+            <a:avLst>
+              <a:gd name="adj" fmla="val 9524"/>
+            </a:avLst>
+          </a:prstGeom>
+          <a:solidFill>
+            <a:srgbClr val="FFFFFF"/>
+          </a:solidFill>
+          <a:ln w="12700">
+            <a:solidFill>
+              <a:srgbClr val="DB2777"/>
+            </a:solidFill>
+            <a:prstDash val="solid"/>
+          </a:ln>
+        </p:spPr>
+      </p:sp>
+      <p:sp>
+        <p:nvSpPr>
+          <p:cNvPr id="40" name="Text 38"/>
+          <p:cNvSpPr/>
+          <p:nvPr/>
+        </p:nvSpPr>
+        <p:spPr>
+          <a:xfrm>
+            <a:off x="2023872" y="4169664"/>
+            <a:ext cx="685800" cy="384048"/>
+          </a:xfrm>
+          <a:prstGeom prst="rect">
+            <a:avLst/>
+          </a:prstGeom>
+          <a:noFill/>
+          <a:ln/>
+        </p:spPr>
+        <p:txBody>
+          <a:bodyPr wrap="square" lIns="0" tIns="0" rIns="0" bIns="0" rtlCol="0" anchor="ctr"/>
+          <a:lstStyle/>
+          <a:p>
+            <a:pPr algn="ctr" indent="0" marL="0">
+              <a:buNone/>
+            </a:pPr>
+            <a:r>
+              <a:rPr lang="en-US" sz="900" b="1" dirty="0">
+                <a:solidFill>
+                  <a:srgbClr val="9D174D"/>
+                </a:solidFill>
+                <a:latin typeface="Trebuchet MS" pitchFamily="34" charset="0"/>
+                <a:ea typeface="Trebuchet MS" pitchFamily="34" charset="-122"/>
+                <a:cs typeface="Trebuchet MS" pitchFamily="34" charset="-120"/>
+              </a:rPr>
+              <a:t>c</a:t>
+            </a:r>
+            <a:endParaRPr lang="en-US" sz="900" dirty="0"/>
+          </a:p>
+        </p:txBody>
+      </p:sp>
+      <p:sp>
+        <p:nvSpPr>
+          <p:cNvPr id="41" name="Text 39"/>
+          <p:cNvSpPr/>
+          <p:nvPr/>
+        </p:nvSpPr>
+        <p:spPr>
+          <a:xfrm>
+            <a:off x="2023872" y="4572000"/>
+            <a:ext cx="685800" cy="219456"/>
           </a:xfrm>
           <a:prstGeom prst="rect">
             <a:avLst/>
@@ -21732,7 +22014,7 @@
               <a:buNone/>
             </a:pPr>
             <a:r>
-              <a:rPr lang="en-US" sz="700" i="1" dirty="0">
+              <a:rPr lang="en-US" sz="750" i="1" dirty="0">
                 <a:solidFill>
                   <a:srgbClr val="94A3B8"/>
                 </a:solidFill>
@@ -21740,224 +22022,224 @@
                 <a:ea typeface="Calibri" pitchFamily="34" charset="-122"/>
                 <a:cs typeface="Calibri" pitchFamily="34" charset="-120"/>
               </a:rPr>
-              <a:t>'d' changes to 't' before -ion</a:t>
-            </a:r>
-            <a:endParaRPr lang="en-US" sz="700" dirty="0"/>
-          </a:p>
-        </p:txBody>
-      </p:sp>
-      <p:sp>
-        <p:nvSpPr>
-          <p:cNvPr id="27" name="Shape 25"/>
-          <p:cNvSpPr/>
-          <p:nvPr/>
-        </p:nvSpPr>
-        <p:spPr>
-          <a:xfrm>
-            <a:off x="365760" y="3273552"/>
-            <a:ext cx="1371600" cy="658368"/>
+              <a:t>/k/</a:t>
+            </a:r>
+            <a:endParaRPr lang="en-US" sz="750" dirty="0"/>
+          </a:p>
+        </p:txBody>
+      </p:sp>
+      <p:sp>
+        <p:nvSpPr>
+          <p:cNvPr id="42" name="Shape 40"/>
+          <p:cNvSpPr/>
+          <p:nvPr/>
+        </p:nvSpPr>
+        <p:spPr>
+          <a:xfrm>
+            <a:off x="2831592" y="4169664"/>
+            <a:ext cx="685800" cy="384048"/>
           </a:xfrm>
           <a:prstGeom prst="rect">
             <a:avLst>
-              <a:gd name="adj" fmla="val 8333"/>
+              <a:gd name="adj" fmla="val 9524"/>
             </a:avLst>
           </a:prstGeom>
           <a:solidFill>
-            <a:srgbClr val="E2E8F0"/>
-          </a:solidFill>
-          <a:ln w="12700">
-            <a:solidFill>
-              <a:srgbClr val="E2E8F0"/>
-            </a:solidFill>
-            <a:prstDash val="solid"/>
-          </a:ln>
-        </p:spPr>
-      </p:sp>
-      <p:sp>
-        <p:nvSpPr>
-          <p:cNvPr id="28" name="Text 26"/>
-          <p:cNvSpPr/>
-          <p:nvPr/>
-        </p:nvSpPr>
-        <p:spPr>
-          <a:xfrm>
-            <a:off x="365760" y="3273552"/>
-            <a:ext cx="1371600" cy="658368"/>
-          </a:xfrm>
-          <a:prstGeom prst="rect">
-            <a:avLst/>
-          </a:prstGeom>
-          <a:noFill/>
-          <a:ln/>
-        </p:spPr>
-        <p:txBody>
-          <a:bodyPr wrap="square" lIns="0" tIns="0" rIns="0" bIns="0" rtlCol="0" anchor="ctr"/>
-          <a:lstStyle/>
-          <a:p>
-            <a:pPr algn="ctr" indent="0" marL="0">
-              <a:buNone/>
-            </a:pPr>
-            <a:r>
-              <a:rPr lang="en-US" sz="1100" b="1" dirty="0">
-                <a:solidFill>
-                  <a:srgbClr val="475569"/>
+            <a:srgbClr val="FFFFFF"/>
+          </a:solidFill>
+          <a:ln w="12700">
+            <a:solidFill>
+              <a:srgbClr val="DB2777"/>
+            </a:solidFill>
+            <a:prstDash val="solid"/>
+          </a:ln>
+        </p:spPr>
+      </p:sp>
+      <p:sp>
+        <p:nvSpPr>
+          <p:cNvPr id="43" name="Text 41"/>
+          <p:cNvSpPr/>
+          <p:nvPr/>
+        </p:nvSpPr>
+        <p:spPr>
+          <a:xfrm>
+            <a:off x="2831592" y="4169664"/>
+            <a:ext cx="685800" cy="384048"/>
+          </a:xfrm>
+          <a:prstGeom prst="rect">
+            <a:avLst/>
+          </a:prstGeom>
+          <a:noFill/>
+          <a:ln/>
+        </p:spPr>
+        <p:txBody>
+          <a:bodyPr wrap="square" lIns="0" tIns="0" rIns="0" bIns="0" rtlCol="0" anchor="ctr"/>
+          <a:lstStyle/>
+          <a:p>
+            <a:pPr algn="ctr" indent="0" marL="0">
+              <a:buNone/>
+            </a:pPr>
+            <a:r>
+              <a:rPr lang="en-US" sz="900" b="1" dirty="0">
+                <a:solidFill>
+                  <a:srgbClr val="9D174D"/>
                 </a:solidFill>
                 <a:latin typeface="Trebuchet MS" pitchFamily="34" charset="0"/>
                 <a:ea typeface="Trebuchet MS" pitchFamily="34" charset="-122"/>
                 <a:cs typeface="Trebuchet MS" pitchFamily="34" charset="-120"/>
               </a:rPr>
-              <a:t>Syllables</a:t>
-            </a:r>
-            <a:endParaRPr lang="en-US" sz="1100" dirty="0"/>
-          </a:p>
-        </p:txBody>
-      </p:sp>
-      <p:sp>
-        <p:nvSpPr>
-          <p:cNvPr id="29" name="Shape 27"/>
-          <p:cNvSpPr/>
-          <p:nvPr/>
-        </p:nvSpPr>
-        <p:spPr>
-          <a:xfrm>
-            <a:off x="1874520" y="3273552"/>
-            <a:ext cx="6903720" cy="658368"/>
+              <a:t>o</a:t>
+            </a:r>
+            <a:endParaRPr lang="en-US" sz="900" dirty="0"/>
+          </a:p>
+        </p:txBody>
+      </p:sp>
+      <p:sp>
+        <p:nvSpPr>
+          <p:cNvPr id="44" name="Shape 42"/>
+          <p:cNvSpPr/>
+          <p:nvPr/>
+        </p:nvSpPr>
+        <p:spPr>
+          <a:xfrm>
+            <a:off x="3639312" y="4169664"/>
+            <a:ext cx="685800" cy="384048"/>
           </a:xfrm>
           <a:prstGeom prst="rect">
             <a:avLst>
-              <a:gd name="adj" fmla="val 8333"/>
+              <a:gd name="adj" fmla="val 9524"/>
             </a:avLst>
           </a:prstGeom>
           <a:solidFill>
-            <a:srgbClr val="CCFBF1"/>
-          </a:solidFill>
-          <a:ln w="12700">
-            <a:solidFill>
-              <a:srgbClr val="0D9488"/>
-            </a:solidFill>
-            <a:prstDash val="solid"/>
-          </a:ln>
-        </p:spPr>
-      </p:sp>
-      <p:sp>
-        <p:nvSpPr>
-          <p:cNvPr id="30" name="Shape 28"/>
-          <p:cNvSpPr/>
-          <p:nvPr/>
-        </p:nvSpPr>
-        <p:spPr>
-          <a:xfrm>
-            <a:off x="2313432" y="3364992"/>
-            <a:ext cx="1645920" cy="475488"/>
-          </a:xfrm>
-          <a:prstGeom prst="rect">
-            <a:avLst>
-              <a:gd name="adj" fmla="val 9615"/>
-            </a:avLst>
-          </a:prstGeom>
-          <a:solidFill>
             <a:srgbClr val="FFFFFF"/>
           </a:solidFill>
           <a:ln w="12700">
             <a:solidFill>
-              <a:srgbClr val="0D9488"/>
-            </a:solidFill>
-            <a:prstDash val="solid"/>
-          </a:ln>
-        </p:spPr>
-      </p:sp>
-      <p:sp>
-        <p:nvSpPr>
-          <p:cNvPr id="31" name="Text 29"/>
-          <p:cNvSpPr/>
-          <p:nvPr/>
-        </p:nvSpPr>
-        <p:spPr>
-          <a:xfrm>
-            <a:off x="2313432" y="3364992"/>
-            <a:ext cx="1645920" cy="475488"/>
-          </a:xfrm>
-          <a:prstGeom prst="rect">
-            <a:avLst/>
-          </a:prstGeom>
-          <a:noFill/>
-          <a:ln/>
-        </p:spPr>
-        <p:txBody>
-          <a:bodyPr wrap="square" lIns="0" tIns="0" rIns="0" bIns="0" rtlCol="0" anchor="ctr"/>
-          <a:lstStyle/>
-          <a:p>
-            <a:pPr algn="ctr" indent="0" marL="0">
-              <a:buNone/>
-            </a:pPr>
-            <a:r>
-              <a:rPr lang="en-US" sz="1400" b="1" dirty="0">
-                <a:solidFill>
-                  <a:srgbClr val="0D9488"/>
+              <a:srgbClr val="DB2777"/>
+            </a:solidFill>
+            <a:prstDash val="solid"/>
+          </a:ln>
+        </p:spPr>
+      </p:sp>
+      <p:sp>
+        <p:nvSpPr>
+          <p:cNvPr id="45" name="Text 43"/>
+          <p:cNvSpPr/>
+          <p:nvPr/>
+        </p:nvSpPr>
+        <p:spPr>
+          <a:xfrm>
+            <a:off x="3639312" y="4169664"/>
+            <a:ext cx="685800" cy="384048"/>
+          </a:xfrm>
+          <a:prstGeom prst="rect">
+            <a:avLst/>
+          </a:prstGeom>
+          <a:noFill/>
+          <a:ln/>
+        </p:spPr>
+        <p:txBody>
+          <a:bodyPr wrap="square" lIns="0" tIns="0" rIns="0" bIns="0" rtlCol="0" anchor="ctr"/>
+          <a:lstStyle/>
+          <a:p>
+            <a:pPr algn="ctr" indent="0" marL="0">
+              <a:buNone/>
+            </a:pPr>
+            <a:r>
+              <a:rPr lang="en-US" sz="900" b="1" dirty="0">
+                <a:solidFill>
+                  <a:srgbClr val="9D174D"/>
                 </a:solidFill>
                 <a:latin typeface="Trebuchet MS" pitchFamily="34" charset="0"/>
                 <a:ea typeface="Trebuchet MS" pitchFamily="34" charset="-122"/>
                 <a:cs typeface="Trebuchet MS" pitchFamily="34" charset="-120"/>
               </a:rPr>
-              <a:t>at</a:t>
-            </a:r>
-            <a:endParaRPr lang="en-US" sz="1400" dirty="0"/>
-          </a:p>
-        </p:txBody>
-      </p:sp>
-      <p:sp>
-        <p:nvSpPr>
-          <p:cNvPr id="32" name="Text 30"/>
-          <p:cNvSpPr/>
-          <p:nvPr/>
-        </p:nvSpPr>
-        <p:spPr>
-          <a:xfrm>
-            <a:off x="3959352" y="3364992"/>
-            <a:ext cx="411480" cy="475488"/>
-          </a:xfrm>
-          <a:prstGeom prst="rect">
-            <a:avLst/>
-          </a:prstGeom>
-          <a:noFill/>
-          <a:ln/>
-        </p:spPr>
-        <p:txBody>
-          <a:bodyPr wrap="square" lIns="0" tIns="0" rIns="0" bIns="0" rtlCol="0" anchor="ctr"/>
-          <a:lstStyle/>
-          <a:p>
-            <a:pPr algn="ctr" indent="0" marL="0">
-              <a:buNone/>
-            </a:pPr>
-            <a:r>
-              <a:rPr lang="en-US" sz="1600" b="1" dirty="0">
-                <a:solidFill>
-                  <a:srgbClr val="0D9488"/>
+              <a:t>n</a:t>
+            </a:r>
+            <a:endParaRPr lang="en-US" sz="900" dirty="0"/>
+          </a:p>
+        </p:txBody>
+      </p:sp>
+      <p:sp>
+        <p:nvSpPr>
+          <p:cNvPr id="46" name="Shape 44"/>
+          <p:cNvSpPr/>
+          <p:nvPr/>
+        </p:nvSpPr>
+        <p:spPr>
+          <a:xfrm>
+            <a:off x="4447032" y="4169664"/>
+            <a:ext cx="685800" cy="384048"/>
+          </a:xfrm>
+          <a:prstGeom prst="rect">
+            <a:avLst>
+              <a:gd name="adj" fmla="val 9524"/>
+            </a:avLst>
+          </a:prstGeom>
+          <a:solidFill>
+            <a:srgbClr val="FFFFFF"/>
+          </a:solidFill>
+          <a:ln w="12700">
+            <a:solidFill>
+              <a:srgbClr val="DB2777"/>
+            </a:solidFill>
+            <a:prstDash val="solid"/>
+          </a:ln>
+        </p:spPr>
+      </p:sp>
+      <p:sp>
+        <p:nvSpPr>
+          <p:cNvPr id="47" name="Text 45"/>
+          <p:cNvSpPr/>
+          <p:nvPr/>
+        </p:nvSpPr>
+        <p:spPr>
+          <a:xfrm>
+            <a:off x="4447032" y="4169664"/>
+            <a:ext cx="685800" cy="384048"/>
+          </a:xfrm>
+          <a:prstGeom prst="rect">
+            <a:avLst/>
+          </a:prstGeom>
+          <a:noFill/>
+          <a:ln/>
+        </p:spPr>
+        <p:txBody>
+          <a:bodyPr wrap="square" lIns="0" tIns="0" rIns="0" bIns="0" rtlCol="0" anchor="ctr"/>
+          <a:lstStyle/>
+          <a:p>
+            <a:pPr algn="ctr" indent="0" marL="0">
+              <a:buNone/>
+            </a:pPr>
+            <a:r>
+              <a:rPr lang="en-US" sz="900" b="1" dirty="0">
+                <a:solidFill>
+                  <a:srgbClr val="9D174D"/>
                 </a:solidFill>
                 <a:latin typeface="Trebuchet MS" pitchFamily="34" charset="0"/>
                 <a:ea typeface="Trebuchet MS" pitchFamily="34" charset="-122"/>
                 <a:cs typeface="Trebuchet MS" pitchFamily="34" charset="-120"/>
               </a:rPr>
-              <a:t>·</a:t>
-            </a:r>
-            <a:endParaRPr lang="en-US" sz="1600" dirty="0"/>
-          </a:p>
-        </p:txBody>
-      </p:sp>
-      <p:sp>
-        <p:nvSpPr>
-          <p:cNvPr id="33" name="Shape 31"/>
-          <p:cNvSpPr/>
-          <p:nvPr/>
-        </p:nvSpPr>
-        <p:spPr>
-          <a:xfrm>
-            <a:off x="4370832" y="3364992"/>
-            <a:ext cx="1645920" cy="475488"/>
+              <a:t>t</a:t>
+            </a:r>
+            <a:endParaRPr lang="en-US" sz="900" dirty="0"/>
+          </a:p>
+        </p:txBody>
+      </p:sp>
+      <p:sp>
+        <p:nvSpPr>
+          <p:cNvPr id="48" name="Shape 46"/>
+          <p:cNvSpPr/>
+          <p:nvPr/>
+        </p:nvSpPr>
+        <p:spPr>
+          <a:xfrm>
+            <a:off x="5254752" y="4169664"/>
+            <a:ext cx="685800" cy="384048"/>
           </a:xfrm>
           <a:prstGeom prst="rect">
             <a:avLst>
-              <a:gd name="adj" fmla="val 9615"/>
+              <a:gd name="adj" fmla="val 9524"/>
             </a:avLst>
           </a:prstGeom>
           <a:solidFill>
@@ -21965,104 +22247,131 @@
           </a:solidFill>
           <a:ln w="12700">
             <a:solidFill>
-              <a:srgbClr val="0D9488"/>
-            </a:solidFill>
-            <a:prstDash val="solid"/>
-          </a:ln>
-        </p:spPr>
-      </p:sp>
-      <p:sp>
-        <p:nvSpPr>
-          <p:cNvPr id="34" name="Text 32"/>
-          <p:cNvSpPr/>
-          <p:nvPr/>
-        </p:nvSpPr>
-        <p:spPr>
-          <a:xfrm>
-            <a:off x="4370832" y="3364992"/>
-            <a:ext cx="1645920" cy="475488"/>
-          </a:xfrm>
-          <a:prstGeom prst="rect">
-            <a:avLst/>
-          </a:prstGeom>
-          <a:noFill/>
-          <a:ln/>
-        </p:spPr>
-        <p:txBody>
-          <a:bodyPr wrap="square" lIns="0" tIns="0" rIns="0" bIns="0" rtlCol="0" anchor="ctr"/>
-          <a:lstStyle/>
-          <a:p>
-            <a:pPr algn="ctr" indent="0" marL="0">
-              <a:buNone/>
-            </a:pPr>
-            <a:r>
-              <a:rPr lang="en-US" sz="1400" b="1" dirty="0">
-                <a:solidFill>
-                  <a:srgbClr val="0D9488"/>
+              <a:srgbClr val="DB2777"/>
+            </a:solidFill>
+            <a:prstDash val="solid"/>
+          </a:ln>
+        </p:spPr>
+      </p:sp>
+      <p:sp>
+        <p:nvSpPr>
+          <p:cNvPr id="49" name="Text 47"/>
+          <p:cNvSpPr/>
+          <p:nvPr/>
+        </p:nvSpPr>
+        <p:spPr>
+          <a:xfrm>
+            <a:off x="5254752" y="4169664"/>
+            <a:ext cx="685800" cy="384048"/>
+          </a:xfrm>
+          <a:prstGeom prst="rect">
+            <a:avLst/>
+          </a:prstGeom>
+          <a:noFill/>
+          <a:ln/>
+        </p:spPr>
+        <p:txBody>
+          <a:bodyPr wrap="square" lIns="0" tIns="0" rIns="0" bIns="0" rtlCol="0" anchor="ctr"/>
+          <a:lstStyle/>
+          <a:p>
+            <a:pPr algn="ctr" indent="0" marL="0">
+              <a:buNone/>
+            </a:pPr>
+            <a:r>
+              <a:rPr lang="en-US" sz="900" b="1" dirty="0">
+                <a:solidFill>
+                  <a:srgbClr val="9D174D"/>
                 </a:solidFill>
                 <a:latin typeface="Trebuchet MS" pitchFamily="34" charset="0"/>
                 <a:ea typeface="Trebuchet MS" pitchFamily="34" charset="-122"/>
                 <a:cs typeface="Trebuchet MS" pitchFamily="34" charset="-120"/>
               </a:rPr>
-              <a:t>ten</a:t>
-            </a:r>
-            <a:endParaRPr lang="en-US" sz="1400" dirty="0"/>
-          </a:p>
-        </p:txBody>
-      </p:sp>
-      <p:sp>
-        <p:nvSpPr>
-          <p:cNvPr id="35" name="Text 33"/>
-          <p:cNvSpPr/>
-          <p:nvPr/>
-        </p:nvSpPr>
-        <p:spPr>
-          <a:xfrm>
-            <a:off x="6016752" y="3364992"/>
-            <a:ext cx="411480" cy="475488"/>
-          </a:xfrm>
-          <a:prstGeom prst="rect">
-            <a:avLst/>
-          </a:prstGeom>
-          <a:noFill/>
-          <a:ln/>
-        </p:spPr>
-        <p:txBody>
-          <a:bodyPr wrap="square" lIns="0" tIns="0" rIns="0" bIns="0" rtlCol="0" anchor="ctr"/>
-          <a:lstStyle/>
-          <a:p>
-            <a:pPr algn="ctr" indent="0" marL="0">
-              <a:buNone/>
-            </a:pPr>
-            <a:r>
-              <a:rPr lang="en-US" sz="1600" b="1" dirty="0">
-                <a:solidFill>
-                  <a:srgbClr val="0D9488"/>
+              <a:t>e</a:t>
+            </a:r>
+            <a:endParaRPr lang="en-US" sz="900" dirty="0"/>
+          </a:p>
+        </p:txBody>
+      </p:sp>
+      <p:sp>
+        <p:nvSpPr>
+          <p:cNvPr id="50" name="Shape 48"/>
+          <p:cNvSpPr/>
+          <p:nvPr/>
+        </p:nvSpPr>
+        <p:spPr>
+          <a:xfrm>
+            <a:off x="6062472" y="4169664"/>
+            <a:ext cx="685800" cy="384048"/>
+          </a:xfrm>
+          <a:prstGeom prst="rect">
+            <a:avLst>
+              <a:gd name="adj" fmla="val 9524"/>
+            </a:avLst>
+          </a:prstGeom>
+          <a:solidFill>
+            <a:srgbClr val="FFFFFF"/>
+          </a:solidFill>
+          <a:ln w="12700">
+            <a:solidFill>
+              <a:srgbClr val="DB2777"/>
+            </a:solidFill>
+            <a:prstDash val="solid"/>
+          </a:ln>
+        </p:spPr>
+      </p:sp>
+      <p:sp>
+        <p:nvSpPr>
+          <p:cNvPr id="51" name="Text 49"/>
+          <p:cNvSpPr/>
+          <p:nvPr/>
+        </p:nvSpPr>
+        <p:spPr>
+          <a:xfrm>
+            <a:off x="6062472" y="4169664"/>
+            <a:ext cx="685800" cy="384048"/>
+          </a:xfrm>
+          <a:prstGeom prst="rect">
+            <a:avLst/>
+          </a:prstGeom>
+          <a:noFill/>
+          <a:ln/>
+        </p:spPr>
+        <p:txBody>
+          <a:bodyPr wrap="square" lIns="0" tIns="0" rIns="0" bIns="0" rtlCol="0" anchor="ctr"/>
+          <a:lstStyle/>
+          <a:p>
+            <a:pPr algn="ctr" indent="0" marL="0">
+              <a:buNone/>
+            </a:pPr>
+            <a:r>
+              <a:rPr lang="en-US" sz="900" b="1" dirty="0">
+                <a:solidFill>
+                  <a:srgbClr val="9D174D"/>
                 </a:solidFill>
                 <a:latin typeface="Trebuchet MS" pitchFamily="34" charset="0"/>
                 <a:ea typeface="Trebuchet MS" pitchFamily="34" charset="-122"/>
                 <a:cs typeface="Trebuchet MS" pitchFamily="34" charset="-120"/>
               </a:rPr>
-              <a:t>·</a:t>
-            </a:r>
-            <a:endParaRPr lang="en-US" sz="1600" dirty="0"/>
-          </a:p>
-        </p:txBody>
-      </p:sp>
-      <p:sp>
-        <p:nvSpPr>
-          <p:cNvPr id="36" name="Shape 34"/>
-          <p:cNvSpPr/>
-          <p:nvPr/>
-        </p:nvSpPr>
-        <p:spPr>
-          <a:xfrm>
-            <a:off x="6428232" y="3364992"/>
-            <a:ext cx="1645920" cy="475488"/>
+              <a:t>n</a:t>
+            </a:r>
+            <a:endParaRPr lang="en-US" sz="900" dirty="0"/>
+          </a:p>
+        </p:txBody>
+      </p:sp>
+      <p:sp>
+        <p:nvSpPr>
+          <p:cNvPr id="52" name="Shape 50"/>
+          <p:cNvSpPr/>
+          <p:nvPr/>
+        </p:nvSpPr>
+        <p:spPr>
+          <a:xfrm>
+            <a:off x="6870192" y="4169664"/>
+            <a:ext cx="685800" cy="384048"/>
           </a:xfrm>
           <a:prstGeom prst="rect">
             <a:avLst>
-              <a:gd name="adj" fmla="val 9615"/>
+              <a:gd name="adj" fmla="val 9524"/>
             </a:avLst>
           </a:prstGeom>
           <a:solidFill>
@@ -22070,640 +22379,112 @@
           </a:solidFill>
           <a:ln w="12700">
             <a:solidFill>
-              <a:srgbClr val="0D9488"/>
-            </a:solidFill>
-            <a:prstDash val="solid"/>
-          </a:ln>
-        </p:spPr>
-      </p:sp>
-      <p:sp>
-        <p:nvSpPr>
-          <p:cNvPr id="37" name="Text 35"/>
-          <p:cNvSpPr/>
-          <p:nvPr/>
-        </p:nvSpPr>
-        <p:spPr>
-          <a:xfrm>
-            <a:off x="6428232" y="3364992"/>
-            <a:ext cx="1645920" cy="475488"/>
-          </a:xfrm>
-          <a:prstGeom prst="rect">
-            <a:avLst/>
-          </a:prstGeom>
-          <a:noFill/>
-          <a:ln/>
-        </p:spPr>
-        <p:txBody>
-          <a:bodyPr wrap="square" lIns="0" tIns="0" rIns="0" bIns="0" rtlCol="0" anchor="ctr"/>
-          <a:lstStyle/>
-          <a:p>
-            <a:pPr algn="ctr" indent="0" marL="0">
-              <a:buNone/>
-            </a:pPr>
-            <a:r>
-              <a:rPr lang="en-US" sz="1400" b="1" dirty="0">
-                <a:solidFill>
-                  <a:srgbClr val="0D9488"/>
+              <a:srgbClr val="DB2777"/>
+            </a:solidFill>
+            <a:prstDash val="solid"/>
+          </a:ln>
+        </p:spPr>
+      </p:sp>
+      <p:sp>
+        <p:nvSpPr>
+          <p:cNvPr id="53" name="Text 51"/>
+          <p:cNvSpPr/>
+          <p:nvPr/>
+        </p:nvSpPr>
+        <p:spPr>
+          <a:xfrm>
+            <a:off x="6870192" y="4169664"/>
+            <a:ext cx="685800" cy="384048"/>
+          </a:xfrm>
+          <a:prstGeom prst="rect">
+            <a:avLst/>
+          </a:prstGeom>
+          <a:noFill/>
+          <a:ln/>
+        </p:spPr>
+        <p:txBody>
+          <a:bodyPr wrap="square" lIns="0" tIns="0" rIns="0" bIns="0" rtlCol="0" anchor="ctr"/>
+          <a:lstStyle/>
+          <a:p>
+            <a:pPr algn="ctr" indent="0" marL="0">
+              <a:buNone/>
+            </a:pPr>
+            <a:r>
+              <a:rPr lang="en-US" sz="900" b="1" dirty="0">
+                <a:solidFill>
+                  <a:srgbClr val="9D174D"/>
                 </a:solidFill>
                 <a:latin typeface="Trebuchet MS" pitchFamily="34" charset="0"/>
                 <a:ea typeface="Trebuchet MS" pitchFamily="34" charset="-122"/>
                 <a:cs typeface="Trebuchet MS" pitchFamily="34" charset="-120"/>
               </a:rPr>
-              <a:t>tion</a:t>
-            </a:r>
-            <a:endParaRPr lang="en-US" sz="1400" dirty="0"/>
-          </a:p>
-        </p:txBody>
-      </p:sp>
-      <p:sp>
-        <p:nvSpPr>
-          <p:cNvPr id="38" name="Shape 36"/>
-          <p:cNvSpPr/>
-          <p:nvPr/>
-        </p:nvSpPr>
-        <p:spPr>
-          <a:xfrm>
-            <a:off x="365760" y="4096512"/>
-            <a:ext cx="1371600" cy="804672"/>
+              <a:t>d</a:t>
+            </a:r>
+            <a:endParaRPr lang="en-US" sz="900" dirty="0"/>
+          </a:p>
+        </p:txBody>
+      </p:sp>
+      <p:sp>
+        <p:nvSpPr>
+          <p:cNvPr id="54" name="Shape 52"/>
+          <p:cNvSpPr/>
+          <p:nvPr/>
+        </p:nvSpPr>
+        <p:spPr>
+          <a:xfrm>
+            <a:off x="7677912" y="4169664"/>
+            <a:ext cx="685800" cy="384048"/>
           </a:xfrm>
           <a:prstGeom prst="rect">
             <a:avLst>
-              <a:gd name="adj" fmla="val 6818"/>
+              <a:gd name="adj" fmla="val 9524"/>
             </a:avLst>
           </a:prstGeom>
           <a:solidFill>
-            <a:srgbClr val="E2E8F0"/>
-          </a:solidFill>
-          <a:ln w="12700">
-            <a:solidFill>
-              <a:srgbClr val="E2E8F0"/>
-            </a:solidFill>
-            <a:prstDash val="solid"/>
-          </a:ln>
-        </p:spPr>
-      </p:sp>
-      <p:sp>
-        <p:nvSpPr>
-          <p:cNvPr id="39" name="Text 37"/>
-          <p:cNvSpPr/>
-          <p:nvPr/>
-        </p:nvSpPr>
-        <p:spPr>
-          <a:xfrm>
-            <a:off x="365760" y="4096512"/>
-            <a:ext cx="1371600" cy="804672"/>
-          </a:xfrm>
-          <a:prstGeom prst="rect">
-            <a:avLst/>
-          </a:prstGeom>
-          <a:noFill/>
-          <a:ln/>
-        </p:spPr>
-        <p:txBody>
-          <a:bodyPr wrap="square" lIns="0" tIns="0" rIns="0" bIns="0" rtlCol="0" anchor="ctr"/>
-          <a:lstStyle/>
-          <a:p>
-            <a:pPr algn="ctr" indent="0" marL="0">
-              <a:buNone/>
-            </a:pPr>
-            <a:r>
-              <a:rPr lang="en-US" sz="1100" b="1" dirty="0">
-                <a:solidFill>
-                  <a:srgbClr val="475569"/>
+            <a:srgbClr val="FFFFFF"/>
+          </a:solidFill>
+          <a:ln w="12700">
+            <a:solidFill>
+              <a:srgbClr val="DB2777"/>
+            </a:solidFill>
+            <a:prstDash val="solid"/>
+          </a:ln>
+        </p:spPr>
+      </p:sp>
+      <p:sp>
+        <p:nvSpPr>
+          <p:cNvPr id="55" name="Text 53"/>
+          <p:cNvSpPr/>
+          <p:nvPr/>
+        </p:nvSpPr>
+        <p:spPr>
+          <a:xfrm>
+            <a:off x="7677912" y="4169664"/>
+            <a:ext cx="685800" cy="384048"/>
+          </a:xfrm>
+          <a:prstGeom prst="rect">
+            <a:avLst/>
+          </a:prstGeom>
+          <a:noFill/>
+          <a:ln/>
+        </p:spPr>
+        <p:txBody>
+          <a:bodyPr wrap="square" lIns="0" tIns="0" rIns="0" bIns="0" rtlCol="0" anchor="ctr"/>
+          <a:lstStyle/>
+          <a:p>
+            <a:pPr algn="ctr" indent="0" marL="0">
+              <a:buNone/>
+            </a:pPr>
+            <a:r>
+              <a:rPr lang="en-US" sz="900" b="1" dirty="0">
+                <a:solidFill>
+                  <a:srgbClr val="9D174D"/>
                 </a:solidFill>
                 <a:latin typeface="Trebuchet MS" pitchFamily="34" charset="0"/>
                 <a:ea typeface="Trebuchet MS" pitchFamily="34" charset="-122"/>
                 <a:cs typeface="Trebuchet MS" pitchFamily="34" charset="-120"/>
               </a:rPr>
-              <a:t>Phonemes</a:t>
-            </a:r>
-            <a:endParaRPr lang="en-US" sz="1100" dirty="0"/>
-          </a:p>
-        </p:txBody>
-      </p:sp>
-      <p:sp>
-        <p:nvSpPr>
-          <p:cNvPr id="40" name="Shape 38"/>
-          <p:cNvSpPr/>
-          <p:nvPr/>
-        </p:nvSpPr>
-        <p:spPr>
-          <a:xfrm>
-            <a:off x="1874520" y="4096512"/>
-            <a:ext cx="6903720" cy="804672"/>
-          </a:xfrm>
-          <a:prstGeom prst="rect">
-            <a:avLst>
-              <a:gd name="adj" fmla="val 6818"/>
-            </a:avLst>
-          </a:prstGeom>
-          <a:solidFill>
-            <a:srgbClr val="FCE7F3"/>
-          </a:solidFill>
-          <a:ln w="12700">
-            <a:solidFill>
-              <a:srgbClr val="DB2777"/>
-            </a:solidFill>
-            <a:prstDash val="solid"/>
-          </a:ln>
-        </p:spPr>
-      </p:sp>
-      <p:sp>
-        <p:nvSpPr>
-          <p:cNvPr id="41" name="Shape 39"/>
-          <p:cNvSpPr/>
-          <p:nvPr/>
-        </p:nvSpPr>
-        <p:spPr>
-          <a:xfrm>
-            <a:off x="2124837" y="4169664"/>
-            <a:ext cx="685800" cy="384048"/>
-          </a:xfrm>
-          <a:prstGeom prst="rect">
-            <a:avLst>
-              <a:gd name="adj" fmla="val 9524"/>
-            </a:avLst>
-          </a:prstGeom>
-          <a:solidFill>
-            <a:srgbClr val="FFFFFF"/>
-          </a:solidFill>
-          <a:ln w="12700">
-            <a:solidFill>
-              <a:srgbClr val="DB2777"/>
-            </a:solidFill>
-            <a:prstDash val="solid"/>
-          </a:ln>
-        </p:spPr>
-      </p:sp>
-      <p:sp>
-        <p:nvSpPr>
-          <p:cNvPr id="42" name="Text 40"/>
-          <p:cNvSpPr/>
-          <p:nvPr/>
-        </p:nvSpPr>
-        <p:spPr>
-          <a:xfrm>
-            <a:off x="2124837" y="4169664"/>
-            <a:ext cx="685800" cy="384048"/>
-          </a:xfrm>
-          <a:prstGeom prst="rect">
-            <a:avLst/>
-          </a:prstGeom>
-          <a:noFill/>
-          <a:ln/>
-        </p:spPr>
-        <p:txBody>
-          <a:bodyPr wrap="square" lIns="0" tIns="0" rIns="0" bIns="0" rtlCol="0" anchor="ctr"/>
-          <a:lstStyle/>
-          <a:p>
-            <a:pPr algn="ctr" indent="0" marL="0">
-              <a:buNone/>
-            </a:pPr>
-            <a:r>
-              <a:rPr lang="en-US" sz="900" b="1" dirty="0">
-                <a:solidFill>
-                  <a:srgbClr val="9D174D"/>
-                </a:solidFill>
-                <a:latin typeface="Trebuchet MS" pitchFamily="34" charset="0"/>
-                <a:ea typeface="Trebuchet MS" pitchFamily="34" charset="-122"/>
-                <a:cs typeface="Trebuchet MS" pitchFamily="34" charset="-120"/>
-              </a:rPr>
-              <a:t>a</a:t>
-            </a:r>
-            <a:endParaRPr lang="en-US" sz="900" dirty="0"/>
-          </a:p>
-        </p:txBody>
-      </p:sp>
-      <p:sp>
-        <p:nvSpPr>
-          <p:cNvPr id="43" name="Shape 41"/>
-          <p:cNvSpPr/>
-          <p:nvPr/>
-        </p:nvSpPr>
-        <p:spPr>
-          <a:xfrm>
-            <a:off x="3033522" y="4169664"/>
-            <a:ext cx="685800" cy="384048"/>
-          </a:xfrm>
-          <a:prstGeom prst="rect">
-            <a:avLst>
-              <a:gd name="adj" fmla="val 9524"/>
-            </a:avLst>
-          </a:prstGeom>
-          <a:solidFill>
-            <a:srgbClr val="FFFFFF"/>
-          </a:solidFill>
-          <a:ln w="12700">
-            <a:solidFill>
-              <a:srgbClr val="DB2777"/>
-            </a:solidFill>
-            <a:prstDash val="solid"/>
-          </a:ln>
-        </p:spPr>
-      </p:sp>
-      <p:sp>
-        <p:nvSpPr>
-          <p:cNvPr id="44" name="Text 42"/>
-          <p:cNvSpPr/>
-          <p:nvPr/>
-        </p:nvSpPr>
-        <p:spPr>
-          <a:xfrm>
-            <a:off x="3033522" y="4169664"/>
-            <a:ext cx="685800" cy="384048"/>
-          </a:xfrm>
-          <a:prstGeom prst="rect">
-            <a:avLst/>
-          </a:prstGeom>
-          <a:noFill/>
-          <a:ln/>
-        </p:spPr>
-        <p:txBody>
-          <a:bodyPr wrap="square" lIns="0" tIns="0" rIns="0" bIns="0" rtlCol="0" anchor="ctr"/>
-          <a:lstStyle/>
-          <a:p>
-            <a:pPr algn="ctr" indent="0" marL="0">
-              <a:buNone/>
-            </a:pPr>
-            <a:r>
-              <a:rPr lang="en-US" sz="900" b="1" dirty="0">
-                <a:solidFill>
-                  <a:srgbClr val="9D174D"/>
-                </a:solidFill>
-                <a:latin typeface="Trebuchet MS" pitchFamily="34" charset="0"/>
-                <a:ea typeface="Trebuchet MS" pitchFamily="34" charset="-122"/>
-                <a:cs typeface="Trebuchet MS" pitchFamily="34" charset="-120"/>
-              </a:rPr>
-              <a:t>tt</a:t>
-            </a:r>
-            <a:endParaRPr lang="en-US" sz="900" dirty="0"/>
-          </a:p>
-        </p:txBody>
-      </p:sp>
-      <p:sp>
-        <p:nvSpPr>
-          <p:cNvPr id="45" name="Shape 43"/>
-          <p:cNvSpPr/>
-          <p:nvPr/>
-        </p:nvSpPr>
-        <p:spPr>
-          <a:xfrm>
-            <a:off x="3942207" y="4169664"/>
-            <a:ext cx="685800" cy="384048"/>
-          </a:xfrm>
-          <a:prstGeom prst="rect">
-            <a:avLst>
-              <a:gd name="adj" fmla="val 9524"/>
-            </a:avLst>
-          </a:prstGeom>
-          <a:solidFill>
-            <a:srgbClr val="FFFFFF"/>
-          </a:solidFill>
-          <a:ln w="12700">
-            <a:solidFill>
-              <a:srgbClr val="DB2777"/>
-            </a:solidFill>
-            <a:prstDash val="solid"/>
-          </a:ln>
-        </p:spPr>
-      </p:sp>
-      <p:sp>
-        <p:nvSpPr>
-          <p:cNvPr id="46" name="Text 44"/>
-          <p:cNvSpPr/>
-          <p:nvPr/>
-        </p:nvSpPr>
-        <p:spPr>
-          <a:xfrm>
-            <a:off x="3942207" y="4169664"/>
-            <a:ext cx="685800" cy="384048"/>
-          </a:xfrm>
-          <a:prstGeom prst="rect">
-            <a:avLst/>
-          </a:prstGeom>
-          <a:noFill/>
-          <a:ln/>
-        </p:spPr>
-        <p:txBody>
-          <a:bodyPr wrap="square" lIns="0" tIns="0" rIns="0" bIns="0" rtlCol="0" anchor="ctr"/>
-          <a:lstStyle/>
-          <a:p>
-            <a:pPr algn="ctr" indent="0" marL="0">
-              <a:buNone/>
-            </a:pPr>
-            <a:r>
-              <a:rPr lang="en-US" sz="900" b="1" dirty="0">
-                <a:solidFill>
-                  <a:srgbClr val="9D174D"/>
-                </a:solidFill>
-                <a:latin typeface="Trebuchet MS" pitchFamily="34" charset="0"/>
-                <a:ea typeface="Trebuchet MS" pitchFamily="34" charset="-122"/>
-                <a:cs typeface="Trebuchet MS" pitchFamily="34" charset="-120"/>
-              </a:rPr>
-              <a:t>e</a:t>
-            </a:r>
-            <a:endParaRPr lang="en-US" sz="900" dirty="0"/>
-          </a:p>
-        </p:txBody>
-      </p:sp>
-      <p:sp>
-        <p:nvSpPr>
-          <p:cNvPr id="47" name="Shape 45"/>
-          <p:cNvSpPr/>
-          <p:nvPr/>
-        </p:nvSpPr>
-        <p:spPr>
-          <a:xfrm>
-            <a:off x="4850892" y="4169664"/>
-            <a:ext cx="685800" cy="384048"/>
-          </a:xfrm>
-          <a:prstGeom prst="rect">
-            <a:avLst>
-              <a:gd name="adj" fmla="val 9524"/>
-            </a:avLst>
-          </a:prstGeom>
-          <a:solidFill>
-            <a:srgbClr val="FFFFFF"/>
-          </a:solidFill>
-          <a:ln w="12700">
-            <a:solidFill>
-              <a:srgbClr val="DB2777"/>
-            </a:solidFill>
-            <a:prstDash val="solid"/>
-          </a:ln>
-        </p:spPr>
-      </p:sp>
-      <p:sp>
-        <p:nvSpPr>
-          <p:cNvPr id="48" name="Text 46"/>
-          <p:cNvSpPr/>
-          <p:nvPr/>
-        </p:nvSpPr>
-        <p:spPr>
-          <a:xfrm>
-            <a:off x="4850892" y="4169664"/>
-            <a:ext cx="685800" cy="384048"/>
-          </a:xfrm>
-          <a:prstGeom prst="rect">
-            <a:avLst/>
-          </a:prstGeom>
-          <a:noFill/>
-          <a:ln/>
-        </p:spPr>
-        <p:txBody>
-          <a:bodyPr wrap="square" lIns="0" tIns="0" rIns="0" bIns="0" rtlCol="0" anchor="ctr"/>
-          <a:lstStyle/>
-          <a:p>
-            <a:pPr algn="ctr" indent="0" marL="0">
-              <a:buNone/>
-            </a:pPr>
-            <a:r>
-              <a:rPr lang="en-US" sz="900" b="1" dirty="0">
-                <a:solidFill>
-                  <a:srgbClr val="9D174D"/>
-                </a:solidFill>
-                <a:latin typeface="Trebuchet MS" pitchFamily="34" charset="0"/>
-                <a:ea typeface="Trebuchet MS" pitchFamily="34" charset="-122"/>
-                <a:cs typeface="Trebuchet MS" pitchFamily="34" charset="-120"/>
-              </a:rPr>
-              <a:t>n</a:t>
-            </a:r>
-            <a:endParaRPr lang="en-US" sz="900" dirty="0"/>
-          </a:p>
-        </p:txBody>
-      </p:sp>
-      <p:sp>
-        <p:nvSpPr>
-          <p:cNvPr id="49" name="Shape 47"/>
-          <p:cNvSpPr/>
-          <p:nvPr/>
-        </p:nvSpPr>
-        <p:spPr>
-          <a:xfrm>
-            <a:off x="5759577" y="4169664"/>
-            <a:ext cx="685800" cy="384048"/>
-          </a:xfrm>
-          <a:prstGeom prst="rect">
-            <a:avLst>
-              <a:gd name="adj" fmla="val 9524"/>
-            </a:avLst>
-          </a:prstGeom>
-          <a:solidFill>
-            <a:srgbClr val="FFFFFF"/>
-          </a:solidFill>
-          <a:ln w="12700">
-            <a:solidFill>
-              <a:srgbClr val="DB2777"/>
-            </a:solidFill>
-            <a:prstDash val="solid"/>
-          </a:ln>
-        </p:spPr>
-      </p:sp>
-      <p:sp>
-        <p:nvSpPr>
-          <p:cNvPr id="50" name="Text 48"/>
-          <p:cNvSpPr/>
-          <p:nvPr/>
-        </p:nvSpPr>
-        <p:spPr>
-          <a:xfrm>
-            <a:off x="5759577" y="4169664"/>
-            <a:ext cx="685800" cy="384048"/>
-          </a:xfrm>
-          <a:prstGeom prst="rect">
-            <a:avLst/>
-          </a:prstGeom>
-          <a:noFill/>
-          <a:ln/>
-        </p:spPr>
-        <p:txBody>
-          <a:bodyPr wrap="square" lIns="0" tIns="0" rIns="0" bIns="0" rtlCol="0" anchor="ctr"/>
-          <a:lstStyle/>
-          <a:p>
-            <a:pPr algn="ctr" indent="0" marL="0">
-              <a:buNone/>
-            </a:pPr>
-            <a:r>
-              <a:rPr lang="en-US" sz="900" b="1" dirty="0">
-                <a:solidFill>
-                  <a:srgbClr val="9D174D"/>
-                </a:solidFill>
-                <a:latin typeface="Trebuchet MS" pitchFamily="34" charset="0"/>
-                <a:ea typeface="Trebuchet MS" pitchFamily="34" charset="-122"/>
-                <a:cs typeface="Trebuchet MS" pitchFamily="34" charset="-120"/>
-              </a:rPr>
-              <a:t>t</a:t>
-            </a:r>
-            <a:endParaRPr lang="en-US" sz="900" dirty="0"/>
-          </a:p>
-        </p:txBody>
-      </p:sp>
-      <p:sp>
-        <p:nvSpPr>
-          <p:cNvPr id="51" name="Text 49"/>
-          <p:cNvSpPr/>
-          <p:nvPr/>
-        </p:nvSpPr>
-        <p:spPr>
-          <a:xfrm>
-            <a:off x="5759577" y="4572000"/>
-            <a:ext cx="685800" cy="219456"/>
-          </a:xfrm>
-          <a:prstGeom prst="rect">
-            <a:avLst/>
-          </a:prstGeom>
-          <a:noFill/>
-          <a:ln/>
-        </p:spPr>
-        <p:txBody>
-          <a:bodyPr wrap="square" lIns="0" tIns="0" rIns="0" bIns="0" rtlCol="0" anchor="t"/>
-          <a:lstStyle/>
-          <a:p>
-            <a:pPr algn="ctr" indent="0" marL="0">
-              <a:buNone/>
-            </a:pPr>
-            <a:r>
-              <a:rPr lang="en-US" sz="750" i="1" dirty="0">
-                <a:solidFill>
-                  <a:srgbClr val="94A3B8"/>
-                </a:solidFill>
-                <a:latin typeface="Calibri" pitchFamily="34" charset="0"/>
-                <a:ea typeface="Calibri" pitchFamily="34" charset="-122"/>
-                <a:cs typeface="Calibri" pitchFamily="34" charset="-120"/>
-              </a:rPr>
-              <a:t>/sh/</a:t>
-            </a:r>
-            <a:endParaRPr lang="en-US" sz="750" dirty="0"/>
-          </a:p>
-        </p:txBody>
-      </p:sp>
-      <p:sp>
-        <p:nvSpPr>
-          <p:cNvPr id="52" name="Shape 50"/>
-          <p:cNvSpPr/>
-          <p:nvPr/>
-        </p:nvSpPr>
-        <p:spPr>
-          <a:xfrm>
-            <a:off x="6668262" y="4169664"/>
-            <a:ext cx="685800" cy="384048"/>
-          </a:xfrm>
-          <a:prstGeom prst="rect">
-            <a:avLst>
-              <a:gd name="adj" fmla="val 9524"/>
-            </a:avLst>
-          </a:prstGeom>
-          <a:solidFill>
-            <a:srgbClr val="FFFFFF"/>
-          </a:solidFill>
-          <a:ln w="12700">
-            <a:solidFill>
-              <a:srgbClr val="DB2777"/>
-            </a:solidFill>
-            <a:prstDash val="solid"/>
-          </a:ln>
-        </p:spPr>
-      </p:sp>
-      <p:sp>
-        <p:nvSpPr>
-          <p:cNvPr id="53" name="Text 51"/>
-          <p:cNvSpPr/>
-          <p:nvPr/>
-        </p:nvSpPr>
-        <p:spPr>
-          <a:xfrm>
-            <a:off x="6668262" y="4169664"/>
-            <a:ext cx="685800" cy="384048"/>
-          </a:xfrm>
-          <a:prstGeom prst="rect">
-            <a:avLst/>
-          </a:prstGeom>
-          <a:noFill/>
-          <a:ln/>
-        </p:spPr>
-        <p:txBody>
-          <a:bodyPr wrap="square" lIns="0" tIns="0" rIns="0" bIns="0" rtlCol="0" anchor="ctr"/>
-          <a:lstStyle/>
-          <a:p>
-            <a:pPr algn="ctr" indent="0" marL="0">
-              <a:buNone/>
-            </a:pPr>
-            <a:r>
-              <a:rPr lang="en-US" sz="900" b="1" dirty="0">
-                <a:solidFill>
-                  <a:srgbClr val="9D174D"/>
-                </a:solidFill>
-                <a:latin typeface="Trebuchet MS" pitchFamily="34" charset="0"/>
-                <a:ea typeface="Trebuchet MS" pitchFamily="34" charset="-122"/>
-                <a:cs typeface="Trebuchet MS" pitchFamily="34" charset="-120"/>
-              </a:rPr>
-              <a:t>io</a:t>
-            </a:r>
-            <a:endParaRPr lang="en-US" sz="900" dirty="0"/>
-          </a:p>
-        </p:txBody>
-      </p:sp>
-      <p:sp>
-        <p:nvSpPr>
-          <p:cNvPr id="54" name="Shape 52"/>
-          <p:cNvSpPr/>
-          <p:nvPr/>
-        </p:nvSpPr>
-        <p:spPr>
-          <a:xfrm>
-            <a:off x="7576947" y="4169664"/>
-            <a:ext cx="685800" cy="384048"/>
-          </a:xfrm>
-          <a:prstGeom prst="rect">
-            <a:avLst>
-              <a:gd name="adj" fmla="val 9524"/>
-            </a:avLst>
-          </a:prstGeom>
-          <a:solidFill>
-            <a:srgbClr val="FFFFFF"/>
-          </a:solidFill>
-          <a:ln w="12700">
-            <a:solidFill>
-              <a:srgbClr val="DB2777"/>
-            </a:solidFill>
-            <a:prstDash val="solid"/>
-          </a:ln>
-        </p:spPr>
-      </p:sp>
-      <p:sp>
-        <p:nvSpPr>
-          <p:cNvPr id="55" name="Text 53"/>
-          <p:cNvSpPr/>
-          <p:nvPr/>
-        </p:nvSpPr>
-        <p:spPr>
-          <a:xfrm>
-            <a:off x="7576947" y="4169664"/>
-            <a:ext cx="685800" cy="384048"/>
-          </a:xfrm>
-          <a:prstGeom prst="rect">
-            <a:avLst/>
-          </a:prstGeom>
-          <a:noFill/>
-          <a:ln/>
-        </p:spPr>
-        <p:txBody>
-          <a:bodyPr wrap="square" lIns="0" tIns="0" rIns="0" bIns="0" rtlCol="0" anchor="ctr"/>
-          <a:lstStyle/>
-          <a:p>
-            <a:pPr algn="ctr" indent="0" marL="0">
-              <a:buNone/>
-            </a:pPr>
-            <a:r>
-              <a:rPr lang="en-US" sz="900" b="1" dirty="0">
-                <a:solidFill>
-                  <a:srgbClr val="9D174D"/>
-                </a:solidFill>
-                <a:latin typeface="Trebuchet MS" pitchFamily="34" charset="0"/>
-                <a:ea typeface="Trebuchet MS" pitchFamily="34" charset="-122"/>
-                <a:cs typeface="Trebuchet MS" pitchFamily="34" charset="-120"/>
-              </a:rPr>
-              <a:t>n</a:t>
+              <a:t>er</a:t>
             </a:r>
             <a:endParaRPr lang="en-US" sz="900" dirty="0"/>
           </a:p>
@@ -22995,7 +22776,7 @@
                 <a:ea typeface="Calibri" pitchFamily="34" charset="-122"/>
                 <a:cs typeface="Calibri" pitchFamily="34" charset="-120"/>
               </a:rPr>
-              <a:t>Word Labs  •  wordlabs.app  •  Root: 'tend' = to stretch, reach, or extend</a:t>
+              <a:t>Word Labs  •  wordlabs.app  •  Root: 'tend' = stretch, reach, or extend</a:t>
             </a:r>
             <a:endParaRPr lang="en-US" sz="800" dirty="0"/>
           </a:p>
@@ -23134,7 +22915,7 @@
                 <a:ea typeface="Trebuchet MS" pitchFamily="34" charset="-122"/>
                 <a:cs typeface="Trebuchet MS" pitchFamily="34" charset="-120"/>
               </a:rPr>
-              <a:t>extend</a:t>
+              <a:t>pretend</a:t>
             </a:r>
             <a:endParaRPr lang="en-US" sz="2800" dirty="0"/>
           </a:p>
@@ -23822,7 +23603,7 @@
                 <a:ea typeface="Calibri" pitchFamily="34" charset="-122"/>
                 <a:cs typeface="Calibri" pitchFamily="34" charset="-120"/>
               </a:rPr>
-              <a:t>Word Labs  •  wordlabs.app  •  Root: 'tend' = to stretch, reach, or extend</a:t>
+              <a:t>Word Labs  •  wordlabs.app  •  Root: 'tend' = stretch, reach, or extend</a:t>
             </a:r>
             <a:endParaRPr lang="en-US" sz="800" dirty="0"/>
           </a:p>
@@ -23961,7 +23742,7 @@
                 <a:ea typeface="Trebuchet MS" pitchFamily="34" charset="-122"/>
                 <a:cs typeface="Trebuchet MS" pitchFamily="34" charset="-120"/>
               </a:rPr>
-              <a:t>extend</a:t>
+              <a:t>pretend</a:t>
             </a:r>
             <a:endParaRPr lang="en-US" sz="2800" dirty="0"/>
           </a:p>
@@ -24100,7 +23881,7 @@
                 <a:ea typeface="Trebuchet MS" pitchFamily="34" charset="-122"/>
                 <a:cs typeface="Trebuchet MS" pitchFamily="34" charset="-120"/>
               </a:rPr>
-              <a:t>ex</a:t>
+              <a:t>pre</a:t>
             </a:r>
             <a:endParaRPr lang="en-US" sz="1300" dirty="0"/>
           </a:p>
@@ -24139,7 +23920,7 @@
                 <a:ea typeface="Calibri" pitchFamily="34" charset="-122"/>
                 <a:cs typeface="Calibri" pitchFamily="34" charset="-120"/>
               </a:rPr>
-              <a:t>out, outward</a:t>
+              <a:t>before, in front</a:t>
             </a:r>
             <a:endParaRPr lang="en-US" sz="850" dirty="0"/>
           </a:p>
@@ -24251,7 +24032,7 @@
                 <a:ea typeface="Calibri" pitchFamily="34" charset="-122"/>
                 <a:cs typeface="Calibri" pitchFamily="34" charset="-120"/>
               </a:rPr>
-              <a:t>to stretch or reach</a:t>
+              <a:t>stretch, reach</a:t>
             </a:r>
             <a:endParaRPr lang="en-US" sz="850" dirty="0"/>
           </a:p>
@@ -24807,7 +24588,7 @@
                 <a:ea typeface="Calibri" pitchFamily="34" charset="-122"/>
                 <a:cs typeface="Calibri" pitchFamily="34" charset="-120"/>
               </a:rPr>
-              <a:t>Word Labs  •  wordlabs.app  •  Root: 'tend' = to stretch, reach, or extend</a:t>
+              <a:t>Word Labs  •  wordlabs.app  •  Root: 'tend' = stretch, reach, or extend</a:t>
             </a:r>
             <a:endParaRPr lang="en-US" sz="800" dirty="0"/>
           </a:p>
@@ -24880,7 +24661,7 @@
                 <a:ea typeface="Trebuchet MS" pitchFamily="34" charset="-122"/>
                 <a:cs typeface="Trebuchet MS" pitchFamily="34" charset="-120"/>
               </a:rPr>
-              <a:t>We are learning that the root 'tend' means 'to stretch, reach, or extend'.</a:t>
+              <a:t>We are learning that the root 'tend' means 'stretch, reach, or extend'.</a:t>
             </a:r>
             <a:endParaRPr lang="en-US" sz="2000" dirty="0"/>
           </a:p>
@@ -25526,7 +25307,7 @@
                 <a:ea typeface="Calibri" pitchFamily="34" charset="-122"/>
                 <a:cs typeface="Calibri" pitchFamily="34" charset="-120"/>
               </a:rPr>
-              <a:t>Word Labs  •  wordlabs.app  •  Root: 'tend' = to stretch, reach, or extend</a:t>
+              <a:t>Word Labs  •  wordlabs.app  •  Root: 'tend' = stretch, reach, or extend</a:t>
             </a:r>
             <a:endParaRPr lang="en-US" sz="800" dirty="0"/>
           </a:p>
@@ -25665,7 +25446,7 @@
                 <a:ea typeface="Trebuchet MS" pitchFamily="34" charset="-122"/>
                 <a:cs typeface="Trebuchet MS" pitchFamily="34" charset="-120"/>
               </a:rPr>
-              <a:t>extend</a:t>
+              <a:t>pretend</a:t>
             </a:r>
             <a:endParaRPr lang="en-US" sz="2800" dirty="0"/>
           </a:p>
@@ -25804,7 +25585,7 @@
                 <a:ea typeface="Trebuchet MS" pitchFamily="34" charset="-122"/>
                 <a:cs typeface="Trebuchet MS" pitchFamily="34" charset="-120"/>
               </a:rPr>
-              <a:t>ex</a:t>
+              <a:t>pre</a:t>
             </a:r>
             <a:endParaRPr lang="en-US" sz="1300" dirty="0"/>
           </a:p>
@@ -25843,7 +25624,7 @@
                 <a:ea typeface="Calibri" pitchFamily="34" charset="-122"/>
                 <a:cs typeface="Calibri" pitchFamily="34" charset="-120"/>
               </a:rPr>
-              <a:t>out, outward</a:t>
+              <a:t>before, in front</a:t>
             </a:r>
             <a:endParaRPr lang="en-US" sz="850" dirty="0"/>
           </a:p>
@@ -25955,7 +25736,7 @@
                 <a:ea typeface="Calibri" pitchFamily="34" charset="-122"/>
                 <a:cs typeface="Calibri" pitchFamily="34" charset="-120"/>
               </a:rPr>
-              <a:t>to stretch or reach</a:t>
+              <a:t>stretch, reach</a:t>
             </a:r>
             <a:endParaRPr lang="en-US" sz="850" dirty="0"/>
           </a:p>
@@ -26114,7 +25895,7 @@
                 <a:ea typeface="Trebuchet MS" pitchFamily="34" charset="-122"/>
                 <a:cs typeface="Trebuchet MS" pitchFamily="34" charset="-120"/>
               </a:rPr>
-              <a:t>ex</a:t>
+              <a:t>pre</a:t>
             </a:r>
             <a:endParaRPr lang="en-US" sz="1400" dirty="0"/>
           </a:p>
@@ -26643,7 +26424,7 @@
                 <a:ea typeface="Calibri" pitchFamily="34" charset="-122"/>
                 <a:cs typeface="Calibri" pitchFamily="34" charset="-120"/>
               </a:rPr>
-              <a:t>Word Labs  •  wordlabs.app  •  Root: 'tend' = to stretch, reach, or extend</a:t>
+              <a:t>Word Labs  •  wordlabs.app  •  Root: 'tend' = stretch, reach, or extend</a:t>
             </a:r>
             <a:endParaRPr lang="en-US" sz="800" dirty="0"/>
           </a:p>
@@ -26782,7 +26563,7 @@
                 <a:ea typeface="Trebuchet MS" pitchFamily="34" charset="-122"/>
                 <a:cs typeface="Trebuchet MS" pitchFamily="34" charset="-120"/>
               </a:rPr>
-              <a:t>extend</a:t>
+              <a:t>pretend</a:t>
             </a:r>
             <a:endParaRPr lang="en-US" sz="2800" dirty="0"/>
           </a:p>
@@ -26921,7 +26702,7 @@
                 <a:ea typeface="Trebuchet MS" pitchFamily="34" charset="-122"/>
                 <a:cs typeface="Trebuchet MS" pitchFamily="34" charset="-120"/>
               </a:rPr>
-              <a:t>ex</a:t>
+              <a:t>pre</a:t>
             </a:r>
             <a:endParaRPr lang="en-US" sz="1300" dirty="0"/>
           </a:p>
@@ -26960,7 +26741,7 @@
                 <a:ea typeface="Calibri" pitchFamily="34" charset="-122"/>
                 <a:cs typeface="Calibri" pitchFamily="34" charset="-120"/>
               </a:rPr>
-              <a:t>out, outward</a:t>
+              <a:t>before, in front</a:t>
             </a:r>
             <a:endParaRPr lang="en-US" sz="850" dirty="0"/>
           </a:p>
@@ -27072,7 +26853,7 @@
                 <a:ea typeface="Calibri" pitchFamily="34" charset="-122"/>
                 <a:cs typeface="Calibri" pitchFamily="34" charset="-120"/>
               </a:rPr>
-              <a:t>to stretch or reach</a:t>
+              <a:t>stretch, reach</a:t>
             </a:r>
             <a:endParaRPr lang="en-US" sz="850" dirty="0"/>
           </a:p>
@@ -27231,7 +27012,7 @@
                 <a:ea typeface="Trebuchet MS" pitchFamily="34" charset="-122"/>
                 <a:cs typeface="Trebuchet MS" pitchFamily="34" charset="-120"/>
               </a:rPr>
-              <a:t>ex</a:t>
+              <a:t>pre</a:t>
             </a:r>
             <a:endParaRPr lang="en-US" sz="1400" dirty="0"/>
           </a:p>
@@ -27443,7 +27224,7 @@
         </p:nvSpPr>
         <p:spPr>
           <a:xfrm>
-            <a:off x="2254649" y="4169664"/>
+            <a:off x="2124837" y="4169664"/>
             <a:ext cx="685800" cy="475488"/>
           </a:xfrm>
           <a:prstGeom prst="rect">
@@ -27470,7 +27251,7 @@
         </p:nvSpPr>
         <p:spPr>
           <a:xfrm>
-            <a:off x="2254649" y="4169664"/>
+            <a:off x="2124837" y="4169664"/>
             <a:ext cx="685800" cy="475488"/>
           </a:xfrm>
           <a:prstGeom prst="rect">
@@ -27495,7 +27276,7 @@
                 <a:ea typeface="Trebuchet MS" pitchFamily="34" charset="-122"/>
                 <a:cs typeface="Trebuchet MS" pitchFamily="34" charset="-120"/>
               </a:rPr>
-              <a:t>e</a:t>
+              <a:t>p</a:t>
             </a:r>
             <a:endParaRPr lang="en-US" sz="900" dirty="0"/>
           </a:p>
@@ -27509,7 +27290,7 @@
         </p:nvSpPr>
         <p:spPr>
           <a:xfrm>
-            <a:off x="3293146" y="4169664"/>
+            <a:off x="3033522" y="4169664"/>
             <a:ext cx="685800" cy="475488"/>
           </a:xfrm>
           <a:prstGeom prst="rect">
@@ -27536,7 +27317,7 @@
         </p:nvSpPr>
         <p:spPr>
           <a:xfrm>
-            <a:off x="3293146" y="4169664"/>
+            <a:off x="3033522" y="4169664"/>
             <a:ext cx="685800" cy="475488"/>
           </a:xfrm>
           <a:prstGeom prst="rect">
@@ -27561,7 +27342,7 @@
                 <a:ea typeface="Trebuchet MS" pitchFamily="34" charset="-122"/>
                 <a:cs typeface="Trebuchet MS" pitchFamily="34" charset="-120"/>
               </a:rPr>
-              <a:t>x</a:t>
+              <a:t>r</a:t>
             </a:r>
             <a:endParaRPr lang="en-US" sz="900" dirty="0"/>
           </a:p>
@@ -27575,7 +27356,7 @@
         </p:nvSpPr>
         <p:spPr>
           <a:xfrm>
-            <a:off x="4331643" y="4169664"/>
+            <a:off x="3942207" y="4169664"/>
             <a:ext cx="685800" cy="475488"/>
           </a:xfrm>
           <a:prstGeom prst="rect">
@@ -27602,7 +27383,7 @@
         </p:nvSpPr>
         <p:spPr>
           <a:xfrm>
-            <a:off x="4331643" y="4169664"/>
+            <a:off x="3942207" y="4169664"/>
             <a:ext cx="685800" cy="475488"/>
           </a:xfrm>
           <a:prstGeom prst="rect">
@@ -27627,7 +27408,7 @@
                 <a:ea typeface="Trebuchet MS" pitchFamily="34" charset="-122"/>
                 <a:cs typeface="Trebuchet MS" pitchFamily="34" charset="-120"/>
               </a:rPr>
-              <a:t>t</a:t>
+              <a:t>e</a:t>
             </a:r>
             <a:endParaRPr lang="en-US" sz="900" dirty="0"/>
           </a:p>
@@ -27641,7 +27422,7 @@
         </p:nvSpPr>
         <p:spPr>
           <a:xfrm>
-            <a:off x="5370141" y="4169664"/>
+            <a:off x="4850892" y="4169664"/>
             <a:ext cx="685800" cy="475488"/>
           </a:xfrm>
           <a:prstGeom prst="rect">
@@ -27668,7 +27449,7 @@
         </p:nvSpPr>
         <p:spPr>
           <a:xfrm>
-            <a:off x="5370141" y="4169664"/>
+            <a:off x="4850892" y="4169664"/>
             <a:ext cx="685800" cy="475488"/>
           </a:xfrm>
           <a:prstGeom prst="rect">
@@ -27693,7 +27474,7 @@
                 <a:ea typeface="Trebuchet MS" pitchFamily="34" charset="-122"/>
                 <a:cs typeface="Trebuchet MS" pitchFamily="34" charset="-120"/>
               </a:rPr>
-              <a:t>e</a:t>
+              <a:t>t</a:t>
             </a:r>
             <a:endParaRPr lang="en-US" sz="900" dirty="0"/>
           </a:p>
@@ -27707,7 +27488,7 @@
         </p:nvSpPr>
         <p:spPr>
           <a:xfrm>
-            <a:off x="6408638" y="4169664"/>
+            <a:off x="5759577" y="4169664"/>
             <a:ext cx="685800" cy="475488"/>
           </a:xfrm>
           <a:prstGeom prst="rect">
@@ -27734,7 +27515,7 @@
         </p:nvSpPr>
         <p:spPr>
           <a:xfrm>
-            <a:off x="6408638" y="4169664"/>
+            <a:off x="5759577" y="4169664"/>
             <a:ext cx="685800" cy="475488"/>
           </a:xfrm>
           <a:prstGeom prst="rect">
@@ -27759,7 +27540,7 @@
                 <a:ea typeface="Trebuchet MS" pitchFamily="34" charset="-122"/>
                 <a:cs typeface="Trebuchet MS" pitchFamily="34" charset="-120"/>
               </a:rPr>
-              <a:t>n</a:t>
+              <a:t>e</a:t>
             </a:r>
             <a:endParaRPr lang="en-US" sz="900" dirty="0"/>
           </a:p>
@@ -27773,7 +27554,7 @@
         </p:nvSpPr>
         <p:spPr>
           <a:xfrm>
-            <a:off x="7447135" y="4169664"/>
+            <a:off x="6668262" y="4169664"/>
             <a:ext cx="685800" cy="475488"/>
           </a:xfrm>
           <a:prstGeom prst="rect">
@@ -27800,7 +27581,73 @@
         </p:nvSpPr>
         <p:spPr>
           <a:xfrm>
-            <a:off x="7447135" y="4169664"/>
+            <a:off x="6668262" y="4169664"/>
+            <a:ext cx="685800" cy="475488"/>
+          </a:xfrm>
+          <a:prstGeom prst="rect">
+            <a:avLst/>
+          </a:prstGeom>
+          <a:noFill/>
+          <a:ln/>
+        </p:spPr>
+        <p:txBody>
+          <a:bodyPr wrap="square" lIns="0" tIns="0" rIns="0" bIns="0" rtlCol="0" anchor="ctr"/>
+          <a:lstStyle/>
+          <a:p>
+            <a:pPr algn="ctr" indent="0" marL="0">
+              <a:buNone/>
+            </a:pPr>
+            <a:r>
+              <a:rPr lang="en-US" sz="900" b="1" dirty="0">
+                <a:solidFill>
+                  <a:srgbClr val="9D174D"/>
+                </a:solidFill>
+                <a:latin typeface="Trebuchet MS" pitchFamily="34" charset="0"/>
+                <a:ea typeface="Trebuchet MS" pitchFamily="34" charset="-122"/>
+                <a:cs typeface="Trebuchet MS" pitchFamily="34" charset="-120"/>
+              </a:rPr>
+              <a:t>n</a:t>
+            </a:r>
+            <a:endParaRPr lang="en-US" sz="900" dirty="0"/>
+          </a:p>
+        </p:txBody>
+      </p:sp>
+      <p:sp>
+        <p:nvSpPr>
+          <p:cNvPr id="45" name="Shape 43"/>
+          <p:cNvSpPr/>
+          <p:nvPr/>
+        </p:nvSpPr>
+        <p:spPr>
+          <a:xfrm>
+            <a:off x="7576947" y="4169664"/>
+            <a:ext cx="685800" cy="475488"/>
+          </a:xfrm>
+          <a:prstGeom prst="rect">
+            <a:avLst>
+              <a:gd name="adj" fmla="val 7692"/>
+            </a:avLst>
+          </a:prstGeom>
+          <a:solidFill>
+            <a:srgbClr val="FFFFFF"/>
+          </a:solidFill>
+          <a:ln w="12700">
+            <a:solidFill>
+              <a:srgbClr val="DB2777"/>
+            </a:solidFill>
+            <a:prstDash val="solid"/>
+          </a:ln>
+        </p:spPr>
+      </p:sp>
+      <p:sp>
+        <p:nvSpPr>
+          <p:cNvPr id="46" name="Text 44"/>
+          <p:cNvSpPr/>
+          <p:nvPr/>
+        </p:nvSpPr>
+        <p:spPr>
+          <a:xfrm>
+            <a:off x="7576947" y="4169664"/>
             <a:ext cx="685800" cy="475488"/>
           </a:xfrm>
           <a:prstGeom prst="rect">
@@ -28117,7 +27964,7 @@
                 <a:ea typeface="Calibri" pitchFamily="34" charset="-122"/>
                 <a:cs typeface="Calibri" pitchFamily="34" charset="-120"/>
               </a:rPr>
-              <a:t>Word Labs  •  wordlabs.app  •  Root: 'tend' = to stretch, reach, or extend</a:t>
+              <a:t>Word Labs  •  wordlabs.app  •  Root: 'tend' = stretch, reach, or extend</a:t>
             </a:r>
             <a:endParaRPr lang="en-US" sz="800" dirty="0"/>
           </a:p>
@@ -28256,7 +28103,7 @@
                 <a:ea typeface="Trebuchet MS" pitchFamily="34" charset="-122"/>
                 <a:cs typeface="Trebuchet MS" pitchFamily="34" charset="-120"/>
               </a:rPr>
-              <a:t>pretend</a:t>
+              <a:t>tendency</a:t>
             </a:r>
             <a:endParaRPr lang="en-US" sz="2800" dirty="0"/>
           </a:p>
@@ -28944,7 +28791,7 @@
                 <a:ea typeface="Calibri" pitchFamily="34" charset="-122"/>
                 <a:cs typeface="Calibri" pitchFamily="34" charset="-120"/>
               </a:rPr>
-              <a:t>Word Labs  •  wordlabs.app  •  Root: 'tend' = to stretch, reach, or extend</a:t>
+              <a:t>Word Labs  •  wordlabs.app  •  Root: 'tend' = stretch, reach, or extend</a:t>
             </a:r>
             <a:endParaRPr lang="en-US" sz="800" dirty="0"/>
           </a:p>
@@ -29083,7 +28930,7 @@
                 <a:ea typeface="Trebuchet MS" pitchFamily="34" charset="-122"/>
                 <a:cs typeface="Trebuchet MS" pitchFamily="34" charset="-120"/>
               </a:rPr>
-              <a:t>pretend</a:t>
+              <a:t>tendency</a:t>
             </a:r>
             <a:endParaRPr lang="en-US" sz="2800" dirty="0"/>
           </a:p>
@@ -29172,11 +29019,11 @@
             </a:avLst>
           </a:prstGeom>
           <a:solidFill>
-            <a:srgbClr val="DDD6FE"/>
+            <a:srgbClr val="CCFBF1"/>
           </a:solidFill>
           <a:ln w="19050">
             <a:solidFill>
-              <a:srgbClr val="7C3AED"/>
+              <a:srgbClr val="0D9488"/>
             </a:solidFill>
             <a:prstDash val="solid"/>
           </a:ln>
@@ -29216,13 +29063,13 @@
             <a:r>
               <a:rPr lang="en-US" sz="1300" b="1" dirty="0">
                 <a:solidFill>
-                  <a:srgbClr val="4C1D95"/>
+                  <a:srgbClr val="0F766E"/>
                 </a:solidFill>
                 <a:latin typeface="Trebuchet MS" pitchFamily="34" charset="0"/>
                 <a:ea typeface="Trebuchet MS" pitchFamily="34" charset="-122"/>
                 <a:cs typeface="Trebuchet MS" pitchFamily="34" charset="-120"/>
               </a:rPr>
-              <a:t>pre</a:t>
+              <a:t>tend</a:t>
             </a:r>
             <a:endParaRPr lang="en-US" sz="1300" dirty="0"/>
           </a:p>
@@ -29261,7 +29108,7 @@
                 <a:ea typeface="Calibri" pitchFamily="34" charset="-122"/>
                 <a:cs typeface="Calibri" pitchFamily="34" charset="-120"/>
               </a:rPr>
-              <a:t>before, in front</a:t>
+              <a:t>stretch, reach</a:t>
             </a:r>
             <a:endParaRPr lang="en-US" sz="850" dirty="0"/>
           </a:p>
@@ -29284,11 +29131,11 @@
             </a:avLst>
           </a:prstGeom>
           <a:solidFill>
-            <a:srgbClr val="CCFBF1"/>
+            <a:srgbClr val="FCE7F3"/>
           </a:solidFill>
           <a:ln w="19050">
             <a:solidFill>
-              <a:srgbClr val="0D9488"/>
+              <a:srgbClr val="DB2777"/>
             </a:solidFill>
             <a:prstDash val="solid"/>
           </a:ln>
@@ -29328,13 +29175,13 @@
             <a:r>
               <a:rPr lang="en-US" sz="1300" b="1" dirty="0">
                 <a:solidFill>
-                  <a:srgbClr val="0F766E"/>
+                  <a:srgbClr val="9D174D"/>
                 </a:solidFill>
                 <a:latin typeface="Trebuchet MS" pitchFamily="34" charset="0"/>
                 <a:ea typeface="Trebuchet MS" pitchFamily="34" charset="-122"/>
                 <a:cs typeface="Trebuchet MS" pitchFamily="34" charset="-120"/>
               </a:rPr>
-              <a:t>tend</a:t>
+              <a:t>ency</a:t>
             </a:r>
             <a:endParaRPr lang="en-US" sz="1300" dirty="0"/>
           </a:p>
@@ -29373,7 +29220,7 @@
                 <a:ea typeface="Calibri" pitchFamily="34" charset="-122"/>
                 <a:cs typeface="Calibri" pitchFamily="34" charset="-120"/>
               </a:rPr>
-              <a:t>to stretch or reach</a:t>
+              <a:t>state or quality of</a:t>
             </a:r>
             <a:endParaRPr lang="en-US" sz="850" dirty="0"/>
           </a:p>
@@ -29929,7 +29776,7 @@
                 <a:ea typeface="Calibri" pitchFamily="34" charset="-122"/>
                 <a:cs typeface="Calibri" pitchFamily="34" charset="-120"/>
               </a:rPr>
-              <a:t>Word Labs  •  wordlabs.app  •  Root: 'tend' = to stretch, reach, or extend</a:t>
+              <a:t>Word Labs  •  wordlabs.app  •  Root: 'tend' = stretch, reach, or extend</a:t>
             </a:r>
             <a:endParaRPr lang="en-US" sz="800" dirty="0"/>
           </a:p>
@@ -30068,7 +29915,7 @@
                 <a:ea typeface="Trebuchet MS" pitchFamily="34" charset="-122"/>
                 <a:cs typeface="Trebuchet MS" pitchFamily="34" charset="-120"/>
               </a:rPr>
-              <a:t>pretend</a:t>
+              <a:t>tendency</a:t>
             </a:r>
             <a:endParaRPr lang="en-US" sz="2800" dirty="0"/>
           </a:p>
@@ -30157,11 +30004,11 @@
             </a:avLst>
           </a:prstGeom>
           <a:solidFill>
-            <a:srgbClr val="DDD6FE"/>
+            <a:srgbClr val="CCFBF1"/>
           </a:solidFill>
           <a:ln w="19050">
             <a:solidFill>
-              <a:srgbClr val="7C3AED"/>
+              <a:srgbClr val="0D9488"/>
             </a:solidFill>
             <a:prstDash val="solid"/>
           </a:ln>
@@ -30201,13 +30048,13 @@
             <a:r>
               <a:rPr lang="en-US" sz="1300" b="1" dirty="0">
                 <a:solidFill>
-                  <a:srgbClr val="4C1D95"/>
+                  <a:srgbClr val="0F766E"/>
                 </a:solidFill>
                 <a:latin typeface="Trebuchet MS" pitchFamily="34" charset="0"/>
                 <a:ea typeface="Trebuchet MS" pitchFamily="34" charset="-122"/>
                 <a:cs typeface="Trebuchet MS" pitchFamily="34" charset="-120"/>
               </a:rPr>
-              <a:t>pre</a:t>
+              <a:t>tend</a:t>
             </a:r>
             <a:endParaRPr lang="en-US" sz="1300" dirty="0"/>
           </a:p>
@@ -30246,7 +30093,7 @@
                 <a:ea typeface="Calibri" pitchFamily="34" charset="-122"/>
                 <a:cs typeface="Calibri" pitchFamily="34" charset="-120"/>
               </a:rPr>
-              <a:t>before, in front</a:t>
+              <a:t>stretch, reach</a:t>
             </a:r>
             <a:endParaRPr lang="en-US" sz="850" dirty="0"/>
           </a:p>
@@ -30269,11 +30116,11 @@
             </a:avLst>
           </a:prstGeom>
           <a:solidFill>
-            <a:srgbClr val="CCFBF1"/>
+            <a:srgbClr val="FCE7F3"/>
           </a:solidFill>
           <a:ln w="19050">
             <a:solidFill>
-              <a:srgbClr val="0D9488"/>
+              <a:srgbClr val="DB2777"/>
             </a:solidFill>
             <a:prstDash val="solid"/>
           </a:ln>
@@ -30313,13 +30160,13 @@
             <a:r>
               <a:rPr lang="en-US" sz="1300" b="1" dirty="0">
                 <a:solidFill>
-                  <a:srgbClr val="0F766E"/>
+                  <a:srgbClr val="9D174D"/>
                 </a:solidFill>
                 <a:latin typeface="Trebuchet MS" pitchFamily="34" charset="0"/>
                 <a:ea typeface="Trebuchet MS" pitchFamily="34" charset="-122"/>
                 <a:cs typeface="Trebuchet MS" pitchFamily="34" charset="-120"/>
               </a:rPr>
-              <a:t>tend</a:t>
+              <a:t>ency</a:t>
             </a:r>
             <a:endParaRPr lang="en-US" sz="1300" dirty="0"/>
           </a:p>
@@ -30358,7 +30205,7 @@
                 <a:ea typeface="Calibri" pitchFamily="34" charset="-122"/>
                 <a:cs typeface="Calibri" pitchFamily="34" charset="-120"/>
               </a:rPr>
-              <a:t>to stretch or reach</a:t>
+              <a:t>state or quality of</a:t>
             </a:r>
             <a:endParaRPr lang="en-US" sz="850" dirty="0"/>
           </a:p>
@@ -30465,7 +30312,7 @@
         </p:nvSpPr>
         <p:spPr>
           <a:xfrm>
-            <a:off x="2999232" y="3364992"/>
+            <a:off x="2313432" y="3364992"/>
             <a:ext cx="1645920" cy="475488"/>
           </a:xfrm>
           <a:prstGeom prst="rect">
@@ -30492,7 +30339,7 @@
         </p:nvSpPr>
         <p:spPr>
           <a:xfrm>
-            <a:off x="2999232" y="3364992"/>
+            <a:off x="2313432" y="3364992"/>
             <a:ext cx="1645920" cy="475488"/>
           </a:xfrm>
           <a:prstGeom prst="rect">
@@ -30517,7 +30364,7 @@
                 <a:ea typeface="Trebuchet MS" pitchFamily="34" charset="-122"/>
                 <a:cs typeface="Trebuchet MS" pitchFamily="34" charset="-120"/>
               </a:rPr>
-              <a:t>pre</a:t>
+              <a:t>ten</a:t>
             </a:r>
             <a:endParaRPr lang="en-US" sz="1400" dirty="0"/>
           </a:p>
@@ -30531,8 +30378,8 @@
         </p:nvSpPr>
         <p:spPr>
           <a:xfrm>
-            <a:off x="4645152" y="3364992"/>
-            <a:ext cx="1097280" cy="475488"/>
+            <a:off x="3959352" y="3364992"/>
+            <a:ext cx="411480" cy="475488"/>
           </a:xfrm>
           <a:prstGeom prst="rect">
             <a:avLst/>
@@ -30570,7 +30417,7 @@
         </p:nvSpPr>
         <p:spPr>
           <a:xfrm>
-            <a:off x="5742432" y="3364992"/>
+            <a:off x="4370832" y="3364992"/>
             <a:ext cx="1645920" cy="475488"/>
           </a:xfrm>
           <a:prstGeom prst="rect">
@@ -30597,7 +30444,7 @@
         </p:nvSpPr>
         <p:spPr>
           <a:xfrm>
-            <a:off x="5742432" y="3364992"/>
+            <a:off x="4370832" y="3364992"/>
             <a:ext cx="1645920" cy="475488"/>
           </a:xfrm>
           <a:prstGeom prst="rect">
@@ -30622,7 +30469,7 @@
                 <a:ea typeface="Trebuchet MS" pitchFamily="34" charset="-122"/>
                 <a:cs typeface="Trebuchet MS" pitchFamily="34" charset="-120"/>
               </a:rPr>
-              <a:t>tend</a:t>
+              <a:t>den</a:t>
             </a:r>
             <a:endParaRPr lang="en-US" sz="1400" dirty="0"/>
           </a:p>
@@ -30630,7 +30477,112 @@
       </p:sp>
       <p:sp>
         <p:nvSpPr>
-          <p:cNvPr id="30" name="Shape 28"/>
+          <p:cNvPr id="30" name="Text 28"/>
+          <p:cNvSpPr/>
+          <p:nvPr/>
+        </p:nvSpPr>
+        <p:spPr>
+          <a:xfrm>
+            <a:off x="6016752" y="3364992"/>
+            <a:ext cx="411480" cy="475488"/>
+          </a:xfrm>
+          <a:prstGeom prst="rect">
+            <a:avLst/>
+          </a:prstGeom>
+          <a:noFill/>
+          <a:ln/>
+        </p:spPr>
+        <p:txBody>
+          <a:bodyPr wrap="square" lIns="0" tIns="0" rIns="0" bIns="0" rtlCol="0" anchor="ctr"/>
+          <a:lstStyle/>
+          <a:p>
+            <a:pPr algn="ctr" indent="0" marL="0">
+              <a:buNone/>
+            </a:pPr>
+            <a:r>
+              <a:rPr lang="en-US" sz="1600" b="1" dirty="0">
+                <a:solidFill>
+                  <a:srgbClr val="0D9488"/>
+                </a:solidFill>
+                <a:latin typeface="Trebuchet MS" pitchFamily="34" charset="0"/>
+                <a:ea typeface="Trebuchet MS" pitchFamily="34" charset="-122"/>
+                <a:cs typeface="Trebuchet MS" pitchFamily="34" charset="-120"/>
+              </a:rPr>
+              <a:t>·</a:t>
+            </a:r>
+            <a:endParaRPr lang="en-US" sz="1600" dirty="0"/>
+          </a:p>
+        </p:txBody>
+      </p:sp>
+      <p:sp>
+        <p:nvSpPr>
+          <p:cNvPr id="31" name="Shape 29"/>
+          <p:cNvSpPr/>
+          <p:nvPr/>
+        </p:nvSpPr>
+        <p:spPr>
+          <a:xfrm>
+            <a:off x="6428232" y="3364992"/>
+            <a:ext cx="1645920" cy="475488"/>
+          </a:xfrm>
+          <a:prstGeom prst="rect">
+            <a:avLst>
+              <a:gd name="adj" fmla="val 9615"/>
+            </a:avLst>
+          </a:prstGeom>
+          <a:solidFill>
+            <a:srgbClr val="FFFFFF"/>
+          </a:solidFill>
+          <a:ln w="12700">
+            <a:solidFill>
+              <a:srgbClr val="0D9488"/>
+            </a:solidFill>
+            <a:prstDash val="solid"/>
+          </a:ln>
+        </p:spPr>
+      </p:sp>
+      <p:sp>
+        <p:nvSpPr>
+          <p:cNvPr id="32" name="Text 30"/>
+          <p:cNvSpPr/>
+          <p:nvPr/>
+        </p:nvSpPr>
+        <p:spPr>
+          <a:xfrm>
+            <a:off x="6428232" y="3364992"/>
+            <a:ext cx="1645920" cy="475488"/>
+          </a:xfrm>
+          <a:prstGeom prst="rect">
+            <a:avLst/>
+          </a:prstGeom>
+          <a:noFill/>
+          <a:ln/>
+        </p:spPr>
+        <p:txBody>
+          <a:bodyPr wrap="square" lIns="0" tIns="0" rIns="0" bIns="0" rtlCol="0" anchor="ctr"/>
+          <a:lstStyle/>
+          <a:p>
+            <a:pPr algn="ctr" indent="0" marL="0">
+              <a:buNone/>
+            </a:pPr>
+            <a:r>
+              <a:rPr lang="en-US" sz="1400" b="1" dirty="0">
+                <a:solidFill>
+                  <a:srgbClr val="0D9488"/>
+                </a:solidFill>
+                <a:latin typeface="Trebuchet MS" pitchFamily="34" charset="0"/>
+                <a:ea typeface="Trebuchet MS" pitchFamily="34" charset="-122"/>
+                <a:cs typeface="Trebuchet MS" pitchFamily="34" charset="-120"/>
+              </a:rPr>
+              <a:t>cy</a:t>
+            </a:r>
+            <a:endParaRPr lang="en-US" sz="1400" dirty="0"/>
+          </a:p>
+        </p:txBody>
+      </p:sp>
+      <p:sp>
+        <p:nvSpPr>
+          <p:cNvPr id="33" name="Shape 31"/>
           <p:cNvSpPr/>
           <p:nvPr/>
         </p:nvSpPr>
@@ -30657,7 +30609,7 @@
       </p:sp>
       <p:sp>
         <p:nvSpPr>
-          <p:cNvPr id="31" name="Text 29"/>
+          <p:cNvPr id="34" name="Text 32"/>
           <p:cNvSpPr/>
           <p:nvPr/>
         </p:nvSpPr>
@@ -30696,7 +30648,7 @@
       </p:sp>
       <p:sp>
         <p:nvSpPr>
-          <p:cNvPr id="32" name="Shape 30"/>
+          <p:cNvPr id="35" name="Shape 33"/>
           <p:cNvSpPr/>
           <p:nvPr/>
         </p:nvSpPr>
@@ -30723,7 +30675,7 @@
       </p:sp>
       <p:sp>
         <p:nvSpPr>
-          <p:cNvPr id="33" name="Text 31"/>
+          <p:cNvPr id="36" name="Text 34"/>
           <p:cNvSpPr/>
           <p:nvPr/>
         </p:nvSpPr>
@@ -31046,7 +30998,7 @@
                 <a:ea typeface="Calibri" pitchFamily="34" charset="-122"/>
                 <a:cs typeface="Calibri" pitchFamily="34" charset="-120"/>
               </a:rPr>
-              <a:t>Word Labs  •  wordlabs.app  •  Root: 'tend' = to stretch, reach, or extend</a:t>
+              <a:t>Word Labs  •  wordlabs.app  •  Root: 'tend' = stretch, reach, or extend</a:t>
             </a:r>
             <a:endParaRPr lang="en-US" sz="800" dirty="0"/>
           </a:p>
@@ -31185,7 +31137,7 @@
                 <a:ea typeface="Trebuchet MS" pitchFamily="34" charset="-122"/>
                 <a:cs typeface="Trebuchet MS" pitchFamily="34" charset="-120"/>
               </a:rPr>
-              <a:t>pretend</a:t>
+              <a:t>tendency</a:t>
             </a:r>
             <a:endParaRPr lang="en-US" sz="2800" dirty="0"/>
           </a:p>
@@ -31274,11 +31226,11 @@
             </a:avLst>
           </a:prstGeom>
           <a:solidFill>
-            <a:srgbClr val="DDD6FE"/>
+            <a:srgbClr val="CCFBF1"/>
           </a:solidFill>
           <a:ln w="19050">
             <a:solidFill>
-              <a:srgbClr val="7C3AED"/>
+              <a:srgbClr val="0D9488"/>
             </a:solidFill>
             <a:prstDash val="solid"/>
           </a:ln>
@@ -31318,13 +31270,13 @@
             <a:r>
               <a:rPr lang="en-US" sz="1300" b="1" dirty="0">
                 <a:solidFill>
-                  <a:srgbClr val="4C1D95"/>
+                  <a:srgbClr val="0F766E"/>
                 </a:solidFill>
                 <a:latin typeface="Trebuchet MS" pitchFamily="34" charset="0"/>
                 <a:ea typeface="Trebuchet MS" pitchFamily="34" charset="-122"/>
                 <a:cs typeface="Trebuchet MS" pitchFamily="34" charset="-120"/>
               </a:rPr>
-              <a:t>pre</a:t>
+              <a:t>tend</a:t>
             </a:r>
             <a:endParaRPr lang="en-US" sz="1300" dirty="0"/>
           </a:p>
@@ -31363,7 +31315,7 @@
                 <a:ea typeface="Calibri" pitchFamily="34" charset="-122"/>
                 <a:cs typeface="Calibri" pitchFamily="34" charset="-120"/>
               </a:rPr>
-              <a:t>before, in front</a:t>
+              <a:t>stretch, reach</a:t>
             </a:r>
             <a:endParaRPr lang="en-US" sz="850" dirty="0"/>
           </a:p>
@@ -31386,11 +31338,11 @@
             </a:avLst>
           </a:prstGeom>
           <a:solidFill>
-            <a:srgbClr val="CCFBF1"/>
+            <a:srgbClr val="FCE7F3"/>
           </a:solidFill>
           <a:ln w="19050">
             <a:solidFill>
-              <a:srgbClr val="0D9488"/>
+              <a:srgbClr val="DB2777"/>
             </a:solidFill>
             <a:prstDash val="solid"/>
           </a:ln>
@@ -31430,13 +31382,13 @@
             <a:r>
               <a:rPr lang="en-US" sz="1300" b="1" dirty="0">
                 <a:solidFill>
-                  <a:srgbClr val="0F766E"/>
+                  <a:srgbClr val="9D174D"/>
                 </a:solidFill>
                 <a:latin typeface="Trebuchet MS" pitchFamily="34" charset="0"/>
                 <a:ea typeface="Trebuchet MS" pitchFamily="34" charset="-122"/>
                 <a:cs typeface="Trebuchet MS" pitchFamily="34" charset="-120"/>
               </a:rPr>
-              <a:t>tend</a:t>
+              <a:t>ency</a:t>
             </a:r>
             <a:endParaRPr lang="en-US" sz="1300" dirty="0"/>
           </a:p>
@@ -31475,7 +31427,7 @@
                 <a:ea typeface="Calibri" pitchFamily="34" charset="-122"/>
                 <a:cs typeface="Calibri" pitchFamily="34" charset="-120"/>
               </a:rPr>
-              <a:t>to stretch or reach</a:t>
+              <a:t>state or quality of</a:t>
             </a:r>
             <a:endParaRPr lang="en-US" sz="850" dirty="0"/>
           </a:p>
@@ -31582,7 +31534,7 @@
         </p:nvSpPr>
         <p:spPr>
           <a:xfrm>
-            <a:off x="2999232" y="3364992"/>
+            <a:off x="2313432" y="3364992"/>
             <a:ext cx="1645920" cy="475488"/>
           </a:xfrm>
           <a:prstGeom prst="rect">
@@ -31609,7 +31561,7 @@
         </p:nvSpPr>
         <p:spPr>
           <a:xfrm>
-            <a:off x="2999232" y="3364992"/>
+            <a:off x="2313432" y="3364992"/>
             <a:ext cx="1645920" cy="475488"/>
           </a:xfrm>
           <a:prstGeom prst="rect">
@@ -31634,7 +31586,7 @@
                 <a:ea typeface="Trebuchet MS" pitchFamily="34" charset="-122"/>
                 <a:cs typeface="Trebuchet MS" pitchFamily="34" charset="-120"/>
               </a:rPr>
-              <a:t>pre</a:t>
+              <a:t>ten</a:t>
             </a:r>
             <a:endParaRPr lang="en-US" sz="1400" dirty="0"/>
           </a:p>
@@ -31648,8 +31600,8 @@
         </p:nvSpPr>
         <p:spPr>
           <a:xfrm>
-            <a:off x="4645152" y="3364992"/>
-            <a:ext cx="1097280" cy="475488"/>
+            <a:off x="3959352" y="3364992"/>
+            <a:ext cx="411480" cy="475488"/>
           </a:xfrm>
           <a:prstGeom prst="rect">
             <a:avLst/>
@@ -31687,7 +31639,7 @@
         </p:nvSpPr>
         <p:spPr>
           <a:xfrm>
-            <a:off x="5742432" y="3364992"/>
+            <a:off x="4370832" y="3364992"/>
             <a:ext cx="1645920" cy="475488"/>
           </a:xfrm>
           <a:prstGeom prst="rect">
@@ -31714,7 +31666,7 @@
         </p:nvSpPr>
         <p:spPr>
           <a:xfrm>
-            <a:off x="5742432" y="3364992"/>
+            <a:off x="4370832" y="3364992"/>
             <a:ext cx="1645920" cy="475488"/>
           </a:xfrm>
           <a:prstGeom prst="rect">
@@ -31739,7 +31691,7 @@
                 <a:ea typeface="Trebuchet MS" pitchFamily="34" charset="-122"/>
                 <a:cs typeface="Trebuchet MS" pitchFamily="34" charset="-120"/>
               </a:rPr>
-              <a:t>tend</a:t>
+              <a:t>den</a:t>
             </a:r>
             <a:endParaRPr lang="en-US" sz="1400" dirty="0"/>
           </a:p>
@@ -31747,7 +31699,112 @@
       </p:sp>
       <p:sp>
         <p:nvSpPr>
-          <p:cNvPr id="30" name="Shape 28"/>
+          <p:cNvPr id="30" name="Text 28"/>
+          <p:cNvSpPr/>
+          <p:nvPr/>
+        </p:nvSpPr>
+        <p:spPr>
+          <a:xfrm>
+            <a:off x="6016752" y="3364992"/>
+            <a:ext cx="411480" cy="475488"/>
+          </a:xfrm>
+          <a:prstGeom prst="rect">
+            <a:avLst/>
+          </a:prstGeom>
+          <a:noFill/>
+          <a:ln/>
+        </p:spPr>
+        <p:txBody>
+          <a:bodyPr wrap="square" lIns="0" tIns="0" rIns="0" bIns="0" rtlCol="0" anchor="ctr"/>
+          <a:lstStyle/>
+          <a:p>
+            <a:pPr algn="ctr" indent="0" marL="0">
+              <a:buNone/>
+            </a:pPr>
+            <a:r>
+              <a:rPr lang="en-US" sz="1600" b="1" dirty="0">
+                <a:solidFill>
+                  <a:srgbClr val="0D9488"/>
+                </a:solidFill>
+                <a:latin typeface="Trebuchet MS" pitchFamily="34" charset="0"/>
+                <a:ea typeface="Trebuchet MS" pitchFamily="34" charset="-122"/>
+                <a:cs typeface="Trebuchet MS" pitchFamily="34" charset="-120"/>
+              </a:rPr>
+              <a:t>·</a:t>
+            </a:r>
+            <a:endParaRPr lang="en-US" sz="1600" dirty="0"/>
+          </a:p>
+        </p:txBody>
+      </p:sp>
+      <p:sp>
+        <p:nvSpPr>
+          <p:cNvPr id="31" name="Shape 29"/>
+          <p:cNvSpPr/>
+          <p:nvPr/>
+        </p:nvSpPr>
+        <p:spPr>
+          <a:xfrm>
+            <a:off x="6428232" y="3364992"/>
+            <a:ext cx="1645920" cy="475488"/>
+          </a:xfrm>
+          <a:prstGeom prst="rect">
+            <a:avLst>
+              <a:gd name="adj" fmla="val 9615"/>
+            </a:avLst>
+          </a:prstGeom>
+          <a:solidFill>
+            <a:srgbClr val="FFFFFF"/>
+          </a:solidFill>
+          <a:ln w="12700">
+            <a:solidFill>
+              <a:srgbClr val="0D9488"/>
+            </a:solidFill>
+            <a:prstDash val="solid"/>
+          </a:ln>
+        </p:spPr>
+      </p:sp>
+      <p:sp>
+        <p:nvSpPr>
+          <p:cNvPr id="32" name="Text 30"/>
+          <p:cNvSpPr/>
+          <p:nvPr/>
+        </p:nvSpPr>
+        <p:spPr>
+          <a:xfrm>
+            <a:off x="6428232" y="3364992"/>
+            <a:ext cx="1645920" cy="475488"/>
+          </a:xfrm>
+          <a:prstGeom prst="rect">
+            <a:avLst/>
+          </a:prstGeom>
+          <a:noFill/>
+          <a:ln/>
+        </p:spPr>
+        <p:txBody>
+          <a:bodyPr wrap="square" lIns="0" tIns="0" rIns="0" bIns="0" rtlCol="0" anchor="ctr"/>
+          <a:lstStyle/>
+          <a:p>
+            <a:pPr algn="ctr" indent="0" marL="0">
+              <a:buNone/>
+            </a:pPr>
+            <a:r>
+              <a:rPr lang="en-US" sz="1400" b="1" dirty="0">
+                <a:solidFill>
+                  <a:srgbClr val="0D9488"/>
+                </a:solidFill>
+                <a:latin typeface="Trebuchet MS" pitchFamily="34" charset="0"/>
+                <a:ea typeface="Trebuchet MS" pitchFamily="34" charset="-122"/>
+                <a:cs typeface="Trebuchet MS" pitchFamily="34" charset="-120"/>
+              </a:rPr>
+              <a:t>cy</a:t>
+            </a:r>
+            <a:endParaRPr lang="en-US" sz="1400" dirty="0"/>
+          </a:p>
+        </p:txBody>
+      </p:sp>
+      <p:sp>
+        <p:nvSpPr>
+          <p:cNvPr id="33" name="Shape 31"/>
           <p:cNvSpPr/>
           <p:nvPr/>
         </p:nvSpPr>
@@ -31774,7 +31831,7 @@
       </p:sp>
       <p:sp>
         <p:nvSpPr>
-          <p:cNvPr id="31" name="Text 29"/>
+          <p:cNvPr id="34" name="Text 32"/>
           <p:cNvSpPr/>
           <p:nvPr/>
         </p:nvSpPr>
@@ -31813,18 +31870,18 @@
       </p:sp>
       <p:sp>
         <p:nvSpPr>
-          <p:cNvPr id="32" name="Shape 30"/>
+          <p:cNvPr id="35" name="Shape 33"/>
           <p:cNvSpPr/>
           <p:nvPr/>
         </p:nvSpPr>
         <p:spPr>
           <a:xfrm>
             <a:off x="1874520" y="4096512"/>
-            <a:ext cx="6903720" cy="658368"/>
+            <a:ext cx="6903720" cy="804672"/>
           </a:xfrm>
           <a:prstGeom prst="rect">
             <a:avLst>
-              <a:gd name="adj" fmla="val 8333"/>
+              <a:gd name="adj" fmla="val 6818"/>
             </a:avLst>
           </a:prstGeom>
           <a:solidFill>
@@ -31840,18 +31897,18 @@
       </p:sp>
       <p:sp>
         <p:nvSpPr>
-          <p:cNvPr id="33" name="Shape 31"/>
-          <p:cNvSpPr/>
-          <p:nvPr/>
-        </p:nvSpPr>
-        <p:spPr>
-          <a:xfrm>
-            <a:off x="2124837" y="4169664"/>
-            <a:ext cx="685800" cy="475488"/>
+          <p:cNvPr id="36" name="Shape 34"/>
+          <p:cNvSpPr/>
+          <p:nvPr/>
+        </p:nvSpPr>
+        <p:spPr>
+          <a:xfrm>
+            <a:off x="2023872" y="4169664"/>
+            <a:ext cx="685800" cy="384048"/>
           </a:xfrm>
           <a:prstGeom prst="rect">
             <a:avLst>
-              <a:gd name="adj" fmla="val 7692"/>
+              <a:gd name="adj" fmla="val 9524"/>
             </a:avLst>
           </a:prstGeom>
           <a:solidFill>
@@ -31867,14 +31924,14 @@
       </p:sp>
       <p:sp>
         <p:nvSpPr>
-          <p:cNvPr id="34" name="Text 32"/>
-          <p:cNvSpPr/>
-          <p:nvPr/>
-        </p:nvSpPr>
-        <p:spPr>
-          <a:xfrm>
-            <a:off x="2124837" y="4169664"/>
-            <a:ext cx="685800" cy="475488"/>
+          <p:cNvPr id="37" name="Text 35"/>
+          <p:cNvSpPr/>
+          <p:nvPr/>
+        </p:nvSpPr>
+        <p:spPr>
+          <a:xfrm>
+            <a:off x="2023872" y="4169664"/>
+            <a:ext cx="685800" cy="384048"/>
           </a:xfrm>
           <a:prstGeom prst="rect">
             <a:avLst/>
@@ -31898,7 +31955,7 @@
                 <a:ea typeface="Trebuchet MS" pitchFamily="34" charset="-122"/>
                 <a:cs typeface="Trebuchet MS" pitchFamily="34" charset="-120"/>
               </a:rPr>
-              <a:t>p</a:t>
+              <a:t>t</a:t>
             </a:r>
             <a:endParaRPr lang="en-US" sz="900" dirty="0"/>
           </a:p>
@@ -31906,18 +31963,18 @@
       </p:sp>
       <p:sp>
         <p:nvSpPr>
-          <p:cNvPr id="35" name="Shape 33"/>
-          <p:cNvSpPr/>
-          <p:nvPr/>
-        </p:nvSpPr>
-        <p:spPr>
-          <a:xfrm>
-            <a:off x="3033522" y="4169664"/>
-            <a:ext cx="685800" cy="475488"/>
+          <p:cNvPr id="38" name="Shape 36"/>
+          <p:cNvSpPr/>
+          <p:nvPr/>
+        </p:nvSpPr>
+        <p:spPr>
+          <a:xfrm>
+            <a:off x="2831592" y="4169664"/>
+            <a:ext cx="685800" cy="384048"/>
           </a:xfrm>
           <a:prstGeom prst="rect">
             <a:avLst>
-              <a:gd name="adj" fmla="val 7692"/>
+              <a:gd name="adj" fmla="val 9524"/>
             </a:avLst>
           </a:prstGeom>
           <a:solidFill>
@@ -31933,14 +31990,14 @@
       </p:sp>
       <p:sp>
         <p:nvSpPr>
-          <p:cNvPr id="36" name="Text 34"/>
-          <p:cNvSpPr/>
-          <p:nvPr/>
-        </p:nvSpPr>
-        <p:spPr>
-          <a:xfrm>
-            <a:off x="3033522" y="4169664"/>
-            <a:ext cx="685800" cy="475488"/>
+          <p:cNvPr id="39" name="Text 37"/>
+          <p:cNvSpPr/>
+          <p:nvPr/>
+        </p:nvSpPr>
+        <p:spPr>
+          <a:xfrm>
+            <a:off x="2831592" y="4169664"/>
+            <a:ext cx="685800" cy="384048"/>
           </a:xfrm>
           <a:prstGeom prst="rect">
             <a:avLst/>
@@ -31964,7 +32021,7 @@
                 <a:ea typeface="Trebuchet MS" pitchFamily="34" charset="-122"/>
                 <a:cs typeface="Trebuchet MS" pitchFamily="34" charset="-120"/>
               </a:rPr>
-              <a:t>r</a:t>
+              <a:t>e</a:t>
             </a:r>
             <a:endParaRPr lang="en-US" sz="900" dirty="0"/>
           </a:p>
@@ -31972,18 +32029,18 @@
       </p:sp>
       <p:sp>
         <p:nvSpPr>
-          <p:cNvPr id="37" name="Shape 35"/>
-          <p:cNvSpPr/>
-          <p:nvPr/>
-        </p:nvSpPr>
-        <p:spPr>
-          <a:xfrm>
-            <a:off x="3942207" y="4169664"/>
-            <a:ext cx="685800" cy="475488"/>
+          <p:cNvPr id="40" name="Shape 38"/>
+          <p:cNvSpPr/>
+          <p:nvPr/>
+        </p:nvSpPr>
+        <p:spPr>
+          <a:xfrm>
+            <a:off x="3639312" y="4169664"/>
+            <a:ext cx="685800" cy="384048"/>
           </a:xfrm>
           <a:prstGeom prst="rect">
             <a:avLst>
-              <a:gd name="adj" fmla="val 7692"/>
+              <a:gd name="adj" fmla="val 9524"/>
             </a:avLst>
           </a:prstGeom>
           <a:solidFill>
@@ -31999,14 +32056,14 @@
       </p:sp>
       <p:sp>
         <p:nvSpPr>
-          <p:cNvPr id="38" name="Text 36"/>
-          <p:cNvSpPr/>
-          <p:nvPr/>
-        </p:nvSpPr>
-        <p:spPr>
-          <a:xfrm>
-            <a:off x="3942207" y="4169664"/>
-            <a:ext cx="685800" cy="475488"/>
+          <p:cNvPr id="41" name="Text 39"/>
+          <p:cNvSpPr/>
+          <p:nvPr/>
+        </p:nvSpPr>
+        <p:spPr>
+          <a:xfrm>
+            <a:off x="3639312" y="4169664"/>
+            <a:ext cx="685800" cy="384048"/>
           </a:xfrm>
           <a:prstGeom prst="rect">
             <a:avLst/>
@@ -32030,7 +32087,7 @@
                 <a:ea typeface="Trebuchet MS" pitchFamily="34" charset="-122"/>
                 <a:cs typeface="Trebuchet MS" pitchFamily="34" charset="-120"/>
               </a:rPr>
-              <a:t>e</a:t>
+              <a:t>n</a:t>
             </a:r>
             <a:endParaRPr lang="en-US" sz="900" dirty="0"/>
           </a:p>
@@ -32038,18 +32095,18 @@
       </p:sp>
       <p:sp>
         <p:nvSpPr>
-          <p:cNvPr id="39" name="Shape 37"/>
-          <p:cNvSpPr/>
-          <p:nvPr/>
-        </p:nvSpPr>
-        <p:spPr>
-          <a:xfrm>
-            <a:off x="4850892" y="4169664"/>
-            <a:ext cx="685800" cy="475488"/>
+          <p:cNvPr id="42" name="Shape 40"/>
+          <p:cNvSpPr/>
+          <p:nvPr/>
+        </p:nvSpPr>
+        <p:spPr>
+          <a:xfrm>
+            <a:off x="4447032" y="4169664"/>
+            <a:ext cx="685800" cy="384048"/>
           </a:xfrm>
           <a:prstGeom prst="rect">
             <a:avLst>
-              <a:gd name="adj" fmla="val 7692"/>
+              <a:gd name="adj" fmla="val 9524"/>
             </a:avLst>
           </a:prstGeom>
           <a:solidFill>
@@ -32065,14 +32122,14 @@
       </p:sp>
       <p:sp>
         <p:nvSpPr>
-          <p:cNvPr id="40" name="Text 38"/>
-          <p:cNvSpPr/>
-          <p:nvPr/>
-        </p:nvSpPr>
-        <p:spPr>
-          <a:xfrm>
-            <a:off x="4850892" y="4169664"/>
-            <a:ext cx="685800" cy="475488"/>
+          <p:cNvPr id="43" name="Text 41"/>
+          <p:cNvSpPr/>
+          <p:nvPr/>
+        </p:nvSpPr>
+        <p:spPr>
+          <a:xfrm>
+            <a:off x="4447032" y="4169664"/>
+            <a:ext cx="685800" cy="384048"/>
           </a:xfrm>
           <a:prstGeom prst="rect">
             <a:avLst/>
@@ -32096,7 +32153,7 @@
                 <a:ea typeface="Trebuchet MS" pitchFamily="34" charset="-122"/>
                 <a:cs typeface="Trebuchet MS" pitchFamily="34" charset="-120"/>
               </a:rPr>
-              <a:t>t</a:t>
+              <a:t>d</a:t>
             </a:r>
             <a:endParaRPr lang="en-US" sz="900" dirty="0"/>
           </a:p>
@@ -32104,18 +32161,18 @@
       </p:sp>
       <p:sp>
         <p:nvSpPr>
-          <p:cNvPr id="41" name="Shape 39"/>
-          <p:cNvSpPr/>
-          <p:nvPr/>
-        </p:nvSpPr>
-        <p:spPr>
-          <a:xfrm>
-            <a:off x="5759577" y="4169664"/>
-            <a:ext cx="685800" cy="475488"/>
+          <p:cNvPr id="44" name="Shape 42"/>
+          <p:cNvSpPr/>
+          <p:nvPr/>
+        </p:nvSpPr>
+        <p:spPr>
+          <a:xfrm>
+            <a:off x="5254752" y="4169664"/>
+            <a:ext cx="685800" cy="384048"/>
           </a:xfrm>
           <a:prstGeom prst="rect">
             <a:avLst>
-              <a:gd name="adj" fmla="val 7692"/>
+              <a:gd name="adj" fmla="val 9524"/>
             </a:avLst>
           </a:prstGeom>
           <a:solidFill>
@@ -32131,14 +32188,14 @@
       </p:sp>
       <p:sp>
         <p:nvSpPr>
-          <p:cNvPr id="42" name="Text 40"/>
-          <p:cNvSpPr/>
-          <p:nvPr/>
-        </p:nvSpPr>
-        <p:spPr>
-          <a:xfrm>
-            <a:off x="5759577" y="4169664"/>
-            <a:ext cx="685800" cy="475488"/>
+          <p:cNvPr id="45" name="Text 43"/>
+          <p:cNvSpPr/>
+          <p:nvPr/>
+        </p:nvSpPr>
+        <p:spPr>
+          <a:xfrm>
+            <a:off x="5254752" y="4169664"/>
+            <a:ext cx="685800" cy="384048"/>
           </a:xfrm>
           <a:prstGeom prst="rect">
             <a:avLst/>
@@ -32170,18 +32227,18 @@
       </p:sp>
       <p:sp>
         <p:nvSpPr>
-          <p:cNvPr id="43" name="Shape 41"/>
-          <p:cNvSpPr/>
-          <p:nvPr/>
-        </p:nvSpPr>
-        <p:spPr>
-          <a:xfrm>
-            <a:off x="6668262" y="4169664"/>
-            <a:ext cx="685800" cy="475488"/>
+          <p:cNvPr id="46" name="Shape 44"/>
+          <p:cNvSpPr/>
+          <p:nvPr/>
+        </p:nvSpPr>
+        <p:spPr>
+          <a:xfrm>
+            <a:off x="6062472" y="4169664"/>
+            <a:ext cx="685800" cy="384048"/>
           </a:xfrm>
           <a:prstGeom prst="rect">
             <a:avLst>
-              <a:gd name="adj" fmla="val 7692"/>
+              <a:gd name="adj" fmla="val 9524"/>
             </a:avLst>
           </a:prstGeom>
           <a:solidFill>
@@ -32197,14 +32254,14 @@
       </p:sp>
       <p:sp>
         <p:nvSpPr>
-          <p:cNvPr id="44" name="Text 42"/>
-          <p:cNvSpPr/>
-          <p:nvPr/>
-        </p:nvSpPr>
-        <p:spPr>
-          <a:xfrm>
-            <a:off x="6668262" y="4169664"/>
-            <a:ext cx="685800" cy="475488"/>
+          <p:cNvPr id="47" name="Text 45"/>
+          <p:cNvSpPr/>
+          <p:nvPr/>
+        </p:nvSpPr>
+        <p:spPr>
+          <a:xfrm>
+            <a:off x="6062472" y="4169664"/>
+            <a:ext cx="685800" cy="384048"/>
           </a:xfrm>
           <a:prstGeom prst="rect">
             <a:avLst/>
@@ -32236,18 +32293,18 @@
       </p:sp>
       <p:sp>
         <p:nvSpPr>
-          <p:cNvPr id="45" name="Shape 43"/>
-          <p:cNvSpPr/>
-          <p:nvPr/>
-        </p:nvSpPr>
-        <p:spPr>
-          <a:xfrm>
-            <a:off x="7576947" y="4169664"/>
-            <a:ext cx="685800" cy="475488"/>
+          <p:cNvPr id="48" name="Shape 46"/>
+          <p:cNvSpPr/>
+          <p:nvPr/>
+        </p:nvSpPr>
+        <p:spPr>
+          <a:xfrm>
+            <a:off x="6870192" y="4169664"/>
+            <a:ext cx="685800" cy="384048"/>
           </a:xfrm>
           <a:prstGeom prst="rect">
             <a:avLst>
-              <a:gd name="adj" fmla="val 7692"/>
+              <a:gd name="adj" fmla="val 9524"/>
             </a:avLst>
           </a:prstGeom>
           <a:solidFill>
@@ -32263,14 +32320,14 @@
       </p:sp>
       <p:sp>
         <p:nvSpPr>
-          <p:cNvPr id="46" name="Text 44"/>
-          <p:cNvSpPr/>
-          <p:nvPr/>
-        </p:nvSpPr>
-        <p:spPr>
-          <a:xfrm>
-            <a:off x="7576947" y="4169664"/>
-            <a:ext cx="685800" cy="475488"/>
+          <p:cNvPr id="49" name="Text 47"/>
+          <p:cNvSpPr/>
+          <p:nvPr/>
+        </p:nvSpPr>
+        <p:spPr>
+          <a:xfrm>
+            <a:off x="6870192" y="4169664"/>
+            <a:ext cx="685800" cy="384048"/>
           </a:xfrm>
           <a:prstGeom prst="rect">
             <a:avLst/>
@@ -32294,7 +32351,112 @@
                 <a:ea typeface="Trebuchet MS" pitchFamily="34" charset="-122"/>
                 <a:cs typeface="Trebuchet MS" pitchFamily="34" charset="-120"/>
               </a:rPr>
-              <a:t>d</a:t>
+              <a:t>c</a:t>
+            </a:r>
+            <a:endParaRPr lang="en-US" sz="900" dirty="0"/>
+          </a:p>
+        </p:txBody>
+      </p:sp>
+      <p:sp>
+        <p:nvSpPr>
+          <p:cNvPr id="50" name="Text 48"/>
+          <p:cNvSpPr/>
+          <p:nvPr/>
+        </p:nvSpPr>
+        <p:spPr>
+          <a:xfrm>
+            <a:off x="6870192" y="4572000"/>
+            <a:ext cx="685800" cy="219456"/>
+          </a:xfrm>
+          <a:prstGeom prst="rect">
+            <a:avLst/>
+          </a:prstGeom>
+          <a:noFill/>
+          <a:ln/>
+        </p:spPr>
+        <p:txBody>
+          <a:bodyPr wrap="square" lIns="0" tIns="0" rIns="0" bIns="0" rtlCol="0" anchor="t"/>
+          <a:lstStyle/>
+          <a:p>
+            <a:pPr algn="ctr" indent="0" marL="0">
+              <a:buNone/>
+            </a:pPr>
+            <a:r>
+              <a:rPr lang="en-US" sz="750" i="1" dirty="0">
+                <a:solidFill>
+                  <a:srgbClr val="94A3B8"/>
+                </a:solidFill>
+                <a:latin typeface="Calibri" pitchFamily="34" charset="0"/>
+                <a:ea typeface="Calibri" pitchFamily="34" charset="-122"/>
+                <a:cs typeface="Calibri" pitchFamily="34" charset="-120"/>
+              </a:rPr>
+              <a:t>/s/</a:t>
+            </a:r>
+            <a:endParaRPr lang="en-US" sz="750" dirty="0"/>
+          </a:p>
+        </p:txBody>
+      </p:sp>
+      <p:sp>
+        <p:nvSpPr>
+          <p:cNvPr id="51" name="Shape 49"/>
+          <p:cNvSpPr/>
+          <p:nvPr/>
+        </p:nvSpPr>
+        <p:spPr>
+          <a:xfrm>
+            <a:off x="7677912" y="4169664"/>
+            <a:ext cx="685800" cy="384048"/>
+          </a:xfrm>
+          <a:prstGeom prst="rect">
+            <a:avLst>
+              <a:gd name="adj" fmla="val 9524"/>
+            </a:avLst>
+          </a:prstGeom>
+          <a:solidFill>
+            <a:srgbClr val="FFFFFF"/>
+          </a:solidFill>
+          <a:ln w="12700">
+            <a:solidFill>
+              <a:srgbClr val="DB2777"/>
+            </a:solidFill>
+            <a:prstDash val="solid"/>
+          </a:ln>
+        </p:spPr>
+      </p:sp>
+      <p:sp>
+        <p:nvSpPr>
+          <p:cNvPr id="52" name="Text 50"/>
+          <p:cNvSpPr/>
+          <p:nvPr/>
+        </p:nvSpPr>
+        <p:spPr>
+          <a:xfrm>
+            <a:off x="7677912" y="4169664"/>
+            <a:ext cx="685800" cy="384048"/>
+          </a:xfrm>
+          <a:prstGeom prst="rect">
+            <a:avLst/>
+          </a:prstGeom>
+          <a:noFill/>
+          <a:ln/>
+        </p:spPr>
+        <p:txBody>
+          <a:bodyPr wrap="square" lIns="0" tIns="0" rIns="0" bIns="0" rtlCol="0" anchor="ctr"/>
+          <a:lstStyle/>
+          <a:p>
+            <a:pPr algn="ctr" indent="0" marL="0">
+              <a:buNone/>
+            </a:pPr>
+            <a:r>
+              <a:rPr lang="en-US" sz="900" b="1" dirty="0">
+                <a:solidFill>
+                  <a:srgbClr val="9D174D"/>
+                </a:solidFill>
+                <a:latin typeface="Trebuchet MS" pitchFamily="34" charset="0"/>
+                <a:ea typeface="Trebuchet MS" pitchFamily="34" charset="-122"/>
+                <a:cs typeface="Trebuchet MS" pitchFamily="34" charset="-120"/>
+              </a:rPr>
+              <a:t>y</a:t>
             </a:r>
             <a:endParaRPr lang="en-US" sz="900" dirty="0"/>
           </a:p>
@@ -32586,7 +32748,7 @@
                 <a:ea typeface="Calibri" pitchFamily="34" charset="-122"/>
                 <a:cs typeface="Calibri" pitchFamily="34" charset="-120"/>
               </a:rPr>
-              <a:t>Word Labs  •  wordlabs.app  •  Root: 'tend' = to stretch, reach, or extend</a:t>
+              <a:t>Word Labs  •  wordlabs.app  •  Root: 'tend' = stretch, reach, or extend</a:t>
             </a:r>
             <a:endParaRPr lang="en-US" sz="800" dirty="0"/>
           </a:p>
@@ -33755,7 +33917,7 @@
                 <a:ea typeface="Calibri" pitchFamily="34" charset="-122"/>
                 <a:cs typeface="Calibri" pitchFamily="34" charset="-120"/>
               </a:rPr>
-              <a:t>Word Labs  •  wordlabs.app  •  Root: 'tend' = to stretch, reach, or extend</a:t>
+              <a:t>Word Labs  •  wordlabs.app  •  Root: 'tend' = stretch, reach, or extend</a:t>
             </a:r>
             <a:endParaRPr lang="en-US" sz="800" dirty="0"/>
           </a:p>
@@ -34643,7 +34805,7 @@
                 <a:ea typeface="Trebuchet MS" pitchFamily="34" charset="-122"/>
                 <a:cs typeface="Trebuchet MS" pitchFamily="34" charset="-120"/>
               </a:rPr>
-              <a:t>-tion</a:t>
+              <a:t>-ion</a:t>
             </a:r>
             <a:endParaRPr lang="en-US" sz="1300" dirty="0"/>
           </a:p>
@@ -35297,7 +35459,7 @@
                 <a:ea typeface="Trebuchet MS" pitchFamily="34" charset="-122"/>
                 <a:cs typeface="Trebuchet MS" pitchFamily="34" charset="-120"/>
               </a:rPr>
-              <a:t>attention</a:t>
+              <a:t>tender</a:t>
             </a:r>
             <a:endParaRPr lang="en-US" sz="1200" dirty="0"/>
           </a:p>
@@ -35363,7 +35525,7 @@
                 <a:ea typeface="Trebuchet MS" pitchFamily="34" charset="-122"/>
                 <a:cs typeface="Trebuchet MS" pitchFamily="34" charset="-120"/>
               </a:rPr>
-              <a:t>extension</a:t>
+              <a:t>attend</a:t>
             </a:r>
             <a:endParaRPr lang="en-US" sz="1200" dirty="0"/>
           </a:p>
@@ -35655,7 +35817,7 @@
                 <a:ea typeface="Calibri" pitchFamily="34" charset="-122"/>
                 <a:cs typeface="Calibri" pitchFamily="34" charset="-120"/>
               </a:rPr>
-              <a:t>Word Labs  •  wordlabs.app  •  Root: 'tend' = to stretch, reach, or extend</a:t>
+              <a:t>Word Labs  •  wordlabs.app  •  Root: 'tend' = stretch, reach, or extend</a:t>
             </a:r>
             <a:endParaRPr lang="en-US" sz="800" dirty="0"/>
           </a:p>
@@ -35819,7 +35981,7 @@
                 <a:ea typeface="Calibri" pitchFamily="34" charset="-122"/>
                 <a:cs typeface="Calibri" pitchFamily="34" charset="-120"/>
               </a:rPr>
-              <a:t>The core part of a word carrying its basic meaning. For example, 'tend' means 'to stretch, reach, or extend'.</a:t>
+              <a:t>The core part of a word carrying its basic meaning. For example, 'tend' means 'stretch, reach, or extend'.</a:t>
             </a:r>
             <a:endParaRPr lang="en-US" sz="1350" dirty="0"/>
           </a:p>
@@ -36439,7 +36601,7 @@
                 <a:ea typeface="Calibri" pitchFamily="34" charset="-122"/>
                 <a:cs typeface="Calibri" pitchFamily="34" charset="-120"/>
               </a:rPr>
-              <a:t>Word Labs  •  wordlabs.app  •  Root: 'tend' = to stretch, reach, or extend</a:t>
+              <a:t>Word Labs  •  wordlabs.app  •  Root: 'tend' = stretch, reach, or extend</a:t>
             </a:r>
             <a:endParaRPr lang="en-US" sz="800" dirty="0"/>
           </a:p>
@@ -36690,7 +36852,7 @@
                 <a:ea typeface="Calibri" pitchFamily="34" charset="-122"/>
                 <a:cs typeface="Calibri" pitchFamily="34" charset="-120"/>
               </a:rPr>
-              <a:t>2.  The word 'pretend' means to pay close attention to something.</a:t>
+              <a:t>2.  The word 'attend' contains the root 'tend'.</a:t>
             </a:r>
             <a:endParaRPr lang="en-US" sz="1300" dirty="0"/>
           </a:p>
@@ -36713,11 +36875,11 @@
             </a:avLst>
           </a:prstGeom>
           <a:solidFill>
-            <a:srgbClr val="FEE2E2"/>
-          </a:solidFill>
-          <a:ln w="12700">
-            <a:solidFill>
-              <a:srgbClr val="DC2626"/>
+            <a:srgbClr val="DCFCE7"/>
+          </a:solidFill>
+          <a:ln w="12700">
+            <a:solidFill>
+              <a:srgbClr val="16A34A"/>
             </a:solidFill>
             <a:prstDash val="solid"/>
           </a:ln>
@@ -36750,13 +36912,13 @@
             <a:r>
               <a:rPr lang="en-US" sz="1100" b="1" dirty="0">
                 <a:solidFill>
-                  <a:srgbClr val="DC2626"/>
+                  <a:srgbClr val="16A34A"/>
                 </a:solidFill>
                 <a:latin typeface="Trebuchet MS" pitchFamily="34" charset="0"/>
                 <a:ea typeface="Trebuchet MS" pitchFamily="34" charset="-122"/>
                 <a:cs typeface="Trebuchet MS" pitchFamily="34" charset="-120"/>
               </a:rPr>
-              <a:t>FALSE</a:t>
+              <a:t>TRUE</a:t>
             </a:r>
             <a:endParaRPr lang="en-US" sz="1100" dirty="0"/>
           </a:p>
@@ -36829,7 +36991,7 @@
                 <a:ea typeface="Calibri" pitchFamily="34" charset="-122"/>
                 <a:cs typeface="Calibri" pitchFamily="34" charset="-120"/>
               </a:rPr>
-              <a:t>3.  The word 'extend' contains the root 'tend' meaning to stretch.</a:t>
+              <a:t>3.  The word 'pretend' means to stretch something out to make it longer.</a:t>
             </a:r>
             <a:endParaRPr lang="en-US" sz="1300" dirty="0"/>
           </a:p>
@@ -36852,11 +37014,11 @@
             </a:avLst>
           </a:prstGeom>
           <a:solidFill>
-            <a:srgbClr val="DCFCE7"/>
-          </a:solidFill>
-          <a:ln w="12700">
-            <a:solidFill>
-              <a:srgbClr val="16A34A"/>
+            <a:srgbClr val="FEE2E2"/>
+          </a:solidFill>
+          <a:ln w="12700">
+            <a:solidFill>
+              <a:srgbClr val="DC2626"/>
             </a:solidFill>
             <a:prstDash val="solid"/>
           </a:ln>
@@ -36889,13 +37051,13 @@
             <a:r>
               <a:rPr lang="en-US" sz="1100" b="1" dirty="0">
                 <a:solidFill>
-                  <a:srgbClr val="16A34A"/>
+                  <a:srgbClr val="DC2626"/>
                 </a:solidFill>
                 <a:latin typeface="Trebuchet MS" pitchFamily="34" charset="0"/>
                 <a:ea typeface="Trebuchet MS" pitchFamily="34" charset="-122"/>
                 <a:cs typeface="Trebuchet MS" pitchFamily="34" charset="-120"/>
               </a:rPr>
-              <a:t>TRUE</a:t>
+              <a:t>FALSE</a:t>
             </a:r>
             <a:endParaRPr lang="en-US" sz="1100" dirty="0"/>
           </a:p>
@@ -36968,7 +37130,7 @@
                 <a:ea typeface="Calibri" pitchFamily="34" charset="-122"/>
                 <a:cs typeface="Calibri" pitchFamily="34" charset="-120"/>
               </a:rPr>
-              <a:t>4.  The prefix 'at' in 'attend' helps mean reaching toward something.</a:t>
+              <a:t>4.  The root 'tend' originally came from a Greek word.</a:t>
             </a:r>
             <a:endParaRPr lang="en-US" sz="1300" dirty="0"/>
           </a:p>
@@ -36991,11 +37153,11 @@
             </a:avLst>
           </a:prstGeom>
           <a:solidFill>
-            <a:srgbClr val="DCFCE7"/>
-          </a:solidFill>
-          <a:ln w="12700">
-            <a:solidFill>
-              <a:srgbClr val="16A34A"/>
+            <a:srgbClr val="FEE2E2"/>
+          </a:solidFill>
+          <a:ln w="12700">
+            <a:solidFill>
+              <a:srgbClr val="DC2626"/>
             </a:solidFill>
             <a:prstDash val="solid"/>
           </a:ln>
@@ -37028,13 +37190,13 @@
             <a:r>
               <a:rPr lang="en-US" sz="1100" b="1" dirty="0">
                 <a:solidFill>
-                  <a:srgbClr val="16A34A"/>
+                  <a:srgbClr val="DC2626"/>
                 </a:solidFill>
                 <a:latin typeface="Trebuchet MS" pitchFamily="34" charset="0"/>
                 <a:ea typeface="Trebuchet MS" pitchFamily="34" charset="-122"/>
                 <a:cs typeface="Trebuchet MS" pitchFamily="34" charset="-120"/>
               </a:rPr>
-              <a:t>TRUE</a:t>
+              <a:t>FALSE</a:t>
             </a:r>
             <a:endParaRPr lang="en-US" sz="1100" dirty="0"/>
           </a:p>
@@ -37107,7 +37269,7 @@
                 <a:ea typeface="Calibri" pitchFamily="34" charset="-122"/>
                 <a:cs typeface="Calibri" pitchFamily="34" charset="-120"/>
               </a:rPr>
-              <a:t>5.  The word 'intend' means to forget about a plan completely.</a:t>
+              <a:t>5.  The prefix 'ex' in 'extend' means out or beyond.</a:t>
             </a:r>
             <a:endParaRPr lang="en-US" sz="1300" dirty="0"/>
           </a:p>
@@ -37130,11 +37292,11 @@
             </a:avLst>
           </a:prstGeom>
           <a:solidFill>
-            <a:srgbClr val="FEE2E2"/>
-          </a:solidFill>
-          <a:ln w="12700">
-            <a:solidFill>
-              <a:srgbClr val="DC2626"/>
+            <a:srgbClr val="DCFCE7"/>
+          </a:solidFill>
+          <a:ln w="12700">
+            <a:solidFill>
+              <a:srgbClr val="16A34A"/>
             </a:solidFill>
             <a:prstDash val="solid"/>
           </a:ln>
@@ -37167,13 +37329,13 @@
             <a:r>
               <a:rPr lang="en-US" sz="1100" b="1" dirty="0">
                 <a:solidFill>
-                  <a:srgbClr val="DC2626"/>
+                  <a:srgbClr val="16A34A"/>
                 </a:solidFill>
                 <a:latin typeface="Trebuchet MS" pitchFamily="34" charset="0"/>
                 <a:ea typeface="Trebuchet MS" pitchFamily="34" charset="-122"/>
                 <a:cs typeface="Trebuchet MS" pitchFamily="34" charset="-120"/>
               </a:rPr>
-              <a:t>FALSE</a:t>
+              <a:t>TRUE</a:t>
             </a:r>
             <a:endParaRPr lang="en-US" sz="1100" dirty="0"/>
           </a:p>
@@ -37465,7 +37627,7 @@
                 <a:ea typeface="Calibri" pitchFamily="34" charset="-122"/>
                 <a:cs typeface="Calibri" pitchFamily="34" charset="-120"/>
               </a:rPr>
-              <a:t>Word Labs  •  wordlabs.app  •  Root: 'tend' = to stretch, reach, or extend</a:t>
+              <a:t>Word Labs  •  wordlabs.app  •  Root: 'tend' = stretch, reach, or extend</a:t>
             </a:r>
             <a:endParaRPr lang="en-US" sz="800" dirty="0"/>
           </a:p>
@@ -37602,7 +37764,7 @@
                 <a:ea typeface="Trebuchet MS" pitchFamily="34" charset="-122"/>
                 <a:cs typeface="Trebuchet MS" pitchFamily="34" charset="-120"/>
               </a:rPr>
-              <a:t>to stretch, reach, or extend</a:t>
+              <a:t>stretch, reach, or extend</a:t>
             </a:r>
             <a:endParaRPr lang="en-US" sz="2000" dirty="0"/>
           </a:p>
@@ -38142,7 +38304,7 @@
                 <a:ea typeface="Trebuchet MS" pitchFamily="34" charset="-122"/>
                 <a:cs typeface="Trebuchet MS" pitchFamily="34" charset="-120"/>
               </a:rPr>
-              <a:t>attention</a:t>
+              <a:t>tender</a:t>
             </a:r>
             <a:endParaRPr lang="en-US" sz="1300" dirty="0"/>
           </a:p>
@@ -38434,7 +38596,7 @@
                 <a:ea typeface="Calibri" pitchFamily="34" charset="-122"/>
                 <a:cs typeface="Calibri" pitchFamily="34" charset="-120"/>
               </a:rPr>
-              <a:t>Word Labs  •  wordlabs.app  •  Root: 'tend' = to stretch, reach, or extend</a:t>
+              <a:t>Word Labs  •  wordlabs.app  •  Root: 'tend' = stretch, reach, or extend</a:t>
             </a:r>
             <a:endParaRPr lang="en-US" sz="800" dirty="0"/>
           </a:p>
@@ -39322,7 +39484,7 @@
                 <a:ea typeface="Trebuchet MS" pitchFamily="34" charset="-122"/>
                 <a:cs typeface="Trebuchet MS" pitchFamily="34" charset="-120"/>
               </a:rPr>
-              <a:t>-tion</a:t>
+              <a:t>-ion</a:t>
             </a:r>
             <a:endParaRPr lang="en-US" sz="1300" dirty="0"/>
           </a:p>
@@ -40208,7 +40370,7 @@
                 <a:ea typeface="Calibri" pitchFamily="34" charset="-122"/>
                 <a:cs typeface="Calibri" pitchFamily="34" charset="-120"/>
               </a:rPr>
-              <a:t>Word Labs  •  wordlabs.app  •  Root: 'tend' = to stretch, reach, or extend</a:t>
+              <a:t>Word Labs  •  wordlabs.app  •  Root: 'tend' = stretch, reach, or extend</a:t>
             </a:r>
             <a:endParaRPr lang="en-US" sz="800" dirty="0"/>
           </a:p>
@@ -40525,7 +40687,7 @@
                 <a:ea typeface="Calibri" pitchFamily="34" charset="-122"/>
                 <a:cs typeface="Calibri" pitchFamily="34" charset="-120"/>
               </a:rPr>
-              <a:t>To make something longer, bigger, or to stretch it out further.</a:t>
+              <a:t>To stretch or make something longer or bigger.</a:t>
             </a:r>
             <a:endParaRPr lang="en-US" sz="1200" dirty="0"/>
           </a:p>
@@ -40664,7 +40826,7 @@
                 <a:ea typeface="Calibri" pitchFamily="34" charset="-122"/>
                 <a:cs typeface="Calibri" pitchFamily="34" charset="-120"/>
               </a:rPr>
-              <a:t>When someone usually does something in a certain way, like having a tendency to laugh a lot.</a:t>
+              <a:t>When something or someone usually behaves in a certain way.</a:t>
             </a:r>
             <a:endParaRPr lang="en-US" sz="1200" dirty="0"/>
           </a:p>
@@ -40803,7 +40965,7 @@
                 <a:ea typeface="Calibri" pitchFamily="34" charset="-122"/>
                 <a:cs typeface="Calibri" pitchFamily="34" charset="-120"/>
               </a:rPr>
-              <a:t>To plan or mean to do something.</a:t>
+              <a:t>To plan to do something on purpose.</a:t>
             </a:r>
             <a:endParaRPr lang="en-US" sz="1200" dirty="0"/>
           </a:p>
@@ -40942,7 +41104,7 @@
                 <a:ea typeface="Calibri" pitchFamily="34" charset="-122"/>
                 <a:cs typeface="Calibri" pitchFamily="34" charset="-120"/>
               </a:rPr>
-              <a:t>To act as if something is true when it is not, like in imaginative play.</a:t>
+              <a:t>To act as if something is true when it is not, like playing make-believe.</a:t>
             </a:r>
             <a:endParaRPr lang="en-US" sz="1200" dirty="0"/>
           </a:p>
@@ -41081,7 +41243,7 @@
                 <a:ea typeface="Calibri" pitchFamily="34" charset="-122"/>
                 <a:cs typeface="Calibri" pitchFamily="34" charset="-120"/>
               </a:rPr>
-              <a:t>When you focus your mind carefully on something or someone.</a:t>
+              <a:t>Soft and gentle, or something that is easy to hurt.</a:t>
             </a:r>
             <a:endParaRPr lang="en-US" sz="1200" dirty="0"/>
           </a:p>
@@ -41154,7 +41316,7 @@
                 <a:ea typeface="Trebuchet MS" pitchFamily="34" charset="-122"/>
                 <a:cs typeface="Trebuchet MS" pitchFamily="34" charset="-120"/>
               </a:rPr>
-              <a:t>attention</a:t>
+              <a:t>tender</a:t>
             </a:r>
             <a:endParaRPr lang="en-US" sz="1200" dirty="0"/>
           </a:p>
@@ -41512,7 +41674,7 @@
                 <a:ea typeface="Calibri" pitchFamily="34" charset="-122"/>
                 <a:cs typeface="Calibri" pitchFamily="34" charset="-120"/>
               </a:rPr>
-              <a:t>Word Labs  •  wordlabs.app  •  Root: 'tend' = to stretch, reach, or extend</a:t>
+              <a:t>Word Labs  •  wordlabs.app  •  Root: 'tend' = stretch, reach, or extend</a:t>
             </a:r>
             <a:endParaRPr lang="en-US" sz="800" dirty="0"/>
           </a:p>
@@ -41715,7 +41877,7 @@
                 <a:ea typeface="Calibri" pitchFamily="34" charset="-122"/>
                 <a:cs typeface="Calibri" pitchFamily="34" charset="-120"/>
               </a:rPr>
-              <a:t>Please attend the school assembly tomorrow morning so you don't miss any important announcements.</a:t>
+              <a:t>We need to extend the table so everyone has enough room to sit down for dinner.</a:t>
             </a:r>
             <a:endParaRPr lang="en-US" sz="1500" dirty="0"/>
           </a:p>
@@ -41879,7 +42041,7 @@
                 <a:ea typeface="Calibri" pitchFamily="34" charset="-122"/>
                 <a:cs typeface="Calibri" pitchFamily="34" charset="-120"/>
               </a:rPr>
-              <a:t>She decided to extend her science project by adding an extra experiment to her report.</a:t>
+              <a:t>She didn't intend to break the vase — it was a complete accident.</a:t>
             </a:r>
             <a:endParaRPr lang="en-US" sz="1500" dirty="0"/>
           </a:p>
@@ -42043,7 +42205,7 @@
                 <a:ea typeface="Calibri" pitchFamily="34" charset="-122"/>
                 <a:cs typeface="Calibri" pitchFamily="34" charset="-120"/>
               </a:rPr>
-              <a:t>He didn't intend to knock over the paint, but it spilled all over the floor.</a:t>
+              <a:t>All students must attend the assembly in the hall tomorrow morning.</a:t>
             </a:r>
             <a:endParaRPr lang="en-US" sz="1500" dirty="0"/>
           </a:p>
